--- a/CLASE-04/01-CLASE-04-CKA.pptx
+++ b/CLASE-04/01-CLASE-04-CKA.pptx
@@ -3205,80 +3205,30 @@
           </a:p>
         </p:txBody>
       </p:sp>
-      <p:sp>
-        <p:nvSpPr>
-          <p:cNvPr id="4" name="Freeform 3"/>
-          <p:cNvSpPr/>
-          <p:nvPr/>
-        </p:nvSpPr>
-        <p:spPr>
-          <a:xfrm>
-            <a:off x="9720832" y="400000"/>
-            <a:ext cx="2242335" cy="2186114"/>
-          </a:xfrm>
-          <a:custGeom>
-            <a:avLst/>
-            <a:gdLst/>
-            <a:ahLst/>
-            <a:cxnLst/>
-            <a:rect l="l" t="t" r="r" b="b"/>
-            <a:pathLst>
-              <a:path w="2242335" h="2186114">
-                <a:moveTo>
-                  <a:pt x="1121168" y="0"/>
-                </a:moveTo>
-                <a:lnTo>
-                  <a:pt x="2020274" y="432986"/>
-                </a:lnTo>
-                <a:lnTo>
-                  <a:pt x="2242335" y="1405899"/>
-                </a:lnTo>
-                <a:lnTo>
-                  <a:pt x="1620134" y="2186114"/>
-                </a:lnTo>
-                <a:lnTo>
-                  <a:pt x="622201" y="2186114"/>
-                </a:lnTo>
-                <a:lnTo>
-                  <a:pt x="0" y="1405899"/>
-                </a:lnTo>
-                <a:lnTo>
-                  <a:pt x="222061" y="432986"/>
-                </a:lnTo>
-                <a:close/>
-              </a:path>
-            </a:pathLst>
-          </a:custGeom>
-          <a:noFill/>
-          <a:ln w="28575">
-            <a:solidFill>
-              <a:srgbClr val="26354E"/>
-            </a:solidFill>
-          </a:ln>
-          <a:effectLst/>
-        </p:spPr>
-        <p:style>
-          <a:lnRef idx="1">
-            <a:schemeClr val="accent1"/>
-          </a:lnRef>
-          <a:fillRef idx="3">
-            <a:schemeClr val="accent1"/>
-          </a:fillRef>
-          <a:effectRef idx="2">
-            <a:schemeClr val="accent1"/>
-          </a:effectRef>
-          <a:fontRef idx="minor">
-            <a:schemeClr val="lt1"/>
-          </a:fontRef>
-        </p:style>
-        <p:txBody>
-          <a:bodyPr rtlCol="0" anchor="ctr"/>
-          <a:lstStyle/>
-          <a:p>
-            <a:pPr algn="ctr"/>
-          </a:p>
-        </p:txBody>
-      </p:sp>
+      <p:pic>
+        <p:nvPicPr>
+          <p:cNvPr id="4" name="Picture 3" descr="kubernetes.png"/>
+          <p:cNvPicPr>
+            <a:picLocks noChangeAspect="1"/>
+          </p:cNvPicPr>
+          <p:nvPr/>
+        </p:nvPicPr>
+        <p:blipFill>
+          <a:blip r:embed="rId2"/>
+          <a:stretch>
+            <a:fillRect/>
+          </a:stretch>
+        </p:blipFill>
+        <p:spPr>
+          <a:xfrm>
+            <a:off x="9642000" y="1000000"/>
+            <a:ext cx="1650000" cy="1650000"/>
+          </a:xfrm>
+          <a:prstGeom prst="rect">
+            <a:avLst/>
+          </a:prstGeom>
+        </p:spPr>
+      </p:pic>
       <p:sp>
         <p:nvSpPr>
           <p:cNvPr id="5" name="TextBox 4"/>
@@ -4250,7 +4200,7 @@
         <p:spPr>
           <a:xfrm>
             <a:off x="620000" y="560000"/>
-            <a:ext cx="10952000" cy="620000"/>
+            <a:ext cx="10052000" cy="620000"/>
           </a:xfrm>
           <a:prstGeom prst="rect">
             <a:avLst/>
@@ -4471,9 +4421,33 @@
           </a:p>
         </p:txBody>
       </p:sp>
-      <p:sp>
-        <p:nvSpPr>
-          <p:cNvPr id="8" name="Rectangle 7"/>
+      <p:pic>
+        <p:nvPicPr>
+          <p:cNvPr id="8" name="Picture 7" descr="kubernetes.png"/>
+          <p:cNvPicPr>
+            <a:picLocks noChangeAspect="1"/>
+          </p:cNvPicPr>
+          <p:nvPr/>
+        </p:nvPicPr>
+        <p:blipFill>
+          <a:blip r:embed="rId2"/>
+          <a:stretch>
+            <a:fillRect/>
+          </a:stretch>
+        </p:blipFill>
+        <p:spPr>
+          <a:xfrm>
+            <a:off x="10932000" y="275000"/>
+            <a:ext cx="640000" cy="640000"/>
+          </a:xfrm>
+          <a:prstGeom prst="rect">
+            <a:avLst/>
+          </a:prstGeom>
+        </p:spPr>
+      </p:pic>
+      <p:sp>
+        <p:nvSpPr>
+          <p:cNvPr id="9" name="Rectangle 8"/>
           <p:cNvSpPr/>
           <p:nvPr/>
         </p:nvSpPr>
@@ -4519,7 +4493,7 @@
       </p:sp>
       <p:sp>
         <p:nvSpPr>
-          <p:cNvPr id="9" name="Rectangle 8"/>
+          <p:cNvPr id="10" name="Rectangle 9"/>
           <p:cNvSpPr/>
           <p:nvPr/>
         </p:nvSpPr>
@@ -4565,7 +4539,7 @@
       </p:sp>
       <p:sp>
         <p:nvSpPr>
-          <p:cNvPr id="10" name="TextBox 9"/>
+          <p:cNvPr id="11" name="TextBox 10"/>
           <p:cNvSpPr txBox="1"/>
           <p:nvPr/>
         </p:nvSpPr>
@@ -4611,7 +4585,7 @@
       </p:sp>
       <p:sp>
         <p:nvSpPr>
-          <p:cNvPr id="11" name="TextBox 10"/>
+          <p:cNvPr id="12" name="TextBox 11"/>
           <p:cNvSpPr txBox="1"/>
           <p:nvPr/>
         </p:nvSpPr>
@@ -4657,7 +4631,7 @@
       </p:sp>
       <p:sp>
         <p:nvSpPr>
-          <p:cNvPr id="12" name="TextBox 11"/>
+          <p:cNvPr id="13" name="TextBox 12"/>
           <p:cNvSpPr txBox="1"/>
           <p:nvPr/>
         </p:nvSpPr>
@@ -4703,7 +4677,7 @@
       </p:sp>
       <p:sp>
         <p:nvSpPr>
-          <p:cNvPr id="13" name="Rectangle 12"/>
+          <p:cNvPr id="14" name="Rectangle 13"/>
           <p:cNvSpPr/>
           <p:nvPr/>
         </p:nvSpPr>
@@ -4749,7 +4723,7 @@
       </p:sp>
       <p:sp>
         <p:nvSpPr>
-          <p:cNvPr id="14" name="TextBox 13"/>
+          <p:cNvPr id="15" name="TextBox 14"/>
           <p:cNvSpPr txBox="1"/>
           <p:nvPr/>
         </p:nvSpPr>
@@ -4795,7 +4769,7 @@
       </p:sp>
       <p:sp>
         <p:nvSpPr>
-          <p:cNvPr id="15" name="TextBox 14"/>
+          <p:cNvPr id="16" name="TextBox 15"/>
           <p:cNvSpPr txBox="1"/>
           <p:nvPr/>
         </p:nvSpPr>
@@ -4841,7 +4815,7 @@
       </p:sp>
       <p:sp>
         <p:nvSpPr>
-          <p:cNvPr id="16" name="TextBox 15"/>
+          <p:cNvPr id="17" name="TextBox 16"/>
           <p:cNvSpPr txBox="1"/>
           <p:nvPr/>
         </p:nvSpPr>
@@ -4887,7 +4861,7 @@
       </p:sp>
       <p:sp>
         <p:nvSpPr>
-          <p:cNvPr id="17" name="Rectangle 16"/>
+          <p:cNvPr id="18" name="Rectangle 17"/>
           <p:cNvSpPr/>
           <p:nvPr/>
         </p:nvSpPr>
@@ -4933,7 +4907,7 @@
       </p:sp>
       <p:sp>
         <p:nvSpPr>
-          <p:cNvPr id="18" name="Rectangle 17"/>
+          <p:cNvPr id="19" name="Rectangle 18"/>
           <p:cNvSpPr/>
           <p:nvPr/>
         </p:nvSpPr>
@@ -4979,7 +4953,7 @@
       </p:sp>
       <p:sp>
         <p:nvSpPr>
-          <p:cNvPr id="19" name="TextBox 18"/>
+          <p:cNvPr id="20" name="TextBox 19"/>
           <p:cNvSpPr txBox="1"/>
           <p:nvPr/>
         </p:nvSpPr>
@@ -5025,7 +4999,7 @@
       </p:sp>
       <p:sp>
         <p:nvSpPr>
-          <p:cNvPr id="20" name="TextBox 19"/>
+          <p:cNvPr id="21" name="TextBox 20"/>
           <p:cNvSpPr txBox="1"/>
           <p:nvPr/>
         </p:nvSpPr>
@@ -5071,7 +5045,7 @@
       </p:sp>
       <p:sp>
         <p:nvSpPr>
-          <p:cNvPr id="21" name="TextBox 20"/>
+          <p:cNvPr id="22" name="TextBox 21"/>
           <p:cNvSpPr txBox="1"/>
           <p:nvPr/>
         </p:nvSpPr>
@@ -5117,7 +5091,7 @@
       </p:sp>
       <p:sp>
         <p:nvSpPr>
-          <p:cNvPr id="22" name="Rectangle 21"/>
+          <p:cNvPr id="23" name="Rectangle 22"/>
           <p:cNvSpPr/>
           <p:nvPr/>
         </p:nvSpPr>
@@ -5163,7 +5137,7 @@
       </p:sp>
       <p:sp>
         <p:nvSpPr>
-          <p:cNvPr id="23" name="TextBox 22"/>
+          <p:cNvPr id="24" name="TextBox 23"/>
           <p:cNvSpPr txBox="1"/>
           <p:nvPr/>
         </p:nvSpPr>
@@ -5209,7 +5183,7 @@
       </p:sp>
       <p:sp>
         <p:nvSpPr>
-          <p:cNvPr id="24" name="TextBox 23"/>
+          <p:cNvPr id="25" name="TextBox 24"/>
           <p:cNvSpPr txBox="1"/>
           <p:nvPr/>
         </p:nvSpPr>
@@ -5255,7 +5229,7 @@
       </p:sp>
       <p:sp>
         <p:nvSpPr>
-          <p:cNvPr id="25" name="TextBox 24"/>
+          <p:cNvPr id="26" name="TextBox 25"/>
           <p:cNvSpPr txBox="1"/>
           <p:nvPr/>
         </p:nvSpPr>
@@ -5301,7 +5275,7 @@
       </p:sp>
       <p:sp>
         <p:nvSpPr>
-          <p:cNvPr id="26" name="Rectangle 25"/>
+          <p:cNvPr id="27" name="Rectangle 26"/>
           <p:cNvSpPr/>
           <p:nvPr/>
         </p:nvSpPr>
@@ -5347,7 +5321,7 @@
       </p:sp>
       <p:sp>
         <p:nvSpPr>
-          <p:cNvPr id="27" name="Rectangle 26"/>
+          <p:cNvPr id="28" name="Rectangle 27"/>
           <p:cNvSpPr/>
           <p:nvPr/>
         </p:nvSpPr>
@@ -5393,7 +5367,7 @@
       </p:sp>
       <p:sp>
         <p:nvSpPr>
-          <p:cNvPr id="28" name="TextBox 27"/>
+          <p:cNvPr id="29" name="TextBox 28"/>
           <p:cNvSpPr txBox="1"/>
           <p:nvPr/>
         </p:nvSpPr>
@@ -5439,7 +5413,7 @@
       </p:sp>
       <p:sp>
         <p:nvSpPr>
-          <p:cNvPr id="29" name="TextBox 28"/>
+          <p:cNvPr id="30" name="TextBox 29"/>
           <p:cNvSpPr txBox="1"/>
           <p:nvPr/>
         </p:nvSpPr>
@@ -5485,7 +5459,7 @@
       </p:sp>
       <p:sp>
         <p:nvSpPr>
-          <p:cNvPr id="30" name="TextBox 29"/>
+          <p:cNvPr id="31" name="TextBox 30"/>
           <p:cNvSpPr txBox="1"/>
           <p:nvPr/>
         </p:nvSpPr>
@@ -5531,7 +5505,7 @@
       </p:sp>
       <p:sp>
         <p:nvSpPr>
-          <p:cNvPr id="31" name="Rounded Rectangle 30"/>
+          <p:cNvPr id="32" name="Rounded Rectangle 31"/>
           <p:cNvSpPr/>
           <p:nvPr/>
         </p:nvSpPr>
@@ -5581,7 +5555,7 @@
       </p:sp>
       <p:sp>
         <p:nvSpPr>
-          <p:cNvPr id="32" name="Rectangle 31"/>
+          <p:cNvPr id="33" name="Rectangle 32"/>
           <p:cNvSpPr/>
           <p:nvPr/>
         </p:nvSpPr>
@@ -5627,7 +5601,7 @@
       </p:sp>
       <p:sp>
         <p:nvSpPr>
-          <p:cNvPr id="33" name="TextBox 32"/>
+          <p:cNvPr id="34" name="TextBox 33"/>
           <p:cNvSpPr txBox="1"/>
           <p:nvPr/>
         </p:nvSpPr>
@@ -5752,7 +5726,7 @@
         <p:spPr>
           <a:xfrm>
             <a:off x="620000" y="560000"/>
-            <a:ext cx="10952000" cy="620000"/>
+            <a:ext cx="10052000" cy="620000"/>
           </a:xfrm>
           <a:prstGeom prst="rect">
             <a:avLst/>
@@ -5973,9 +5947,33 @@
           </a:p>
         </p:txBody>
       </p:sp>
-      <p:sp>
-        <p:nvSpPr>
-          <p:cNvPr id="8" name="Oval 7"/>
+      <p:pic>
+        <p:nvPicPr>
+          <p:cNvPr id="8" name="Picture 7" descr="secret.png"/>
+          <p:cNvPicPr>
+            <a:picLocks noChangeAspect="1"/>
+          </p:cNvPicPr>
+          <p:nvPr/>
+        </p:nvPicPr>
+        <p:blipFill>
+          <a:blip r:embed="rId2"/>
+          <a:stretch>
+            <a:fillRect/>
+          </a:stretch>
+        </p:blipFill>
+        <p:spPr>
+          <a:xfrm>
+            <a:off x="10932000" y="275000"/>
+            <a:ext cx="640000" cy="640000"/>
+          </a:xfrm>
+          <a:prstGeom prst="rect">
+            <a:avLst/>
+          </a:prstGeom>
+        </p:spPr>
+      </p:pic>
+      <p:sp>
+        <p:nvSpPr>
+          <p:cNvPr id="9" name="Oval 8"/>
           <p:cNvSpPr/>
           <p:nvPr/>
         </p:nvSpPr>
@@ -6019,7 +6017,7 @@
       </p:sp>
       <p:sp>
         <p:nvSpPr>
-          <p:cNvPr id="9" name="TextBox 8"/>
+          <p:cNvPr id="10" name="TextBox 9"/>
           <p:cNvSpPr txBox="1"/>
           <p:nvPr/>
         </p:nvSpPr>
@@ -6065,7 +6063,7 @@
       </p:sp>
       <p:sp>
         <p:nvSpPr>
-          <p:cNvPr id="10" name="Oval 9"/>
+          <p:cNvPr id="11" name="Oval 10"/>
           <p:cNvSpPr/>
           <p:nvPr/>
         </p:nvSpPr>
@@ -6109,7 +6107,7 @@
       </p:sp>
       <p:sp>
         <p:nvSpPr>
-          <p:cNvPr id="11" name="TextBox 10"/>
+          <p:cNvPr id="12" name="TextBox 11"/>
           <p:cNvSpPr txBox="1"/>
           <p:nvPr/>
         </p:nvSpPr>
@@ -6155,7 +6153,7 @@
       </p:sp>
       <p:sp>
         <p:nvSpPr>
-          <p:cNvPr id="12" name="Oval 11"/>
+          <p:cNvPr id="13" name="Oval 12"/>
           <p:cNvSpPr/>
           <p:nvPr/>
         </p:nvSpPr>
@@ -6199,7 +6197,7 @@
       </p:sp>
       <p:sp>
         <p:nvSpPr>
-          <p:cNvPr id="13" name="TextBox 12"/>
+          <p:cNvPr id="14" name="TextBox 13"/>
           <p:cNvSpPr txBox="1"/>
           <p:nvPr/>
         </p:nvSpPr>
@@ -6245,7 +6243,7 @@
       </p:sp>
       <p:sp>
         <p:nvSpPr>
-          <p:cNvPr id="14" name="Oval 13"/>
+          <p:cNvPr id="15" name="Oval 14"/>
           <p:cNvSpPr/>
           <p:nvPr/>
         </p:nvSpPr>
@@ -6289,7 +6287,7 @@
       </p:sp>
       <p:sp>
         <p:nvSpPr>
-          <p:cNvPr id="15" name="TextBox 14"/>
+          <p:cNvPr id="16" name="TextBox 15"/>
           <p:cNvSpPr txBox="1"/>
           <p:nvPr/>
         </p:nvSpPr>
@@ -6335,7 +6333,7 @@
       </p:sp>
       <p:sp>
         <p:nvSpPr>
-          <p:cNvPr id="16" name="Rounded Rectangle 15"/>
+          <p:cNvPr id="17" name="Rounded Rectangle 16"/>
           <p:cNvSpPr/>
           <p:nvPr/>
         </p:nvSpPr>
@@ -6385,7 +6383,7 @@
       </p:sp>
       <p:sp>
         <p:nvSpPr>
-          <p:cNvPr id="17" name="Rectangle 16"/>
+          <p:cNvPr id="18" name="Rectangle 17"/>
           <p:cNvSpPr/>
           <p:nvPr/>
         </p:nvSpPr>
@@ -6431,7 +6429,7 @@
       </p:sp>
       <p:sp>
         <p:nvSpPr>
-          <p:cNvPr id="18" name="TextBox 17"/>
+          <p:cNvPr id="19" name="TextBox 18"/>
           <p:cNvSpPr txBox="1"/>
           <p:nvPr/>
         </p:nvSpPr>
@@ -6477,7 +6475,7 @@
       </p:sp>
       <p:sp>
         <p:nvSpPr>
-          <p:cNvPr id="19" name="Rectangle 18"/>
+          <p:cNvPr id="20" name="Rectangle 19"/>
           <p:cNvSpPr/>
           <p:nvPr/>
         </p:nvSpPr>
@@ -6523,7 +6521,7 @@
       </p:sp>
       <p:sp>
         <p:nvSpPr>
-          <p:cNvPr id="20" name="TextBox 19"/>
+          <p:cNvPr id="21" name="TextBox 20"/>
           <p:cNvSpPr txBox="1"/>
           <p:nvPr/>
         </p:nvSpPr>
@@ -6845,7 +6843,7 @@
         <p:spPr>
           <a:xfrm>
             <a:off x="620000" y="560000"/>
-            <a:ext cx="10952000" cy="620000"/>
+            <a:ext cx="10052000" cy="620000"/>
           </a:xfrm>
           <a:prstGeom prst="rect">
             <a:avLst/>
@@ -7068,7 +7066,255 @@
       </p:sp>
       <p:sp>
         <p:nvSpPr>
-          <p:cNvPr id="8" name="Rounded Rectangle 7"/>
+          <p:cNvPr id="8" name="Freeform 7"/>
+          <p:cNvSpPr/>
+          <p:nvPr/>
+        </p:nvSpPr>
+        <p:spPr>
+          <a:xfrm>
+            <a:off x="11034400" y="300600"/>
+            <a:ext cx="448000" cy="588800"/>
+          </a:xfrm>
+          <a:custGeom>
+            <a:avLst/>
+            <a:gdLst/>
+            <a:ahLst/>
+            <a:cxnLst/>
+            <a:rect l="l" t="t" r="r" b="b"/>
+            <a:pathLst>
+              <a:path w="448000" h="588800">
+                <a:moveTo>
+                  <a:pt x="0" y="0"/>
+                </a:moveTo>
+                <a:lnTo>
+                  <a:pt x="345600" y="0"/>
+                </a:lnTo>
+                <a:lnTo>
+                  <a:pt x="448000" y="102400"/>
+                </a:lnTo>
+                <a:lnTo>
+                  <a:pt x="448000" y="588800"/>
+                </a:lnTo>
+                <a:lnTo>
+                  <a:pt x="0" y="588800"/>
+                </a:lnTo>
+                <a:close/>
+              </a:path>
+            </a:pathLst>
+          </a:custGeom>
+          <a:noFill/>
+          <a:ln w="38100">
+            <a:solidFill>
+              <a:srgbClr val="74A6FF"/>
+            </a:solidFill>
+          </a:ln>
+          <a:effectLst/>
+        </p:spPr>
+        <p:style>
+          <a:lnRef idx="1">
+            <a:schemeClr val="accent1"/>
+          </a:lnRef>
+          <a:fillRef idx="3">
+            <a:schemeClr val="accent1"/>
+          </a:fillRef>
+          <a:effectRef idx="2">
+            <a:schemeClr val="accent1"/>
+          </a:effectRef>
+          <a:fontRef idx="minor">
+            <a:schemeClr val="lt1"/>
+          </a:fontRef>
+        </p:style>
+        <p:txBody>
+          <a:bodyPr rtlCol="0" anchor="ctr"/>
+          <a:lstStyle/>
+          <a:p>
+            <a:pPr algn="ctr"/>
+          </a:p>
+        </p:txBody>
+      </p:sp>
+      <p:cxnSp>
+        <p:nvCxnSpPr>
+          <p:cNvPr id="9" name="Connector 8"/>
+          <p:cNvCxnSpPr/>
+          <p:nvPr/>
+        </p:nvCxnSpPr>
+        <p:spPr>
+          <a:xfrm>
+            <a:off x="11380000" y="300600"/>
+            <a:ext cx="0" cy="102400"/>
+          </a:xfrm>
+          <a:prstGeom prst="line">
+            <a:avLst/>
+          </a:prstGeom>
+          <a:ln w="38100">
+            <a:solidFill>
+              <a:srgbClr val="74A6FF"/>
+            </a:solidFill>
+          </a:ln>
+          <a:effectLst/>
+        </p:spPr>
+        <p:style>
+          <a:lnRef idx="2">
+            <a:schemeClr val="accent1"/>
+          </a:lnRef>
+          <a:fillRef idx="0">
+            <a:schemeClr val="accent1"/>
+          </a:fillRef>
+          <a:effectRef idx="1">
+            <a:schemeClr val="accent1"/>
+          </a:effectRef>
+          <a:fontRef idx="minor">
+            <a:schemeClr val="tx1"/>
+          </a:fontRef>
+        </p:style>
+      </p:cxnSp>
+      <p:cxnSp>
+        <p:nvCxnSpPr>
+          <p:cNvPr id="10" name="Connector 9"/>
+          <p:cNvCxnSpPr/>
+          <p:nvPr/>
+        </p:nvCxnSpPr>
+        <p:spPr>
+          <a:xfrm>
+            <a:off x="11380000" y="403000"/>
+            <a:ext cx="102400" cy="0"/>
+          </a:xfrm>
+          <a:prstGeom prst="line">
+            <a:avLst/>
+          </a:prstGeom>
+          <a:ln w="38100">
+            <a:solidFill>
+              <a:srgbClr val="74A6FF"/>
+            </a:solidFill>
+          </a:ln>
+          <a:effectLst/>
+        </p:spPr>
+        <p:style>
+          <a:lnRef idx="2">
+            <a:schemeClr val="accent1"/>
+          </a:lnRef>
+          <a:fillRef idx="0">
+            <a:schemeClr val="accent1"/>
+          </a:fillRef>
+          <a:effectRef idx="1">
+            <a:schemeClr val="accent1"/>
+          </a:effectRef>
+          <a:fontRef idx="minor">
+            <a:schemeClr val="tx1"/>
+          </a:fontRef>
+        </p:style>
+      </p:cxnSp>
+      <p:cxnSp>
+        <p:nvCxnSpPr>
+          <p:cNvPr id="11" name="Connector 10"/>
+          <p:cNvCxnSpPr/>
+          <p:nvPr/>
+        </p:nvCxnSpPr>
+        <p:spPr>
+          <a:xfrm>
+            <a:off x="11111200" y="543800"/>
+            <a:ext cx="281600" cy="0"/>
+          </a:xfrm>
+          <a:prstGeom prst="line">
+            <a:avLst/>
+          </a:prstGeom>
+          <a:ln w="38100">
+            <a:solidFill>
+              <a:srgbClr val="74A6FF"/>
+            </a:solidFill>
+          </a:ln>
+          <a:effectLst/>
+        </p:spPr>
+        <p:style>
+          <a:lnRef idx="2">
+            <a:schemeClr val="accent1"/>
+          </a:lnRef>
+          <a:fillRef idx="0">
+            <a:schemeClr val="accent1"/>
+          </a:fillRef>
+          <a:effectRef idx="1">
+            <a:schemeClr val="accent1"/>
+          </a:effectRef>
+          <a:fontRef idx="minor">
+            <a:schemeClr val="tx1"/>
+          </a:fontRef>
+        </p:style>
+      </p:cxnSp>
+      <p:cxnSp>
+        <p:nvCxnSpPr>
+          <p:cNvPr id="12" name="Connector 11"/>
+          <p:cNvCxnSpPr/>
+          <p:nvPr/>
+        </p:nvCxnSpPr>
+        <p:spPr>
+          <a:xfrm>
+            <a:off x="11111200" y="646200"/>
+            <a:ext cx="281600" cy="0"/>
+          </a:xfrm>
+          <a:prstGeom prst="line">
+            <a:avLst/>
+          </a:prstGeom>
+          <a:ln w="38100">
+            <a:solidFill>
+              <a:srgbClr val="74A6FF"/>
+            </a:solidFill>
+          </a:ln>
+          <a:effectLst/>
+        </p:spPr>
+        <p:style>
+          <a:lnRef idx="2">
+            <a:schemeClr val="accent1"/>
+          </a:lnRef>
+          <a:fillRef idx="0">
+            <a:schemeClr val="accent1"/>
+          </a:fillRef>
+          <a:effectRef idx="1">
+            <a:schemeClr val="accent1"/>
+          </a:effectRef>
+          <a:fontRef idx="minor">
+            <a:schemeClr val="tx1"/>
+          </a:fontRef>
+        </p:style>
+      </p:cxnSp>
+      <p:cxnSp>
+        <p:nvCxnSpPr>
+          <p:cNvPr id="13" name="Connector 12"/>
+          <p:cNvCxnSpPr/>
+          <p:nvPr/>
+        </p:nvCxnSpPr>
+        <p:spPr>
+          <a:xfrm>
+            <a:off x="11111200" y="748600"/>
+            <a:ext cx="281600" cy="0"/>
+          </a:xfrm>
+          <a:prstGeom prst="line">
+            <a:avLst/>
+          </a:prstGeom>
+          <a:ln w="38100">
+            <a:solidFill>
+              <a:srgbClr val="74A6FF"/>
+            </a:solidFill>
+          </a:ln>
+          <a:effectLst/>
+        </p:spPr>
+        <p:style>
+          <a:lnRef idx="2">
+            <a:schemeClr val="accent1"/>
+          </a:lnRef>
+          <a:fillRef idx="0">
+            <a:schemeClr val="accent1"/>
+          </a:fillRef>
+          <a:effectRef idx="1">
+            <a:schemeClr val="accent1"/>
+          </a:effectRef>
+          <a:fontRef idx="minor">
+            <a:schemeClr val="tx1"/>
+          </a:fontRef>
+        </p:style>
+      </p:cxnSp>
+      <p:sp>
+        <p:nvSpPr>
+          <p:cNvPr id="14" name="Rounded Rectangle 13"/>
           <p:cNvSpPr/>
           <p:nvPr/>
         </p:nvSpPr>
@@ -7118,7 +7364,7 @@
       </p:sp>
       <p:sp>
         <p:nvSpPr>
-          <p:cNvPr id="9" name="Rectangle 8"/>
+          <p:cNvPr id="15" name="Rectangle 14"/>
           <p:cNvSpPr/>
           <p:nvPr/>
         </p:nvSpPr>
@@ -7164,7 +7410,7 @@
       </p:sp>
       <p:sp>
         <p:nvSpPr>
-          <p:cNvPr id="10" name="TextBox 9"/>
+          <p:cNvPr id="16" name="TextBox 15"/>
           <p:cNvSpPr txBox="1"/>
           <p:nvPr/>
         </p:nvSpPr>
@@ -7210,7 +7456,7 @@
       </p:sp>
       <p:sp>
         <p:nvSpPr>
-          <p:cNvPr id="11" name="TextBox 10"/>
+          <p:cNvPr id="17" name="TextBox 16"/>
           <p:cNvSpPr txBox="1"/>
           <p:nvPr/>
         </p:nvSpPr>
@@ -7333,7 +7579,7 @@
       </p:sp>
       <p:sp>
         <p:nvSpPr>
-          <p:cNvPr id="12" name="Rounded Rectangle 11"/>
+          <p:cNvPr id="18" name="Rounded Rectangle 17"/>
           <p:cNvSpPr/>
           <p:nvPr/>
         </p:nvSpPr>
@@ -7383,7 +7629,7 @@
       </p:sp>
       <p:sp>
         <p:nvSpPr>
-          <p:cNvPr id="13" name="Rectangle 12"/>
+          <p:cNvPr id="19" name="Rectangle 18"/>
           <p:cNvSpPr/>
           <p:nvPr/>
         </p:nvSpPr>
@@ -7429,7 +7675,7 @@
       </p:sp>
       <p:sp>
         <p:nvSpPr>
-          <p:cNvPr id="14" name="TextBox 13"/>
+          <p:cNvPr id="20" name="TextBox 19"/>
           <p:cNvSpPr txBox="1"/>
           <p:nvPr/>
         </p:nvSpPr>
@@ -7475,7 +7721,7 @@
       </p:sp>
       <p:sp>
         <p:nvSpPr>
-          <p:cNvPr id="15" name="TextBox 14"/>
+          <p:cNvPr id="21" name="TextBox 20"/>
           <p:cNvSpPr txBox="1"/>
           <p:nvPr/>
         </p:nvSpPr>
@@ -7618,7 +7864,7 @@
       </p:sp>
       <p:sp>
         <p:nvSpPr>
-          <p:cNvPr id="16" name="Rounded Rectangle 15"/>
+          <p:cNvPr id="22" name="Rounded Rectangle 21"/>
           <p:cNvSpPr/>
           <p:nvPr/>
         </p:nvSpPr>
@@ -7668,7 +7914,7 @@
       </p:sp>
       <p:sp>
         <p:nvSpPr>
-          <p:cNvPr id="17" name="Rectangle 16"/>
+          <p:cNvPr id="23" name="Rectangle 22"/>
           <p:cNvSpPr/>
           <p:nvPr/>
         </p:nvSpPr>
@@ -7714,7 +7960,7 @@
       </p:sp>
       <p:sp>
         <p:nvSpPr>
-          <p:cNvPr id="18" name="TextBox 17"/>
+          <p:cNvPr id="24" name="TextBox 23"/>
           <p:cNvSpPr txBox="1"/>
           <p:nvPr/>
         </p:nvSpPr>
@@ -8438,7 +8684,149 @@
       </p:sp>
       <p:sp>
         <p:nvSpPr>
-          <p:cNvPr id="14" name="Rounded Rectangle 13"/>
+          <p:cNvPr id="14" name="Freeform 13"/>
+          <p:cNvSpPr/>
+          <p:nvPr/>
+        </p:nvSpPr>
+        <p:spPr>
+          <a:xfrm>
+            <a:off x="9590000" y="1418800"/>
+            <a:ext cx="784000" cy="842800"/>
+          </a:xfrm>
+          <a:custGeom>
+            <a:avLst/>
+            <a:gdLst/>
+            <a:ahLst/>
+            <a:cxnLst/>
+            <a:rect l="l" t="t" r="r" b="b"/>
+            <a:pathLst>
+              <a:path w="784000" h="842800">
+                <a:moveTo>
+                  <a:pt x="235200" y="0"/>
+                </a:moveTo>
+                <a:lnTo>
+                  <a:pt x="235200" y="333200"/>
+                </a:lnTo>
+                <a:lnTo>
+                  <a:pt x="0" y="842800"/>
+                </a:lnTo>
+                <a:lnTo>
+                  <a:pt x="784000" y="842800"/>
+                </a:lnTo>
+                <a:lnTo>
+                  <a:pt x="548800" y="333200"/>
+                </a:lnTo>
+                <a:lnTo>
+                  <a:pt x="548800" y="0"/>
+                </a:lnTo>
+              </a:path>
+            </a:pathLst>
+          </a:custGeom>
+          <a:noFill/>
+          <a:ln w="33020">
+            <a:solidFill>
+              <a:srgbClr val="74A6FF"/>
+            </a:solidFill>
+          </a:ln>
+          <a:effectLst/>
+        </p:spPr>
+        <p:style>
+          <a:lnRef idx="1">
+            <a:schemeClr val="accent1"/>
+          </a:lnRef>
+          <a:fillRef idx="3">
+            <a:schemeClr val="accent1"/>
+          </a:fillRef>
+          <a:effectRef idx="2">
+            <a:schemeClr val="accent1"/>
+          </a:effectRef>
+          <a:fontRef idx="minor">
+            <a:schemeClr val="lt1"/>
+          </a:fontRef>
+        </p:style>
+        <p:txBody>
+          <a:bodyPr rtlCol="0" anchor="ctr"/>
+          <a:lstStyle/>
+          <a:p>
+            <a:pPr algn="ctr"/>
+          </a:p>
+        </p:txBody>
+      </p:sp>
+      <p:cxnSp>
+        <p:nvCxnSpPr>
+          <p:cNvPr id="15" name="Connector 14"/>
+          <p:cNvCxnSpPr/>
+          <p:nvPr/>
+        </p:nvCxnSpPr>
+        <p:spPr>
+          <a:xfrm>
+            <a:off x="9766400" y="1418800"/>
+            <a:ext cx="431200" cy="0"/>
+          </a:xfrm>
+          <a:prstGeom prst="line">
+            <a:avLst/>
+          </a:prstGeom>
+          <a:ln w="33020">
+            <a:solidFill>
+              <a:srgbClr val="74A6FF"/>
+            </a:solidFill>
+          </a:ln>
+          <a:effectLst/>
+        </p:spPr>
+        <p:style>
+          <a:lnRef idx="2">
+            <a:schemeClr val="accent1"/>
+          </a:lnRef>
+          <a:fillRef idx="0">
+            <a:schemeClr val="accent1"/>
+          </a:fillRef>
+          <a:effectRef idx="1">
+            <a:schemeClr val="accent1"/>
+          </a:effectRef>
+          <a:fontRef idx="minor">
+            <a:schemeClr val="tx1"/>
+          </a:fontRef>
+        </p:style>
+      </p:cxnSp>
+      <p:cxnSp>
+        <p:nvCxnSpPr>
+          <p:cNvPr id="16" name="Connector 15"/>
+          <p:cNvCxnSpPr/>
+          <p:nvPr/>
+        </p:nvCxnSpPr>
+        <p:spPr>
+          <a:xfrm>
+            <a:off x="9727200" y="2006800"/>
+            <a:ext cx="509600" cy="0"/>
+          </a:xfrm>
+          <a:prstGeom prst="line">
+            <a:avLst/>
+          </a:prstGeom>
+          <a:ln w="33020">
+            <a:solidFill>
+              <a:srgbClr val="74A6FF"/>
+            </a:solidFill>
+          </a:ln>
+          <a:effectLst/>
+        </p:spPr>
+        <p:style>
+          <a:lnRef idx="2">
+            <a:schemeClr val="accent1"/>
+          </a:lnRef>
+          <a:fillRef idx="0">
+            <a:schemeClr val="accent1"/>
+          </a:fillRef>
+          <a:effectRef idx="1">
+            <a:schemeClr val="accent1"/>
+          </a:effectRef>
+          <a:fontRef idx="minor">
+            <a:schemeClr val="tx1"/>
+          </a:fontRef>
+        </p:style>
+      </p:cxnSp>
+      <p:sp>
+        <p:nvSpPr>
+          <p:cNvPr id="17" name="Rounded Rectangle 16"/>
           <p:cNvSpPr/>
           <p:nvPr/>
         </p:nvSpPr>
@@ -8488,7 +8876,7 @@
       </p:sp>
       <p:sp>
         <p:nvSpPr>
-          <p:cNvPr id="15" name="Rectangle 14"/>
+          <p:cNvPr id="18" name="Rectangle 17"/>
           <p:cNvSpPr/>
           <p:nvPr/>
         </p:nvSpPr>
@@ -8534,7 +8922,7 @@
       </p:sp>
       <p:sp>
         <p:nvSpPr>
-          <p:cNvPr id="16" name="TextBox 15"/>
+          <p:cNvPr id="19" name="TextBox 18"/>
           <p:cNvSpPr txBox="1"/>
           <p:nvPr/>
         </p:nvSpPr>
@@ -8603,7 +8991,7 @@
       </p:sp>
       <p:sp>
         <p:nvSpPr>
-          <p:cNvPr id="17" name="Rectangle 16"/>
+          <p:cNvPr id="20" name="Rectangle 19"/>
           <p:cNvSpPr/>
           <p:nvPr/>
         </p:nvSpPr>
@@ -8649,7 +9037,7 @@
       </p:sp>
       <p:sp>
         <p:nvSpPr>
-          <p:cNvPr id="18" name="TextBox 17"/>
+          <p:cNvPr id="21" name="TextBox 20"/>
           <p:cNvSpPr txBox="1"/>
           <p:nvPr/>
         </p:nvSpPr>
@@ -8718,7 +9106,7 @@
       </p:sp>
       <p:sp>
         <p:nvSpPr>
-          <p:cNvPr id="19" name="Rectangle 18"/>
+          <p:cNvPr id="22" name="Rectangle 21"/>
           <p:cNvSpPr/>
           <p:nvPr/>
         </p:nvSpPr>
@@ -8764,7 +9152,7 @@
       </p:sp>
       <p:sp>
         <p:nvSpPr>
-          <p:cNvPr id="20" name="TextBox 19"/>
+          <p:cNvPr id="23" name="TextBox 22"/>
           <p:cNvSpPr txBox="1"/>
           <p:nvPr/>
         </p:nvSpPr>
@@ -8833,7 +9221,7 @@
       </p:sp>
       <p:sp>
         <p:nvSpPr>
-          <p:cNvPr id="21" name="Rectangle 20"/>
+          <p:cNvPr id="24" name="Rectangle 23"/>
           <p:cNvSpPr/>
           <p:nvPr/>
         </p:nvSpPr>
@@ -8879,7 +9267,7 @@
       </p:sp>
       <p:sp>
         <p:nvSpPr>
-          <p:cNvPr id="22" name="TextBox 21"/>
+          <p:cNvPr id="25" name="TextBox 24"/>
           <p:cNvSpPr txBox="1"/>
           <p:nvPr/>
         </p:nvSpPr>
@@ -8925,7 +9313,7 @@
       </p:sp>
       <p:sp>
         <p:nvSpPr>
-          <p:cNvPr id="23" name="TextBox 22"/>
+          <p:cNvPr id="26" name="TextBox 25"/>
           <p:cNvSpPr txBox="1"/>
           <p:nvPr/>
         </p:nvSpPr>
@@ -9039,80 +9427,30 @@
           </a:p>
         </p:txBody>
       </p:sp>
-      <p:sp>
-        <p:nvSpPr>
-          <p:cNvPr id="3" name="Freeform 2"/>
-          <p:cNvSpPr/>
-          <p:nvPr/>
-        </p:nvSpPr>
-        <p:spPr>
-          <a:xfrm>
-            <a:off x="9479608" y="4208000"/>
-            <a:ext cx="2924783" cy="2851453"/>
-          </a:xfrm>
-          <a:custGeom>
-            <a:avLst/>
-            <a:gdLst/>
-            <a:ahLst/>
-            <a:cxnLst/>
-            <a:rect l="l" t="t" r="r" b="b"/>
-            <a:pathLst>
-              <a:path w="2924783" h="2851453">
-                <a:moveTo>
-                  <a:pt x="1462392" y="0"/>
-                </a:moveTo>
-                <a:lnTo>
-                  <a:pt x="2635139" y="564765"/>
-                </a:lnTo>
-                <a:lnTo>
-                  <a:pt x="2924783" y="1833781"/>
-                </a:lnTo>
-                <a:lnTo>
-                  <a:pt x="2113217" y="2851453"/>
-                </a:lnTo>
-                <a:lnTo>
-                  <a:pt x="811566" y="2851453"/>
-                </a:lnTo>
-                <a:lnTo>
-                  <a:pt x="0" y="1833781"/>
-                </a:lnTo>
-                <a:lnTo>
-                  <a:pt x="289644" y="564765"/>
-                </a:lnTo>
-                <a:close/>
-              </a:path>
-            </a:pathLst>
-          </a:custGeom>
-          <a:noFill/>
-          <a:ln w="31750">
-            <a:solidFill>
-              <a:srgbClr val="26354E"/>
-            </a:solidFill>
-          </a:ln>
-          <a:effectLst/>
-        </p:spPr>
-        <p:style>
-          <a:lnRef idx="1">
-            <a:schemeClr val="accent1"/>
-          </a:lnRef>
-          <a:fillRef idx="3">
-            <a:schemeClr val="accent1"/>
-          </a:fillRef>
-          <a:effectRef idx="2">
-            <a:schemeClr val="accent1"/>
-          </a:effectRef>
-          <a:fontRef idx="minor">
-            <a:schemeClr val="lt1"/>
-          </a:fontRef>
-        </p:style>
-        <p:txBody>
-          <a:bodyPr rtlCol="0" anchor="ctr"/>
-          <a:lstStyle/>
-          <a:p>
-            <a:pPr algn="ctr"/>
-          </a:p>
-        </p:txBody>
-      </p:sp>
+      <p:pic>
+        <p:nvPicPr>
+          <p:cNvPr id="3" name="Picture 2" descr="limits.png"/>
+          <p:cNvPicPr>
+            <a:picLocks noChangeAspect="1"/>
+          </p:cNvPicPr>
+          <p:nvPr/>
+        </p:nvPicPr>
+        <p:blipFill>
+          <a:blip r:embed="rId2"/>
+          <a:stretch>
+            <a:fillRect/>
+          </a:stretch>
+        </p:blipFill>
+        <p:spPr>
+          <a:xfrm>
+            <a:off x="8842000" y="2150000"/>
+            <a:ext cx="1800000" cy="1800000"/>
+          </a:xfrm>
+          <a:prstGeom prst="rect">
+            <a:avLst/>
+          </a:prstGeom>
+        </p:spPr>
+      </p:pic>
       <p:sp>
         <p:nvSpPr>
           <p:cNvPr id="4" name="TextBox 3"/>
@@ -9562,7 +9900,7 @@
         <p:spPr>
           <a:xfrm>
             <a:off x="620000" y="560000"/>
-            <a:ext cx="10952000" cy="620000"/>
+            <a:ext cx="10052000" cy="620000"/>
           </a:xfrm>
           <a:prstGeom prst="rect">
             <a:avLst/>
@@ -9783,9 +10121,33 @@
           </a:p>
         </p:txBody>
       </p:sp>
-      <p:sp>
-        <p:nvSpPr>
-          <p:cNvPr id="8" name="Rounded Rectangle 7"/>
+      <p:pic>
+        <p:nvPicPr>
+          <p:cNvPr id="8" name="Picture 7" descr="limits.png"/>
+          <p:cNvPicPr>
+            <a:picLocks noChangeAspect="1"/>
+          </p:cNvPicPr>
+          <p:nvPr/>
+        </p:nvPicPr>
+        <p:blipFill>
+          <a:blip r:embed="rId2"/>
+          <a:stretch>
+            <a:fillRect/>
+          </a:stretch>
+        </p:blipFill>
+        <p:spPr>
+          <a:xfrm>
+            <a:off x="10932000" y="275000"/>
+            <a:ext cx="640000" cy="640000"/>
+          </a:xfrm>
+          <a:prstGeom prst="rect">
+            <a:avLst/>
+          </a:prstGeom>
+        </p:spPr>
+      </p:pic>
+      <p:sp>
+        <p:nvSpPr>
+          <p:cNvPr id="9" name="Rounded Rectangle 8"/>
           <p:cNvSpPr/>
           <p:nvPr/>
         </p:nvSpPr>
@@ -9835,7 +10197,7 @@
       </p:sp>
       <p:sp>
         <p:nvSpPr>
-          <p:cNvPr id="9" name="Rectangle 8"/>
+          <p:cNvPr id="10" name="Rectangle 9"/>
           <p:cNvSpPr/>
           <p:nvPr/>
         </p:nvSpPr>
@@ -9881,7 +10243,7 @@
       </p:sp>
       <p:sp>
         <p:nvSpPr>
-          <p:cNvPr id="10" name="TextBox 9"/>
+          <p:cNvPr id="11" name="TextBox 10"/>
           <p:cNvSpPr txBox="1"/>
           <p:nvPr/>
         </p:nvSpPr>
@@ -9950,7 +10312,7 @@
       </p:sp>
       <p:sp>
         <p:nvSpPr>
-          <p:cNvPr id="11" name="TextBox 10"/>
+          <p:cNvPr id="12" name="TextBox 11"/>
           <p:cNvSpPr txBox="1"/>
           <p:nvPr/>
         </p:nvSpPr>
@@ -10070,7 +10432,7 @@
       </p:sp>
       <p:sp>
         <p:nvSpPr>
-          <p:cNvPr id="12" name="Rounded Rectangle 11"/>
+          <p:cNvPr id="13" name="Rounded Rectangle 12"/>
           <p:cNvSpPr/>
           <p:nvPr/>
         </p:nvSpPr>
@@ -10120,7 +10482,7 @@
       </p:sp>
       <p:sp>
         <p:nvSpPr>
-          <p:cNvPr id="13" name="Rectangle 12"/>
+          <p:cNvPr id="14" name="Rectangle 13"/>
           <p:cNvSpPr/>
           <p:nvPr/>
         </p:nvSpPr>
@@ -10166,7 +10528,7 @@
       </p:sp>
       <p:sp>
         <p:nvSpPr>
-          <p:cNvPr id="14" name="TextBox 13"/>
+          <p:cNvPr id="15" name="TextBox 14"/>
           <p:cNvSpPr txBox="1"/>
           <p:nvPr/>
         </p:nvSpPr>
@@ -10235,7 +10597,7 @@
       </p:sp>
       <p:sp>
         <p:nvSpPr>
-          <p:cNvPr id="15" name="TextBox 14"/>
+          <p:cNvPr id="16" name="TextBox 15"/>
           <p:cNvSpPr txBox="1"/>
           <p:nvPr/>
         </p:nvSpPr>
@@ -10355,7 +10717,7 @@
       </p:sp>
       <p:sp>
         <p:nvSpPr>
-          <p:cNvPr id="16" name="Rounded Rectangle 15"/>
+          <p:cNvPr id="17" name="Rounded Rectangle 16"/>
           <p:cNvSpPr/>
           <p:nvPr/>
         </p:nvSpPr>
@@ -10405,7 +10767,7 @@
       </p:sp>
       <p:sp>
         <p:nvSpPr>
-          <p:cNvPr id="17" name="Rectangle 16"/>
+          <p:cNvPr id="18" name="Rectangle 17"/>
           <p:cNvSpPr/>
           <p:nvPr/>
         </p:nvSpPr>
@@ -10451,7 +10813,7 @@
       </p:sp>
       <p:sp>
         <p:nvSpPr>
-          <p:cNvPr id="18" name="TextBox 17"/>
+          <p:cNvPr id="19" name="TextBox 18"/>
           <p:cNvSpPr txBox="1"/>
           <p:nvPr/>
         </p:nvSpPr>
@@ -10576,7 +10938,7 @@
         <p:spPr>
           <a:xfrm>
             <a:off x="620000" y="560000"/>
-            <a:ext cx="10952000" cy="620000"/>
+            <a:ext cx="10052000" cy="620000"/>
           </a:xfrm>
           <a:prstGeom prst="rect">
             <a:avLst/>
@@ -10959,52 +11321,30 @@
           </a:p>
         </p:txBody>
       </p:sp>
-      <p:sp>
-        <p:nvSpPr>
-          <p:cNvPr id="11" name="TextBox 10"/>
-          <p:cNvSpPr txBox="1"/>
-          <p:nvPr/>
-        </p:nvSpPr>
-        <p:spPr>
-          <a:xfrm>
-            <a:off x="1260000" y="2918000"/>
-            <a:ext cx="2747333" cy="340000"/>
-          </a:xfrm>
-          <a:prstGeom prst="rect">
-            <a:avLst/>
-          </a:prstGeom>
-          <a:noFill/>
-        </p:spPr>
-        <p:txBody>
-          <a:bodyPr wrap="square" anchor="ctr" lIns="0" rIns="0" tIns="0" bIns="0">
-            <a:noAutofit/>
-          </a:bodyPr>
-          <a:lstStyle/>
-          <a:p>
-            <a:pPr algn="l" marL="0" indent="0">
-              <a:lnSpc>
-                <a:spcPct val="105000"/>
-              </a:lnSpc>
-              <a:spcBef>
-                <a:spcPts val="0"/>
-              </a:spcBef>
-              <a:spcAft>
-                <a:spcPts val="0"/>
-              </a:spcAft>
-              <a:buNone/>
-            </a:pPr>
-            <a:r>
-              <a:rPr sz="1500" b="1" i="0">
-                <a:solidFill>
-                  <a:srgbClr val="F3F6FC"/>
-                </a:solidFill>
-                <a:latin typeface="Segoe UI Semibold"/>
-              </a:rPr>
-              <a:t>Guaranteed</a:t>
-            </a:r>
-          </a:p>
-        </p:txBody>
-      </p:sp>
+      <p:pic>
+        <p:nvPicPr>
+          <p:cNvPr id="11" name="Picture 10" descr="cm.png"/>
+          <p:cNvPicPr>
+            <a:picLocks noChangeAspect="1"/>
+          </p:cNvPicPr>
+          <p:nvPr/>
+        </p:nvPicPr>
+        <p:blipFill>
+          <a:blip r:embed="rId2"/>
+          <a:stretch>
+            <a:fillRect/>
+          </a:stretch>
+        </p:blipFill>
+        <p:spPr>
+          <a:xfrm>
+            <a:off x="3497333" y="2924000"/>
+            <a:ext cx="330000" cy="330000"/>
+          </a:xfrm>
+          <a:prstGeom prst="rect">
+            <a:avLst/>
+          </a:prstGeom>
+        </p:spPr>
+      </p:pic>
       <p:sp>
         <p:nvSpPr>
           <p:cNvPr id="12" name="TextBox 11"/>
@@ -11013,6 +11353,52 @@
         </p:nvSpPr>
         <p:spPr>
           <a:xfrm>
+            <a:off x="1260000" y="2918000"/>
+            <a:ext cx="2377333" cy="340000"/>
+          </a:xfrm>
+          <a:prstGeom prst="rect">
+            <a:avLst/>
+          </a:prstGeom>
+          <a:noFill/>
+        </p:spPr>
+        <p:txBody>
+          <a:bodyPr wrap="square" anchor="ctr" lIns="0" rIns="0" tIns="0" bIns="0">
+            <a:noAutofit/>
+          </a:bodyPr>
+          <a:lstStyle/>
+          <a:p>
+            <a:pPr algn="l" marL="0" indent="0">
+              <a:lnSpc>
+                <a:spcPct val="105000"/>
+              </a:lnSpc>
+              <a:spcBef>
+                <a:spcPts val="0"/>
+              </a:spcBef>
+              <a:spcAft>
+                <a:spcPts val="0"/>
+              </a:spcAft>
+              <a:buNone/>
+            </a:pPr>
+            <a:r>
+              <a:rPr sz="1500" b="1" i="0">
+                <a:solidFill>
+                  <a:srgbClr val="F3F6FC"/>
+                </a:solidFill>
+                <a:latin typeface="Segoe UI Semibold"/>
+              </a:rPr>
+              <a:t>Guaranteed</a:t>
+            </a:r>
+          </a:p>
+        </p:txBody>
+      </p:sp>
+      <p:sp>
+        <p:nvSpPr>
+          <p:cNvPr id="13" name="TextBox 12"/>
+          <p:cNvSpPr txBox="1"/>
+          <p:nvPr/>
+        </p:nvSpPr>
+        <p:spPr>
+          <a:xfrm>
             <a:off x="850000" y="3338000"/>
             <a:ext cx="2977333" cy="1074000"/>
           </a:xfrm>
@@ -11053,7 +11439,7 @@
       </p:sp>
       <p:sp>
         <p:nvSpPr>
-          <p:cNvPr id="13" name="Rounded Rectangle 12"/>
+          <p:cNvPr id="14" name="Rounded Rectangle 13"/>
           <p:cNvSpPr/>
           <p:nvPr/>
         </p:nvSpPr>
@@ -11103,7 +11489,7 @@
       </p:sp>
       <p:sp>
         <p:nvSpPr>
-          <p:cNvPr id="14" name="Rectangle 13"/>
+          <p:cNvPr id="15" name="Rectangle 14"/>
           <p:cNvSpPr/>
           <p:nvPr/>
         </p:nvSpPr>
@@ -11149,7 +11535,7 @@
       </p:sp>
       <p:sp>
         <p:nvSpPr>
-          <p:cNvPr id="15" name="Oval 14"/>
+          <p:cNvPr id="16" name="Oval 15"/>
           <p:cNvSpPr/>
           <p:nvPr/>
         </p:nvSpPr>
@@ -11213,16 +11599,40 @@
           </a:p>
         </p:txBody>
       </p:sp>
-      <p:sp>
-        <p:nvSpPr>
-          <p:cNvPr id="16" name="TextBox 15"/>
+      <p:pic>
+        <p:nvPicPr>
+          <p:cNvPr id="17" name="Picture 16" descr="cm.png"/>
+          <p:cNvPicPr>
+            <a:picLocks noChangeAspect="1"/>
+          </p:cNvPicPr>
+          <p:nvPr/>
+        </p:nvPicPr>
+        <p:blipFill>
+          <a:blip r:embed="rId2"/>
+          <a:stretch>
+            <a:fillRect/>
+          </a:stretch>
+        </p:blipFill>
+        <p:spPr>
+          <a:xfrm>
+            <a:off x="7254666" y="2924000"/>
+            <a:ext cx="330000" cy="330000"/>
+          </a:xfrm>
+          <a:prstGeom prst="rect">
+            <a:avLst/>
+          </a:prstGeom>
+        </p:spPr>
+      </p:pic>
+      <p:sp>
+        <p:nvSpPr>
+          <p:cNvPr id="18" name="TextBox 17"/>
           <p:cNvSpPr txBox="1"/>
           <p:nvPr/>
         </p:nvSpPr>
         <p:spPr>
           <a:xfrm>
             <a:off x="5017333" y="2918000"/>
-            <a:ext cx="2747333" cy="340000"/>
+            <a:ext cx="2377333" cy="340000"/>
           </a:xfrm>
           <a:prstGeom prst="rect">
             <a:avLst/>
@@ -11261,7 +11671,7 @@
       </p:sp>
       <p:sp>
         <p:nvSpPr>
-          <p:cNvPr id="17" name="TextBox 16"/>
+          <p:cNvPr id="19" name="TextBox 18"/>
           <p:cNvSpPr txBox="1"/>
           <p:nvPr/>
         </p:nvSpPr>
@@ -11307,7 +11717,7 @@
       </p:sp>
       <p:sp>
         <p:nvSpPr>
-          <p:cNvPr id="18" name="Rounded Rectangle 17"/>
+          <p:cNvPr id="20" name="Rounded Rectangle 19"/>
           <p:cNvSpPr/>
           <p:nvPr/>
         </p:nvSpPr>
@@ -11357,7 +11767,7 @@
       </p:sp>
       <p:sp>
         <p:nvSpPr>
-          <p:cNvPr id="19" name="Rectangle 18"/>
+          <p:cNvPr id="21" name="Rectangle 20"/>
           <p:cNvSpPr/>
           <p:nvPr/>
         </p:nvSpPr>
@@ -11403,7 +11813,7 @@
       </p:sp>
       <p:sp>
         <p:nvSpPr>
-          <p:cNvPr id="20" name="Oval 19"/>
+          <p:cNvPr id="22" name="Oval 21"/>
           <p:cNvSpPr/>
           <p:nvPr/>
         </p:nvSpPr>
@@ -11467,16 +11877,40 @@
           </a:p>
         </p:txBody>
       </p:sp>
-      <p:sp>
-        <p:nvSpPr>
-          <p:cNvPr id="21" name="TextBox 20"/>
+      <p:pic>
+        <p:nvPicPr>
+          <p:cNvPr id="23" name="Picture 22" descr="cm.png"/>
+          <p:cNvPicPr>
+            <a:picLocks noChangeAspect="1"/>
+          </p:cNvPicPr>
+          <p:nvPr/>
+        </p:nvPicPr>
+        <p:blipFill>
+          <a:blip r:embed="rId2"/>
+          <a:stretch>
+            <a:fillRect/>
+          </a:stretch>
+        </p:blipFill>
+        <p:spPr>
+          <a:xfrm>
+            <a:off x="11012000" y="2924000"/>
+            <a:ext cx="330000" cy="330000"/>
+          </a:xfrm>
+          <a:prstGeom prst="rect">
+            <a:avLst/>
+          </a:prstGeom>
+        </p:spPr>
+      </p:pic>
+      <p:sp>
+        <p:nvSpPr>
+          <p:cNvPr id="24" name="TextBox 23"/>
           <p:cNvSpPr txBox="1"/>
           <p:nvPr/>
         </p:nvSpPr>
         <p:spPr>
           <a:xfrm>
             <a:off x="8774666" y="2918000"/>
-            <a:ext cx="2747333" cy="340000"/>
+            <a:ext cx="2377333" cy="340000"/>
           </a:xfrm>
           <a:prstGeom prst="rect">
             <a:avLst/>
@@ -11515,7 +11949,7 @@
       </p:sp>
       <p:sp>
         <p:nvSpPr>
-          <p:cNvPr id="22" name="TextBox 21"/>
+          <p:cNvPr id="25" name="TextBox 24"/>
           <p:cNvSpPr txBox="1"/>
           <p:nvPr/>
         </p:nvSpPr>
@@ -11561,7 +11995,7 @@
       </p:sp>
       <p:sp>
         <p:nvSpPr>
-          <p:cNvPr id="23" name="Rounded Rectangle 22"/>
+          <p:cNvPr id="26" name="Rounded Rectangle 25"/>
           <p:cNvSpPr/>
           <p:nvPr/>
         </p:nvSpPr>
@@ -11611,7 +12045,7 @@
       </p:sp>
       <p:sp>
         <p:nvSpPr>
-          <p:cNvPr id="24" name="Rectangle 23"/>
+          <p:cNvPr id="27" name="Rectangle 26"/>
           <p:cNvSpPr/>
           <p:nvPr/>
         </p:nvSpPr>
@@ -11657,7 +12091,7 @@
       </p:sp>
       <p:sp>
         <p:nvSpPr>
-          <p:cNvPr id="25" name="TextBox 24"/>
+          <p:cNvPr id="28" name="TextBox 27"/>
           <p:cNvSpPr txBox="1"/>
           <p:nvPr/>
         </p:nvSpPr>
@@ -11782,7 +12216,7 @@
         <p:spPr>
           <a:xfrm>
             <a:off x="620000" y="560000"/>
-            <a:ext cx="10952000" cy="620000"/>
+            <a:ext cx="10052000" cy="620000"/>
           </a:xfrm>
           <a:prstGeom prst="rect">
             <a:avLst/>
@@ -12003,9 +12437,33 @@
           </a:p>
         </p:txBody>
       </p:sp>
-      <p:sp>
-        <p:nvSpPr>
-          <p:cNvPr id="8" name="TextBox 7"/>
+      <p:pic>
+        <p:nvPicPr>
+          <p:cNvPr id="8" name="Picture 7" descr="limits.png"/>
+          <p:cNvPicPr>
+            <a:picLocks noChangeAspect="1"/>
+          </p:cNvPicPr>
+          <p:nvPr/>
+        </p:nvPicPr>
+        <p:blipFill>
+          <a:blip r:embed="rId2"/>
+          <a:stretch>
+            <a:fillRect/>
+          </a:stretch>
+        </p:blipFill>
+        <p:spPr>
+          <a:xfrm>
+            <a:off x="10932000" y="275000"/>
+            <a:ext cx="640000" cy="640000"/>
+          </a:xfrm>
+          <a:prstGeom prst="rect">
+            <a:avLst/>
+          </a:prstGeom>
+        </p:spPr>
+      </p:pic>
+      <p:sp>
+        <p:nvSpPr>
+          <p:cNvPr id="9" name="TextBox 8"/>
           <p:cNvSpPr txBox="1"/>
           <p:nvPr/>
         </p:nvSpPr>
@@ -12051,7 +12509,7 @@
       </p:sp>
       <p:sp>
         <p:nvSpPr>
-          <p:cNvPr id="9" name="Rounded Rectangle 8"/>
+          <p:cNvPr id="10" name="Rounded Rectangle 9"/>
           <p:cNvSpPr/>
           <p:nvPr/>
         </p:nvSpPr>
@@ -12101,7 +12559,7 @@
       </p:sp>
       <p:sp>
         <p:nvSpPr>
-          <p:cNvPr id="10" name="Rectangle 9"/>
+          <p:cNvPr id="11" name="Rectangle 10"/>
           <p:cNvSpPr/>
           <p:nvPr/>
         </p:nvSpPr>
@@ -12147,7 +12605,7 @@
       </p:sp>
       <p:sp>
         <p:nvSpPr>
-          <p:cNvPr id="11" name="TextBox 10"/>
+          <p:cNvPr id="12" name="TextBox 11"/>
           <p:cNvSpPr txBox="1"/>
           <p:nvPr/>
         </p:nvSpPr>
@@ -12310,7 +12768,7 @@
       </p:sp>
       <p:sp>
         <p:nvSpPr>
-          <p:cNvPr id="12" name="Rounded Rectangle 11"/>
+          <p:cNvPr id="13" name="Rounded Rectangle 12"/>
           <p:cNvSpPr/>
           <p:nvPr/>
         </p:nvSpPr>
@@ -12360,7 +12818,7 @@
       </p:sp>
       <p:sp>
         <p:nvSpPr>
-          <p:cNvPr id="13" name="Rectangle 12"/>
+          <p:cNvPr id="14" name="Rectangle 13"/>
           <p:cNvSpPr/>
           <p:nvPr/>
         </p:nvSpPr>
@@ -12406,7 +12864,7 @@
       </p:sp>
       <p:sp>
         <p:nvSpPr>
-          <p:cNvPr id="14" name="TextBox 13"/>
+          <p:cNvPr id="15" name="TextBox 14"/>
           <p:cNvSpPr txBox="1"/>
           <p:nvPr/>
         </p:nvSpPr>
@@ -13242,7 +13700,149 @@
       </p:sp>
       <p:sp>
         <p:nvSpPr>
-          <p:cNvPr id="16" name="Rounded Rectangle 15"/>
+          <p:cNvPr id="16" name="Freeform 15"/>
+          <p:cNvSpPr/>
+          <p:nvPr/>
+        </p:nvSpPr>
+        <p:spPr>
+          <a:xfrm>
+            <a:off x="9590000" y="1418800"/>
+            <a:ext cx="784000" cy="842800"/>
+          </a:xfrm>
+          <a:custGeom>
+            <a:avLst/>
+            <a:gdLst/>
+            <a:ahLst/>
+            <a:cxnLst/>
+            <a:rect l="l" t="t" r="r" b="b"/>
+            <a:pathLst>
+              <a:path w="784000" h="842800">
+                <a:moveTo>
+                  <a:pt x="235200" y="0"/>
+                </a:moveTo>
+                <a:lnTo>
+                  <a:pt x="235200" y="333200"/>
+                </a:lnTo>
+                <a:lnTo>
+                  <a:pt x="0" y="842800"/>
+                </a:lnTo>
+                <a:lnTo>
+                  <a:pt x="784000" y="842800"/>
+                </a:lnTo>
+                <a:lnTo>
+                  <a:pt x="548800" y="333200"/>
+                </a:lnTo>
+                <a:lnTo>
+                  <a:pt x="548800" y="0"/>
+                </a:lnTo>
+              </a:path>
+            </a:pathLst>
+          </a:custGeom>
+          <a:noFill/>
+          <a:ln w="33020">
+            <a:solidFill>
+              <a:srgbClr val="74A6FF"/>
+            </a:solidFill>
+          </a:ln>
+          <a:effectLst/>
+        </p:spPr>
+        <p:style>
+          <a:lnRef idx="1">
+            <a:schemeClr val="accent1"/>
+          </a:lnRef>
+          <a:fillRef idx="3">
+            <a:schemeClr val="accent1"/>
+          </a:fillRef>
+          <a:effectRef idx="2">
+            <a:schemeClr val="accent1"/>
+          </a:effectRef>
+          <a:fontRef idx="minor">
+            <a:schemeClr val="lt1"/>
+          </a:fontRef>
+        </p:style>
+        <p:txBody>
+          <a:bodyPr rtlCol="0" anchor="ctr"/>
+          <a:lstStyle/>
+          <a:p>
+            <a:pPr algn="ctr"/>
+          </a:p>
+        </p:txBody>
+      </p:sp>
+      <p:cxnSp>
+        <p:nvCxnSpPr>
+          <p:cNvPr id="17" name="Connector 16"/>
+          <p:cNvCxnSpPr/>
+          <p:nvPr/>
+        </p:nvCxnSpPr>
+        <p:spPr>
+          <a:xfrm>
+            <a:off x="9766400" y="1418800"/>
+            <a:ext cx="431200" cy="0"/>
+          </a:xfrm>
+          <a:prstGeom prst="line">
+            <a:avLst/>
+          </a:prstGeom>
+          <a:ln w="33020">
+            <a:solidFill>
+              <a:srgbClr val="74A6FF"/>
+            </a:solidFill>
+          </a:ln>
+          <a:effectLst/>
+        </p:spPr>
+        <p:style>
+          <a:lnRef idx="2">
+            <a:schemeClr val="accent1"/>
+          </a:lnRef>
+          <a:fillRef idx="0">
+            <a:schemeClr val="accent1"/>
+          </a:fillRef>
+          <a:effectRef idx="1">
+            <a:schemeClr val="accent1"/>
+          </a:effectRef>
+          <a:fontRef idx="minor">
+            <a:schemeClr val="tx1"/>
+          </a:fontRef>
+        </p:style>
+      </p:cxnSp>
+      <p:cxnSp>
+        <p:nvCxnSpPr>
+          <p:cNvPr id="18" name="Connector 17"/>
+          <p:cNvCxnSpPr/>
+          <p:nvPr/>
+        </p:nvCxnSpPr>
+        <p:spPr>
+          <a:xfrm>
+            <a:off x="9727200" y="2006800"/>
+            <a:ext cx="509600" cy="0"/>
+          </a:xfrm>
+          <a:prstGeom prst="line">
+            <a:avLst/>
+          </a:prstGeom>
+          <a:ln w="33020">
+            <a:solidFill>
+              <a:srgbClr val="74A6FF"/>
+            </a:solidFill>
+          </a:ln>
+          <a:effectLst/>
+        </p:spPr>
+        <p:style>
+          <a:lnRef idx="2">
+            <a:schemeClr val="accent1"/>
+          </a:lnRef>
+          <a:fillRef idx="0">
+            <a:schemeClr val="accent1"/>
+          </a:fillRef>
+          <a:effectRef idx="1">
+            <a:schemeClr val="accent1"/>
+          </a:effectRef>
+          <a:fontRef idx="minor">
+            <a:schemeClr val="tx1"/>
+          </a:fontRef>
+        </p:style>
+      </p:cxnSp>
+      <p:sp>
+        <p:nvSpPr>
+          <p:cNvPr id="19" name="Rounded Rectangle 18"/>
           <p:cNvSpPr/>
           <p:nvPr/>
         </p:nvSpPr>
@@ -13292,7 +13892,7 @@
       </p:sp>
       <p:sp>
         <p:nvSpPr>
-          <p:cNvPr id="17" name="Rectangle 16"/>
+          <p:cNvPr id="20" name="Rectangle 19"/>
           <p:cNvSpPr/>
           <p:nvPr/>
         </p:nvSpPr>
@@ -13338,7 +13938,7 @@
       </p:sp>
       <p:sp>
         <p:nvSpPr>
-          <p:cNvPr id="18" name="TextBox 17"/>
+          <p:cNvPr id="21" name="TextBox 20"/>
           <p:cNvSpPr txBox="1"/>
           <p:nvPr/>
         </p:nvSpPr>
@@ -13407,7 +14007,7 @@
       </p:sp>
       <p:sp>
         <p:nvSpPr>
-          <p:cNvPr id="19" name="Rectangle 18"/>
+          <p:cNvPr id="22" name="Rectangle 21"/>
           <p:cNvSpPr/>
           <p:nvPr/>
         </p:nvSpPr>
@@ -13453,7 +14053,7 @@
       </p:sp>
       <p:sp>
         <p:nvSpPr>
-          <p:cNvPr id="20" name="TextBox 19"/>
+          <p:cNvPr id="23" name="TextBox 22"/>
           <p:cNvSpPr txBox="1"/>
           <p:nvPr/>
         </p:nvSpPr>
@@ -13522,7 +14122,7 @@
       </p:sp>
       <p:sp>
         <p:nvSpPr>
-          <p:cNvPr id="21" name="Rectangle 20"/>
+          <p:cNvPr id="24" name="Rectangle 23"/>
           <p:cNvSpPr/>
           <p:nvPr/>
         </p:nvSpPr>
@@ -13568,7 +14168,7 @@
       </p:sp>
       <p:sp>
         <p:nvSpPr>
-          <p:cNvPr id="22" name="TextBox 21"/>
+          <p:cNvPr id="25" name="TextBox 24"/>
           <p:cNvSpPr txBox="1"/>
           <p:nvPr/>
         </p:nvSpPr>
@@ -13637,7 +14237,7 @@
       </p:sp>
       <p:sp>
         <p:nvSpPr>
-          <p:cNvPr id="23" name="Rectangle 22"/>
+          <p:cNvPr id="26" name="Rectangle 25"/>
           <p:cNvSpPr/>
           <p:nvPr/>
         </p:nvSpPr>
@@ -13683,7 +14283,7 @@
       </p:sp>
       <p:sp>
         <p:nvSpPr>
-          <p:cNvPr id="24" name="TextBox 23"/>
+          <p:cNvPr id="27" name="TextBox 26"/>
           <p:cNvSpPr txBox="1"/>
           <p:nvPr/>
         </p:nvSpPr>
@@ -13729,7 +14329,7 @@
       </p:sp>
       <p:sp>
         <p:nvSpPr>
-          <p:cNvPr id="25" name="TextBox 24"/>
+          <p:cNvPr id="28" name="TextBox 27"/>
           <p:cNvSpPr txBox="1"/>
           <p:nvPr/>
         </p:nvSpPr>
@@ -14453,7 +15053,311 @@
       </p:sp>
       <p:sp>
         <p:nvSpPr>
-          <p:cNvPr id="14" name="Rounded Rectangle 13"/>
+          <p:cNvPr id="14" name="Oval 13"/>
+          <p:cNvSpPr/>
+          <p:nvPr/>
+        </p:nvSpPr>
+        <p:spPr>
+          <a:xfrm>
+            <a:off x="9825200" y="1497200"/>
+            <a:ext cx="313600" cy="313600"/>
+          </a:xfrm>
+          <a:prstGeom prst="ellipse">
+            <a:avLst/>
+          </a:prstGeom>
+          <a:noFill/>
+          <a:ln w="33020">
+            <a:solidFill>
+              <a:srgbClr val="FF7B72"/>
+            </a:solidFill>
+          </a:ln>
+          <a:effectLst/>
+        </p:spPr>
+        <p:style>
+          <a:lnRef idx="1">
+            <a:schemeClr val="accent1"/>
+          </a:lnRef>
+          <a:fillRef idx="3">
+            <a:schemeClr val="accent1"/>
+          </a:fillRef>
+          <a:effectRef idx="2">
+            <a:schemeClr val="accent1"/>
+          </a:effectRef>
+          <a:fontRef idx="minor">
+            <a:schemeClr val="lt1"/>
+          </a:fontRef>
+        </p:style>
+        <p:txBody>
+          <a:bodyPr rtlCol="0" anchor="ctr"/>
+          <a:lstStyle/>
+          <a:p>
+            <a:pPr algn="ctr"/>
+          </a:p>
+        </p:txBody>
+      </p:sp>
+      <p:sp>
+        <p:nvSpPr>
+          <p:cNvPr id="15" name="Oval 14"/>
+          <p:cNvSpPr/>
+          <p:nvPr/>
+        </p:nvSpPr>
+        <p:spPr>
+          <a:xfrm>
+            <a:off x="9766400" y="1752000"/>
+            <a:ext cx="431200" cy="490000"/>
+          </a:xfrm>
+          <a:prstGeom prst="ellipse">
+            <a:avLst/>
+          </a:prstGeom>
+          <a:noFill/>
+          <a:ln w="33020">
+            <a:solidFill>
+              <a:srgbClr val="FF7B72"/>
+            </a:solidFill>
+          </a:ln>
+          <a:effectLst/>
+        </p:spPr>
+        <p:style>
+          <a:lnRef idx="1">
+            <a:schemeClr val="accent1"/>
+          </a:lnRef>
+          <a:fillRef idx="3">
+            <a:schemeClr val="accent1"/>
+          </a:fillRef>
+          <a:effectRef idx="2">
+            <a:schemeClr val="accent1"/>
+          </a:effectRef>
+          <a:fontRef idx="minor">
+            <a:schemeClr val="lt1"/>
+          </a:fontRef>
+        </p:style>
+        <p:txBody>
+          <a:bodyPr rtlCol="0" anchor="ctr"/>
+          <a:lstStyle/>
+          <a:p>
+            <a:pPr algn="ctr"/>
+          </a:p>
+        </p:txBody>
+      </p:sp>
+      <p:cxnSp>
+        <p:nvCxnSpPr>
+          <p:cNvPr id="16" name="Connector 15"/>
+          <p:cNvCxnSpPr/>
+          <p:nvPr/>
+        </p:nvCxnSpPr>
+        <p:spPr>
+          <a:xfrm flipH="1" flipV="1">
+            <a:off x="9550800" y="1791200"/>
+            <a:ext cx="235200" cy="58800"/>
+          </a:xfrm>
+          <a:prstGeom prst="line">
+            <a:avLst/>
+          </a:prstGeom>
+          <a:ln w="33020">
+            <a:solidFill>
+              <a:srgbClr val="FF7B72"/>
+            </a:solidFill>
+          </a:ln>
+          <a:effectLst/>
+        </p:spPr>
+        <p:style>
+          <a:lnRef idx="2">
+            <a:schemeClr val="accent1"/>
+          </a:lnRef>
+          <a:fillRef idx="0">
+            <a:schemeClr val="accent1"/>
+          </a:fillRef>
+          <a:effectRef idx="1">
+            <a:schemeClr val="accent1"/>
+          </a:effectRef>
+          <a:fontRef idx="minor">
+            <a:schemeClr val="tx1"/>
+          </a:fontRef>
+        </p:style>
+      </p:cxnSp>
+      <p:cxnSp>
+        <p:nvCxnSpPr>
+          <p:cNvPr id="17" name="Connector 16"/>
+          <p:cNvCxnSpPr/>
+          <p:nvPr/>
+        </p:nvCxnSpPr>
+        <p:spPr>
+          <a:xfrm flipV="1">
+            <a:off x="10178000" y="1791200"/>
+            <a:ext cx="235200" cy="58800"/>
+          </a:xfrm>
+          <a:prstGeom prst="line">
+            <a:avLst/>
+          </a:prstGeom>
+          <a:ln w="33020">
+            <a:solidFill>
+              <a:srgbClr val="FF7B72"/>
+            </a:solidFill>
+          </a:ln>
+          <a:effectLst/>
+        </p:spPr>
+        <p:style>
+          <a:lnRef idx="2">
+            <a:schemeClr val="accent1"/>
+          </a:lnRef>
+          <a:fillRef idx="0">
+            <a:schemeClr val="accent1"/>
+          </a:fillRef>
+          <a:effectRef idx="1">
+            <a:schemeClr val="accent1"/>
+          </a:effectRef>
+          <a:fontRef idx="minor">
+            <a:schemeClr val="tx1"/>
+          </a:fontRef>
+        </p:style>
+      </p:cxnSp>
+      <p:cxnSp>
+        <p:nvCxnSpPr>
+          <p:cNvPr id="18" name="Connector 17"/>
+          <p:cNvCxnSpPr/>
+          <p:nvPr/>
+        </p:nvCxnSpPr>
+        <p:spPr>
+          <a:xfrm flipH="1" flipV="1">
+            <a:off x="9550800" y="1948000"/>
+            <a:ext cx="235200" cy="58800"/>
+          </a:xfrm>
+          <a:prstGeom prst="line">
+            <a:avLst/>
+          </a:prstGeom>
+          <a:ln w="33020">
+            <a:solidFill>
+              <a:srgbClr val="FF7B72"/>
+            </a:solidFill>
+          </a:ln>
+          <a:effectLst/>
+        </p:spPr>
+        <p:style>
+          <a:lnRef idx="2">
+            <a:schemeClr val="accent1"/>
+          </a:lnRef>
+          <a:fillRef idx="0">
+            <a:schemeClr val="accent1"/>
+          </a:fillRef>
+          <a:effectRef idx="1">
+            <a:schemeClr val="accent1"/>
+          </a:effectRef>
+          <a:fontRef idx="minor">
+            <a:schemeClr val="tx1"/>
+          </a:fontRef>
+        </p:style>
+      </p:cxnSp>
+      <p:cxnSp>
+        <p:nvCxnSpPr>
+          <p:cNvPr id="19" name="Connector 18"/>
+          <p:cNvCxnSpPr/>
+          <p:nvPr/>
+        </p:nvCxnSpPr>
+        <p:spPr>
+          <a:xfrm flipV="1">
+            <a:off x="10178000" y="1948000"/>
+            <a:ext cx="235200" cy="58800"/>
+          </a:xfrm>
+          <a:prstGeom prst="line">
+            <a:avLst/>
+          </a:prstGeom>
+          <a:ln w="33020">
+            <a:solidFill>
+              <a:srgbClr val="FF7B72"/>
+            </a:solidFill>
+          </a:ln>
+          <a:effectLst/>
+        </p:spPr>
+        <p:style>
+          <a:lnRef idx="2">
+            <a:schemeClr val="accent1"/>
+          </a:lnRef>
+          <a:fillRef idx="0">
+            <a:schemeClr val="accent1"/>
+          </a:fillRef>
+          <a:effectRef idx="1">
+            <a:schemeClr val="accent1"/>
+          </a:effectRef>
+          <a:fontRef idx="minor">
+            <a:schemeClr val="tx1"/>
+          </a:fontRef>
+        </p:style>
+      </p:cxnSp>
+      <p:cxnSp>
+        <p:nvCxnSpPr>
+          <p:cNvPr id="20" name="Connector 19"/>
+          <p:cNvCxnSpPr/>
+          <p:nvPr/>
+        </p:nvCxnSpPr>
+        <p:spPr>
+          <a:xfrm flipH="1" flipV="1">
+            <a:off x="9550800" y="2104800"/>
+            <a:ext cx="235200" cy="58800"/>
+          </a:xfrm>
+          <a:prstGeom prst="line">
+            <a:avLst/>
+          </a:prstGeom>
+          <a:ln w="33020">
+            <a:solidFill>
+              <a:srgbClr val="FF7B72"/>
+            </a:solidFill>
+          </a:ln>
+          <a:effectLst/>
+        </p:spPr>
+        <p:style>
+          <a:lnRef idx="2">
+            <a:schemeClr val="accent1"/>
+          </a:lnRef>
+          <a:fillRef idx="0">
+            <a:schemeClr val="accent1"/>
+          </a:fillRef>
+          <a:effectRef idx="1">
+            <a:schemeClr val="accent1"/>
+          </a:effectRef>
+          <a:fontRef idx="minor">
+            <a:schemeClr val="tx1"/>
+          </a:fontRef>
+        </p:style>
+      </p:cxnSp>
+      <p:cxnSp>
+        <p:nvCxnSpPr>
+          <p:cNvPr id="21" name="Connector 20"/>
+          <p:cNvCxnSpPr/>
+          <p:nvPr/>
+        </p:nvCxnSpPr>
+        <p:spPr>
+          <a:xfrm flipV="1">
+            <a:off x="10178000" y="2104800"/>
+            <a:ext cx="235200" cy="58800"/>
+          </a:xfrm>
+          <a:prstGeom prst="line">
+            <a:avLst/>
+          </a:prstGeom>
+          <a:ln w="33020">
+            <a:solidFill>
+              <a:srgbClr val="FF7B72"/>
+            </a:solidFill>
+          </a:ln>
+          <a:effectLst/>
+        </p:spPr>
+        <p:style>
+          <a:lnRef idx="2">
+            <a:schemeClr val="accent1"/>
+          </a:lnRef>
+          <a:fillRef idx="0">
+            <a:schemeClr val="accent1"/>
+          </a:fillRef>
+          <a:effectRef idx="1">
+            <a:schemeClr val="accent1"/>
+          </a:effectRef>
+          <a:fontRef idx="minor">
+            <a:schemeClr val="tx1"/>
+          </a:fontRef>
+        </p:style>
+      </p:cxnSp>
+      <p:sp>
+        <p:nvSpPr>
+          <p:cNvPr id="22" name="Rounded Rectangle 21"/>
           <p:cNvSpPr/>
           <p:nvPr/>
         </p:nvSpPr>
@@ -14503,7 +15407,7 @@
       </p:sp>
       <p:sp>
         <p:nvSpPr>
-          <p:cNvPr id="15" name="Rectangle 14"/>
+          <p:cNvPr id="23" name="Rectangle 22"/>
           <p:cNvSpPr/>
           <p:nvPr/>
         </p:nvSpPr>
@@ -14549,7 +15453,7 @@
       </p:sp>
       <p:sp>
         <p:nvSpPr>
-          <p:cNvPr id="16" name="TextBox 15"/>
+          <p:cNvPr id="24" name="TextBox 23"/>
           <p:cNvSpPr txBox="1"/>
           <p:nvPr/>
         </p:nvSpPr>
@@ -14618,7 +15522,7 @@
       </p:sp>
       <p:sp>
         <p:nvSpPr>
-          <p:cNvPr id="17" name="Rectangle 16"/>
+          <p:cNvPr id="25" name="Rectangle 24"/>
           <p:cNvSpPr/>
           <p:nvPr/>
         </p:nvSpPr>
@@ -14664,7 +15568,7 @@
       </p:sp>
       <p:sp>
         <p:nvSpPr>
-          <p:cNvPr id="18" name="TextBox 17"/>
+          <p:cNvPr id="26" name="TextBox 25"/>
           <p:cNvSpPr txBox="1"/>
           <p:nvPr/>
         </p:nvSpPr>
@@ -14733,7 +15637,7 @@
       </p:sp>
       <p:sp>
         <p:nvSpPr>
-          <p:cNvPr id="19" name="Rectangle 18"/>
+          <p:cNvPr id="27" name="Rectangle 26"/>
           <p:cNvSpPr/>
           <p:nvPr/>
         </p:nvSpPr>
@@ -14779,7 +15683,7 @@
       </p:sp>
       <p:sp>
         <p:nvSpPr>
-          <p:cNvPr id="20" name="TextBox 19"/>
+          <p:cNvPr id="28" name="TextBox 27"/>
           <p:cNvSpPr txBox="1"/>
           <p:nvPr/>
         </p:nvSpPr>
@@ -14848,7 +15752,7 @@
       </p:sp>
       <p:sp>
         <p:nvSpPr>
-          <p:cNvPr id="21" name="Rectangle 20"/>
+          <p:cNvPr id="29" name="Rectangle 28"/>
           <p:cNvSpPr/>
           <p:nvPr/>
         </p:nvSpPr>
@@ -14894,7 +15798,7 @@
       </p:sp>
       <p:sp>
         <p:nvSpPr>
-          <p:cNvPr id="22" name="TextBox 21"/>
+          <p:cNvPr id="30" name="TextBox 29"/>
           <p:cNvSpPr txBox="1"/>
           <p:nvPr/>
         </p:nvSpPr>
@@ -14940,7 +15844,7 @@
       </p:sp>
       <p:sp>
         <p:nvSpPr>
-          <p:cNvPr id="23" name="TextBox 22"/>
+          <p:cNvPr id="31" name="TextBox 30"/>
           <p:cNvSpPr txBox="1"/>
           <p:nvPr/>
         </p:nvSpPr>
@@ -15065,7 +15969,7 @@
         <p:spPr>
           <a:xfrm>
             <a:off x="620000" y="560000"/>
-            <a:ext cx="10952000" cy="620000"/>
+            <a:ext cx="10052000" cy="620000"/>
           </a:xfrm>
           <a:prstGeom prst="rect">
             <a:avLst/>
@@ -15294,6 +16198,140 @@
         </p:nvSpPr>
         <p:spPr>
           <a:xfrm>
+            <a:off x="10983200" y="326200"/>
+            <a:ext cx="537600" cy="537600"/>
+          </a:xfrm>
+          <a:prstGeom prst="ellipse">
+            <a:avLst/>
+          </a:prstGeom>
+          <a:noFill/>
+          <a:ln w="38100">
+            <a:solidFill>
+              <a:srgbClr val="74A6FF"/>
+            </a:solidFill>
+          </a:ln>
+          <a:effectLst/>
+        </p:spPr>
+        <p:style>
+          <a:lnRef idx="1">
+            <a:schemeClr val="accent1"/>
+          </a:lnRef>
+          <a:fillRef idx="3">
+            <a:schemeClr val="accent1"/>
+          </a:fillRef>
+          <a:effectRef idx="2">
+            <a:schemeClr val="accent1"/>
+          </a:effectRef>
+          <a:fontRef idx="minor">
+            <a:schemeClr val="lt1"/>
+          </a:fontRef>
+        </p:style>
+        <p:txBody>
+          <a:bodyPr rtlCol="0" anchor="ctr"/>
+          <a:lstStyle/>
+          <a:p>
+            <a:pPr algn="ctr"/>
+          </a:p>
+        </p:txBody>
+      </p:sp>
+      <p:sp>
+        <p:nvSpPr>
+          <p:cNvPr id="9" name="Oval 8"/>
+          <p:cNvSpPr/>
+          <p:nvPr/>
+        </p:nvSpPr>
+        <p:spPr>
+          <a:xfrm>
+            <a:off x="11098400" y="441400"/>
+            <a:ext cx="307200" cy="307200"/>
+          </a:xfrm>
+          <a:prstGeom prst="ellipse">
+            <a:avLst/>
+          </a:prstGeom>
+          <a:noFill/>
+          <a:ln w="38100">
+            <a:solidFill>
+              <a:srgbClr val="74A6FF"/>
+            </a:solidFill>
+          </a:ln>
+          <a:effectLst/>
+        </p:spPr>
+        <p:style>
+          <a:lnRef idx="1">
+            <a:schemeClr val="accent1"/>
+          </a:lnRef>
+          <a:fillRef idx="3">
+            <a:schemeClr val="accent1"/>
+          </a:fillRef>
+          <a:effectRef idx="2">
+            <a:schemeClr val="accent1"/>
+          </a:effectRef>
+          <a:fontRef idx="minor">
+            <a:schemeClr val="lt1"/>
+          </a:fontRef>
+        </p:style>
+        <p:txBody>
+          <a:bodyPr rtlCol="0" anchor="ctr"/>
+          <a:lstStyle/>
+          <a:p>
+            <a:pPr algn="ctr"/>
+          </a:p>
+        </p:txBody>
+      </p:sp>
+      <p:sp>
+        <p:nvSpPr>
+          <p:cNvPr id="10" name="Oval 9"/>
+          <p:cNvSpPr/>
+          <p:nvPr/>
+        </p:nvSpPr>
+        <p:spPr>
+          <a:xfrm>
+            <a:off x="11200800" y="543800"/>
+            <a:ext cx="102400" cy="102400"/>
+          </a:xfrm>
+          <a:prstGeom prst="ellipse">
+            <a:avLst/>
+          </a:prstGeom>
+          <a:solidFill>
+            <a:srgbClr val="74A6FF"/>
+          </a:solidFill>
+          <a:ln w="6350">
+            <a:solidFill>
+              <a:srgbClr val="74A6FF"/>
+            </a:solidFill>
+          </a:ln>
+          <a:effectLst/>
+        </p:spPr>
+        <p:style>
+          <a:lnRef idx="1">
+            <a:schemeClr val="accent1"/>
+          </a:lnRef>
+          <a:fillRef idx="3">
+            <a:schemeClr val="accent1"/>
+          </a:fillRef>
+          <a:effectRef idx="2">
+            <a:schemeClr val="accent1"/>
+          </a:effectRef>
+          <a:fontRef idx="minor">
+            <a:schemeClr val="lt1"/>
+          </a:fontRef>
+        </p:style>
+        <p:txBody>
+          <a:bodyPr rtlCol="0" anchor="ctr"/>
+          <a:lstStyle/>
+          <a:p>
+            <a:pPr algn="ctr"/>
+          </a:p>
+        </p:txBody>
+      </p:sp>
+      <p:sp>
+        <p:nvSpPr>
+          <p:cNvPr id="11" name="Oval 10"/>
+          <p:cNvSpPr/>
+          <p:nvPr/>
+        </p:nvSpPr>
+        <p:spPr>
+          <a:xfrm>
             <a:off x="620000" y="2060000"/>
             <a:ext cx="300000" cy="300000"/>
           </a:xfrm>
@@ -15354,7 +16392,7 @@
       </p:sp>
       <p:sp>
         <p:nvSpPr>
-          <p:cNvPr id="9" name="TextBox 8"/>
+          <p:cNvPr id="12" name="TextBox 11"/>
           <p:cNvSpPr txBox="1"/>
           <p:nvPr/>
         </p:nvSpPr>
@@ -15400,7 +16438,7 @@
       </p:sp>
       <p:sp>
         <p:nvSpPr>
-          <p:cNvPr id="10" name="Oval 9"/>
+          <p:cNvPr id="13" name="Oval 12"/>
           <p:cNvSpPr/>
           <p:nvPr/>
         </p:nvSpPr>
@@ -15466,7 +16504,7 @@
       </p:sp>
       <p:sp>
         <p:nvSpPr>
-          <p:cNvPr id="11" name="TextBox 10"/>
+          <p:cNvPr id="14" name="TextBox 13"/>
           <p:cNvSpPr txBox="1"/>
           <p:nvPr/>
         </p:nvSpPr>
@@ -15512,7 +16550,7 @@
       </p:sp>
       <p:sp>
         <p:nvSpPr>
-          <p:cNvPr id="12" name="Oval 11"/>
+          <p:cNvPr id="15" name="Oval 14"/>
           <p:cNvSpPr/>
           <p:nvPr/>
         </p:nvSpPr>
@@ -15578,7 +16616,7 @@
       </p:sp>
       <p:sp>
         <p:nvSpPr>
-          <p:cNvPr id="13" name="TextBox 12"/>
+          <p:cNvPr id="16" name="TextBox 15"/>
           <p:cNvSpPr txBox="1"/>
           <p:nvPr/>
         </p:nvSpPr>
@@ -15624,7 +16662,7 @@
       </p:sp>
       <p:sp>
         <p:nvSpPr>
-          <p:cNvPr id="14" name="Oval 13"/>
+          <p:cNvPr id="17" name="Oval 16"/>
           <p:cNvSpPr/>
           <p:nvPr/>
         </p:nvSpPr>
@@ -15690,7 +16728,7 @@
       </p:sp>
       <p:sp>
         <p:nvSpPr>
-          <p:cNvPr id="15" name="TextBox 14"/>
+          <p:cNvPr id="18" name="TextBox 17"/>
           <p:cNvSpPr txBox="1"/>
           <p:nvPr/>
         </p:nvSpPr>
@@ -15736,7 +16774,7 @@
       </p:sp>
       <p:sp>
         <p:nvSpPr>
-          <p:cNvPr id="16" name="Oval 15"/>
+          <p:cNvPr id="19" name="Oval 18"/>
           <p:cNvSpPr/>
           <p:nvPr/>
         </p:nvSpPr>
@@ -15802,7 +16840,7 @@
       </p:sp>
       <p:sp>
         <p:nvSpPr>
-          <p:cNvPr id="17" name="TextBox 16"/>
+          <p:cNvPr id="20" name="TextBox 19"/>
           <p:cNvSpPr txBox="1"/>
           <p:nvPr/>
         </p:nvSpPr>
@@ -15848,7 +16886,7 @@
       </p:sp>
       <p:sp>
         <p:nvSpPr>
-          <p:cNvPr id="18" name="Oval 17"/>
+          <p:cNvPr id="21" name="Oval 20"/>
           <p:cNvSpPr/>
           <p:nvPr/>
         </p:nvSpPr>
@@ -15914,7 +16952,7 @@
       </p:sp>
       <p:sp>
         <p:nvSpPr>
-          <p:cNvPr id="19" name="TextBox 18"/>
+          <p:cNvPr id="22" name="TextBox 21"/>
           <p:cNvSpPr txBox="1"/>
           <p:nvPr/>
         </p:nvSpPr>
@@ -15960,7 +16998,7 @@
       </p:sp>
       <p:sp>
         <p:nvSpPr>
-          <p:cNvPr id="20" name="Oval 19"/>
+          <p:cNvPr id="23" name="Oval 22"/>
           <p:cNvSpPr/>
           <p:nvPr/>
         </p:nvSpPr>
@@ -16026,7 +17064,7 @@
       </p:sp>
       <p:sp>
         <p:nvSpPr>
-          <p:cNvPr id="21" name="TextBox 20"/>
+          <p:cNvPr id="24" name="TextBox 23"/>
           <p:cNvSpPr txBox="1"/>
           <p:nvPr/>
         </p:nvSpPr>
@@ -16151,7 +17189,7 @@
         <p:spPr>
           <a:xfrm>
             <a:off x="620000" y="560000"/>
-            <a:ext cx="10952000" cy="620000"/>
+            <a:ext cx="10052000" cy="620000"/>
           </a:xfrm>
           <a:prstGeom prst="rect">
             <a:avLst/>
@@ -16374,7 +17412,123 @@
       </p:sp>
       <p:sp>
         <p:nvSpPr>
-          <p:cNvPr id="8" name="TextBox 7"/>
+          <p:cNvPr id="8" name="Oval 7"/>
+          <p:cNvSpPr/>
+          <p:nvPr/>
+        </p:nvSpPr>
+        <p:spPr>
+          <a:xfrm>
+            <a:off x="11060000" y="339000"/>
+            <a:ext cx="384000" cy="384000"/>
+          </a:xfrm>
+          <a:prstGeom prst="ellipse">
+            <a:avLst/>
+          </a:prstGeom>
+          <a:noFill/>
+          <a:ln w="38100">
+            <a:solidFill>
+              <a:srgbClr val="F0C96B"/>
+            </a:solidFill>
+          </a:ln>
+          <a:effectLst/>
+        </p:spPr>
+        <p:style>
+          <a:lnRef idx="1">
+            <a:schemeClr val="accent1"/>
+          </a:lnRef>
+          <a:fillRef idx="3">
+            <a:schemeClr val="accent1"/>
+          </a:fillRef>
+          <a:effectRef idx="2">
+            <a:schemeClr val="accent1"/>
+          </a:effectRef>
+          <a:fontRef idx="minor">
+            <a:schemeClr val="lt1"/>
+          </a:fontRef>
+        </p:style>
+        <p:txBody>
+          <a:bodyPr rtlCol="0" anchor="ctr"/>
+          <a:lstStyle/>
+          <a:p>
+            <a:pPr algn="ctr"/>
+          </a:p>
+        </p:txBody>
+      </p:sp>
+      <p:cxnSp>
+        <p:nvCxnSpPr>
+          <p:cNvPr id="9" name="Connector 8"/>
+          <p:cNvCxnSpPr/>
+          <p:nvPr/>
+        </p:nvCxnSpPr>
+        <p:spPr>
+          <a:xfrm>
+            <a:off x="11188000" y="748600"/>
+            <a:ext cx="128000" cy="0"/>
+          </a:xfrm>
+          <a:prstGeom prst="line">
+            <a:avLst/>
+          </a:prstGeom>
+          <a:ln w="38100">
+            <a:solidFill>
+              <a:srgbClr val="F0C96B"/>
+            </a:solidFill>
+          </a:ln>
+          <a:effectLst/>
+        </p:spPr>
+        <p:style>
+          <a:lnRef idx="2">
+            <a:schemeClr val="accent1"/>
+          </a:lnRef>
+          <a:fillRef idx="0">
+            <a:schemeClr val="accent1"/>
+          </a:fillRef>
+          <a:effectRef idx="1">
+            <a:schemeClr val="accent1"/>
+          </a:effectRef>
+          <a:fontRef idx="minor">
+            <a:schemeClr val="tx1"/>
+          </a:fontRef>
+        </p:style>
+      </p:cxnSp>
+      <p:cxnSp>
+        <p:nvCxnSpPr>
+          <p:cNvPr id="10" name="Connector 9"/>
+          <p:cNvCxnSpPr/>
+          <p:nvPr/>
+        </p:nvCxnSpPr>
+        <p:spPr>
+          <a:xfrm>
+            <a:off x="11200800" y="825400"/>
+            <a:ext cx="102400" cy="0"/>
+          </a:xfrm>
+          <a:prstGeom prst="line">
+            <a:avLst/>
+          </a:prstGeom>
+          <a:ln w="38100">
+            <a:solidFill>
+              <a:srgbClr val="F0C96B"/>
+            </a:solidFill>
+          </a:ln>
+          <a:effectLst/>
+        </p:spPr>
+        <p:style>
+          <a:lnRef idx="2">
+            <a:schemeClr val="accent1"/>
+          </a:lnRef>
+          <a:fillRef idx="0">
+            <a:schemeClr val="accent1"/>
+          </a:fillRef>
+          <a:effectRef idx="1">
+            <a:schemeClr val="accent1"/>
+          </a:effectRef>
+          <a:fontRef idx="minor">
+            <a:schemeClr val="tx1"/>
+          </a:fontRef>
+        </p:style>
+      </p:cxnSp>
+      <p:sp>
+        <p:nvSpPr>
+          <p:cNvPr id="11" name="TextBox 10"/>
           <p:cNvSpPr txBox="1"/>
           <p:nvPr/>
         </p:nvSpPr>
@@ -16420,7 +17574,7 @@
       </p:sp>
       <p:sp>
         <p:nvSpPr>
-          <p:cNvPr id="9" name="Rounded Rectangle 8"/>
+          <p:cNvPr id="12" name="Rounded Rectangle 11"/>
           <p:cNvSpPr/>
           <p:nvPr/>
         </p:nvSpPr>
@@ -16470,7 +17624,7 @@
       </p:sp>
       <p:sp>
         <p:nvSpPr>
-          <p:cNvPr id="10" name="Rectangle 9"/>
+          <p:cNvPr id="13" name="Rectangle 12"/>
           <p:cNvSpPr/>
           <p:nvPr/>
         </p:nvSpPr>
@@ -16516,7 +17670,7 @@
       </p:sp>
       <p:sp>
         <p:nvSpPr>
-          <p:cNvPr id="11" name="TextBox 10"/>
+          <p:cNvPr id="14" name="TextBox 13"/>
           <p:cNvSpPr txBox="1"/>
           <p:nvPr/>
         </p:nvSpPr>
@@ -16756,7 +17910,7 @@
         <p:spPr>
           <a:xfrm>
             <a:off x="620000" y="560000"/>
-            <a:ext cx="10952000" cy="620000"/>
+            <a:ext cx="10052000" cy="620000"/>
           </a:xfrm>
           <a:prstGeom prst="rect">
             <a:avLst/>
@@ -16985,6 +18139,124 @@
         </p:nvSpPr>
         <p:spPr>
           <a:xfrm>
+            <a:off x="10996000" y="339000"/>
+            <a:ext cx="512000" cy="512000"/>
+          </a:xfrm>
+          <a:prstGeom prst="roundRect">
+            <a:avLst>
+              <a:gd name="adj" fmla="val 20000"/>
+            </a:avLst>
+          </a:prstGeom>
+          <a:noFill/>
+          <a:ln w="38100">
+            <a:solidFill>
+              <a:srgbClr val="74A6FF"/>
+            </a:solidFill>
+          </a:ln>
+          <a:effectLst/>
+        </p:spPr>
+        <p:style>
+          <a:lnRef idx="1">
+            <a:schemeClr val="accent1"/>
+          </a:lnRef>
+          <a:fillRef idx="3">
+            <a:schemeClr val="accent1"/>
+          </a:fillRef>
+          <a:effectRef idx="2">
+            <a:schemeClr val="accent1"/>
+          </a:effectRef>
+          <a:fontRef idx="minor">
+            <a:schemeClr val="lt1"/>
+          </a:fontRef>
+        </p:style>
+        <p:txBody>
+          <a:bodyPr rtlCol="0" anchor="ctr"/>
+          <a:lstStyle/>
+          <a:p>
+            <a:pPr algn="ctr"/>
+          </a:p>
+        </p:txBody>
+      </p:sp>
+      <p:cxnSp>
+        <p:nvCxnSpPr>
+          <p:cNvPr id="9" name="Connector 8"/>
+          <p:cNvCxnSpPr/>
+          <p:nvPr/>
+        </p:nvCxnSpPr>
+        <p:spPr>
+          <a:xfrm>
+            <a:off x="11124000" y="607800"/>
+            <a:ext cx="89600" cy="102400"/>
+          </a:xfrm>
+          <a:prstGeom prst="line">
+            <a:avLst/>
+          </a:prstGeom>
+          <a:ln w="49530">
+            <a:solidFill>
+              <a:srgbClr val="74A6FF"/>
+            </a:solidFill>
+          </a:ln>
+          <a:effectLst/>
+        </p:spPr>
+        <p:style>
+          <a:lnRef idx="2">
+            <a:schemeClr val="accent1"/>
+          </a:lnRef>
+          <a:fillRef idx="0">
+            <a:schemeClr val="accent1"/>
+          </a:fillRef>
+          <a:effectRef idx="1">
+            <a:schemeClr val="accent1"/>
+          </a:effectRef>
+          <a:fontRef idx="minor">
+            <a:schemeClr val="tx1"/>
+          </a:fontRef>
+        </p:style>
+      </p:cxnSp>
+      <p:cxnSp>
+        <p:nvCxnSpPr>
+          <p:cNvPr id="10" name="Connector 9"/>
+          <p:cNvCxnSpPr/>
+          <p:nvPr/>
+        </p:nvCxnSpPr>
+        <p:spPr>
+          <a:xfrm flipV="1">
+            <a:off x="11213600" y="479800"/>
+            <a:ext cx="179200" cy="230400"/>
+          </a:xfrm>
+          <a:prstGeom prst="line">
+            <a:avLst/>
+          </a:prstGeom>
+          <a:ln w="49530">
+            <a:solidFill>
+              <a:srgbClr val="74A6FF"/>
+            </a:solidFill>
+          </a:ln>
+          <a:effectLst/>
+        </p:spPr>
+        <p:style>
+          <a:lnRef idx="2">
+            <a:schemeClr val="accent1"/>
+          </a:lnRef>
+          <a:fillRef idx="0">
+            <a:schemeClr val="accent1"/>
+          </a:fillRef>
+          <a:effectRef idx="1">
+            <a:schemeClr val="accent1"/>
+          </a:effectRef>
+          <a:fontRef idx="minor">
+            <a:schemeClr val="tx1"/>
+          </a:fontRef>
+        </p:style>
+      </p:cxnSp>
+      <p:sp>
+        <p:nvSpPr>
+          <p:cNvPr id="11" name="Rounded Rectangle 10"/>
+          <p:cNvSpPr/>
+          <p:nvPr/>
+        </p:nvSpPr>
+        <p:spPr>
+          <a:xfrm>
             <a:off x="620000" y="2620000"/>
             <a:ext cx="300000" cy="300000"/>
           </a:xfrm>
@@ -17047,7 +18319,7 @@
       </p:sp>
       <p:sp>
         <p:nvSpPr>
-          <p:cNvPr id="9" name="TextBox 8"/>
+          <p:cNvPr id="12" name="TextBox 11"/>
           <p:cNvSpPr txBox="1"/>
           <p:nvPr/>
         </p:nvSpPr>
@@ -17093,7 +18365,7 @@
       </p:sp>
       <p:sp>
         <p:nvSpPr>
-          <p:cNvPr id="10" name="Rounded Rectangle 9"/>
+          <p:cNvPr id="13" name="Rounded Rectangle 12"/>
           <p:cNvSpPr/>
           <p:nvPr/>
         </p:nvSpPr>
@@ -17161,7 +18433,7 @@
       </p:sp>
       <p:sp>
         <p:nvSpPr>
-          <p:cNvPr id="11" name="TextBox 10"/>
+          <p:cNvPr id="14" name="TextBox 13"/>
           <p:cNvSpPr txBox="1"/>
           <p:nvPr/>
         </p:nvSpPr>
@@ -17207,7 +18479,7 @@
       </p:sp>
       <p:sp>
         <p:nvSpPr>
-          <p:cNvPr id="12" name="Rounded Rectangle 11"/>
+          <p:cNvPr id="15" name="Rounded Rectangle 14"/>
           <p:cNvSpPr/>
           <p:nvPr/>
         </p:nvSpPr>
@@ -17275,7 +18547,7 @@
       </p:sp>
       <p:sp>
         <p:nvSpPr>
-          <p:cNvPr id="13" name="TextBox 12"/>
+          <p:cNvPr id="16" name="TextBox 15"/>
           <p:cNvSpPr txBox="1"/>
           <p:nvPr/>
         </p:nvSpPr>
@@ -17321,7 +18593,7 @@
       </p:sp>
       <p:sp>
         <p:nvSpPr>
-          <p:cNvPr id="14" name="Rounded Rectangle 13"/>
+          <p:cNvPr id="17" name="Rounded Rectangle 16"/>
           <p:cNvSpPr/>
           <p:nvPr/>
         </p:nvSpPr>
@@ -17389,7 +18661,7 @@
       </p:sp>
       <p:sp>
         <p:nvSpPr>
-          <p:cNvPr id="15" name="TextBox 14"/>
+          <p:cNvPr id="18" name="TextBox 17"/>
           <p:cNvSpPr txBox="1"/>
           <p:nvPr/>
         </p:nvSpPr>
@@ -17435,7 +18707,7 @@
       </p:sp>
       <p:sp>
         <p:nvSpPr>
-          <p:cNvPr id="16" name="Rounded Rectangle 15"/>
+          <p:cNvPr id="19" name="Rounded Rectangle 18"/>
           <p:cNvSpPr/>
           <p:nvPr/>
         </p:nvSpPr>
@@ -17503,7 +18775,7 @@
       </p:sp>
       <p:sp>
         <p:nvSpPr>
-          <p:cNvPr id="17" name="TextBox 16"/>
+          <p:cNvPr id="20" name="TextBox 19"/>
           <p:cNvSpPr txBox="1"/>
           <p:nvPr/>
         </p:nvSpPr>
@@ -17549,7 +18821,7 @@
       </p:sp>
       <p:sp>
         <p:nvSpPr>
-          <p:cNvPr id="18" name="Rounded Rectangle 17"/>
+          <p:cNvPr id="21" name="Rounded Rectangle 20"/>
           <p:cNvSpPr/>
           <p:nvPr/>
         </p:nvSpPr>
@@ -17617,7 +18889,7 @@
       </p:sp>
       <p:sp>
         <p:nvSpPr>
-          <p:cNvPr id="19" name="TextBox 18"/>
+          <p:cNvPr id="22" name="TextBox 21"/>
           <p:cNvSpPr txBox="1"/>
           <p:nvPr/>
         </p:nvSpPr>
@@ -17663,7 +18935,7 @@
       </p:sp>
       <p:sp>
         <p:nvSpPr>
-          <p:cNvPr id="20" name="Rounded Rectangle 19"/>
+          <p:cNvPr id="23" name="Rounded Rectangle 22"/>
           <p:cNvSpPr/>
           <p:nvPr/>
         </p:nvSpPr>
@@ -17731,7 +19003,7 @@
       </p:sp>
       <p:sp>
         <p:nvSpPr>
-          <p:cNvPr id="21" name="TextBox 20"/>
+          <p:cNvPr id="24" name="TextBox 23"/>
           <p:cNvSpPr txBox="1"/>
           <p:nvPr/>
         </p:nvSpPr>
@@ -17777,7 +19049,7 @@
       </p:sp>
       <p:sp>
         <p:nvSpPr>
-          <p:cNvPr id="22" name="Rounded Rectangle 21"/>
+          <p:cNvPr id="25" name="Rounded Rectangle 24"/>
           <p:cNvSpPr/>
           <p:nvPr/>
         </p:nvSpPr>
@@ -17845,7 +19117,7 @@
       </p:sp>
       <p:sp>
         <p:nvSpPr>
-          <p:cNvPr id="23" name="TextBox 22"/>
+          <p:cNvPr id="26" name="TextBox 25"/>
           <p:cNvSpPr txBox="1"/>
           <p:nvPr/>
         </p:nvSpPr>
@@ -17891,7 +19163,7 @@
       </p:sp>
       <p:sp>
         <p:nvSpPr>
-          <p:cNvPr id="24" name="Rounded Rectangle 23"/>
+          <p:cNvPr id="27" name="Rounded Rectangle 26"/>
           <p:cNvSpPr/>
           <p:nvPr/>
         </p:nvSpPr>
@@ -17959,7 +19231,7 @@
       </p:sp>
       <p:sp>
         <p:nvSpPr>
-          <p:cNvPr id="25" name="TextBox 24"/>
+          <p:cNvPr id="28" name="TextBox 27"/>
           <p:cNvSpPr txBox="1"/>
           <p:nvPr/>
         </p:nvSpPr>
@@ -18005,7 +19277,7 @@
       </p:sp>
       <p:sp>
         <p:nvSpPr>
-          <p:cNvPr id="26" name="Rounded Rectangle 25"/>
+          <p:cNvPr id="29" name="Rounded Rectangle 28"/>
           <p:cNvSpPr/>
           <p:nvPr/>
         </p:nvSpPr>
@@ -18073,7 +19345,7 @@
       </p:sp>
       <p:sp>
         <p:nvSpPr>
-          <p:cNvPr id="27" name="TextBox 26"/>
+          <p:cNvPr id="30" name="TextBox 29"/>
           <p:cNvSpPr txBox="1"/>
           <p:nvPr/>
         </p:nvSpPr>
@@ -18189,53 +19461,23 @@
       </p:sp>
       <p:sp>
         <p:nvSpPr>
-          <p:cNvPr id="3" name="Freeform 2"/>
+          <p:cNvPr id="3" name="Oval 2"/>
           <p:cNvSpPr/>
           <p:nvPr/>
         </p:nvSpPr>
         <p:spPr>
           <a:xfrm>
-            <a:off x="-163645" y="4308000"/>
-            <a:ext cx="2827290" cy="2756404"/>
-          </a:xfrm>
-          <a:custGeom>
-            <a:avLst/>
-            <a:gdLst/>
-            <a:ahLst/>
-            <a:cxnLst/>
-            <a:rect l="l" t="t" r="r" b="b"/>
-            <a:pathLst>
-              <a:path w="2827290" h="2756404">
-                <a:moveTo>
-                  <a:pt x="1413645" y="0"/>
-                </a:moveTo>
-                <a:lnTo>
-                  <a:pt x="2547300" y="545939"/>
-                </a:lnTo>
-                <a:lnTo>
-                  <a:pt x="2827290" y="1772655"/>
-                </a:lnTo>
-                <a:lnTo>
-                  <a:pt x="2042776" y="2756404"/>
-                </a:lnTo>
-                <a:lnTo>
-                  <a:pt x="784513" y="2756404"/>
-                </a:lnTo>
-                <a:lnTo>
-                  <a:pt x="0" y="1772655"/>
-                </a:lnTo>
-                <a:lnTo>
-                  <a:pt x="279989" y="545939"/>
-                </a:lnTo>
-                <a:close/>
-              </a:path>
-            </a:pathLst>
-          </a:custGeom>
-          <a:noFill/>
-          <a:ln w="31750">
-            <a:solidFill>
-              <a:srgbClr val="26354E"/>
-            </a:solidFill>
+            <a:off x="-1400000" y="4358000"/>
+            <a:ext cx="3800000" cy="3800000"/>
+          </a:xfrm>
+          <a:prstGeom prst="ellipse">
+            <a:avLst/>
+          </a:prstGeom>
+          <a:solidFill>
+            <a:srgbClr val="0B1220"/>
+          </a:solidFill>
+          <a:ln>
+            <a:noFill/>
           </a:ln>
           <a:effectLst/>
         </p:spPr>
@@ -18261,9 +19503,33 @@
           </a:p>
         </p:txBody>
       </p:sp>
-      <p:sp>
-        <p:nvSpPr>
-          <p:cNvPr id="4" name="TextBox 3"/>
+      <p:pic>
+        <p:nvPicPr>
+          <p:cNvPr id="4" name="Picture 3" descr="kubernetes.png"/>
+          <p:cNvPicPr>
+            <a:picLocks noChangeAspect="1"/>
+          </p:cNvPicPr>
+          <p:nvPr/>
+        </p:nvPicPr>
+        <p:blipFill>
+          <a:blip r:embed="rId2"/>
+          <a:stretch>
+            <a:fillRect/>
+          </a:stretch>
+        </p:blipFill>
+        <p:spPr>
+          <a:xfrm>
+            <a:off x="9542000" y="900000"/>
+            <a:ext cx="1650000" cy="1650000"/>
+          </a:xfrm>
+          <a:prstGeom prst="rect">
+            <a:avLst/>
+          </a:prstGeom>
+        </p:spPr>
+      </p:pic>
+      <p:sp>
+        <p:nvSpPr>
+          <p:cNvPr id="5" name="TextBox 4"/>
           <p:cNvSpPr txBox="1"/>
           <p:nvPr/>
         </p:nvSpPr>
@@ -18309,14 +19575,14 @@
       </p:sp>
       <p:sp>
         <p:nvSpPr>
-          <p:cNvPr id="5" name="TextBox 4"/>
+          <p:cNvPr id="6" name="TextBox 5"/>
           <p:cNvSpPr txBox="1"/>
           <p:nvPr/>
         </p:nvSpPr>
         <p:spPr>
           <a:xfrm>
-            <a:off x="640000" y="1500000"/>
-            <a:ext cx="10000000" cy="900000"/>
+            <a:off x="640000" y="1560000"/>
+            <a:ext cx="9200000" cy="900000"/>
           </a:xfrm>
           <a:prstGeom prst="rect">
             <a:avLst/>
@@ -18342,7 +19608,7 @@
               <a:buNone/>
             </a:pPr>
             <a:r>
-              <a:rPr sz="4600" b="0" i="0">
+              <a:rPr sz="4400" b="0" i="0">
                 <a:solidFill>
                   <a:srgbClr val="F3F6FC"/>
                 </a:solidFill>
@@ -18355,7 +19621,7 @@
       </p:sp>
       <p:sp>
         <p:nvSpPr>
-          <p:cNvPr id="6" name="Rectangle 5"/>
+          <p:cNvPr id="7" name="Rectangle 6"/>
           <p:cNvSpPr/>
           <p:nvPr/>
         </p:nvSpPr>
@@ -18401,7 +19667,7 @@
       </p:sp>
       <p:sp>
         <p:nvSpPr>
-          <p:cNvPr id="7" name="TextBox 6"/>
+          <p:cNvPr id="8" name="TextBox 7"/>
           <p:cNvSpPr txBox="1"/>
           <p:nvPr/>
         </p:nvSpPr>
@@ -18493,7 +19759,7 @@
       </p:sp>
       <p:sp>
         <p:nvSpPr>
-          <p:cNvPr id="8" name="Rectangle 7"/>
+          <p:cNvPr id="9" name="Rectangle 8"/>
           <p:cNvSpPr/>
           <p:nvPr/>
         </p:nvSpPr>
@@ -18539,7 +19805,7 @@
       </p:sp>
       <p:sp>
         <p:nvSpPr>
-          <p:cNvPr id="9" name="TextBox 8"/>
+          <p:cNvPr id="10" name="TextBox 9"/>
           <p:cNvSpPr txBox="1"/>
           <p:nvPr/>
         </p:nvSpPr>
@@ -18585,7 +19851,7 @@
       </p:sp>
       <p:sp>
         <p:nvSpPr>
-          <p:cNvPr id="10" name="TextBox 9"/>
+          <p:cNvPr id="11" name="TextBox 10"/>
           <p:cNvSpPr txBox="1"/>
           <p:nvPr/>
         </p:nvSpPr>
@@ -18710,7 +19976,7 @@
         <p:spPr>
           <a:xfrm>
             <a:off x="620000" y="560000"/>
-            <a:ext cx="10952000" cy="620000"/>
+            <a:ext cx="10052000" cy="620000"/>
           </a:xfrm>
           <a:prstGeom prst="rect">
             <a:avLst/>
@@ -18933,7 +20199,123 @@
       </p:sp>
       <p:sp>
         <p:nvSpPr>
-          <p:cNvPr id="8" name="TextBox 7"/>
+          <p:cNvPr id="8" name="Oval 7"/>
+          <p:cNvSpPr/>
+          <p:nvPr/>
+        </p:nvSpPr>
+        <p:spPr>
+          <a:xfrm>
+            <a:off x="10983200" y="326200"/>
+            <a:ext cx="537600" cy="537600"/>
+          </a:xfrm>
+          <a:prstGeom prst="ellipse">
+            <a:avLst/>
+          </a:prstGeom>
+          <a:noFill/>
+          <a:ln w="38100">
+            <a:solidFill>
+              <a:srgbClr val="74A6FF"/>
+            </a:solidFill>
+          </a:ln>
+          <a:effectLst/>
+        </p:spPr>
+        <p:style>
+          <a:lnRef idx="1">
+            <a:schemeClr val="accent1"/>
+          </a:lnRef>
+          <a:fillRef idx="3">
+            <a:schemeClr val="accent1"/>
+          </a:fillRef>
+          <a:effectRef idx="2">
+            <a:schemeClr val="accent1"/>
+          </a:effectRef>
+          <a:fontRef idx="minor">
+            <a:schemeClr val="lt1"/>
+          </a:fontRef>
+        </p:style>
+        <p:txBody>
+          <a:bodyPr rtlCol="0" anchor="ctr"/>
+          <a:lstStyle/>
+          <a:p>
+            <a:pPr algn="ctr"/>
+          </a:p>
+        </p:txBody>
+      </p:sp>
+      <p:cxnSp>
+        <p:nvCxnSpPr>
+          <p:cNvPr id="9" name="Connector 8"/>
+          <p:cNvCxnSpPr/>
+          <p:nvPr/>
+        </p:nvCxnSpPr>
+        <p:spPr>
+          <a:xfrm flipV="1">
+            <a:off x="11252000" y="415800"/>
+            <a:ext cx="0" cy="179200"/>
+          </a:xfrm>
+          <a:prstGeom prst="line">
+            <a:avLst/>
+          </a:prstGeom>
+          <a:ln w="38100">
+            <a:solidFill>
+              <a:srgbClr val="74A6FF"/>
+            </a:solidFill>
+          </a:ln>
+          <a:effectLst/>
+        </p:spPr>
+        <p:style>
+          <a:lnRef idx="2">
+            <a:schemeClr val="accent1"/>
+          </a:lnRef>
+          <a:fillRef idx="0">
+            <a:schemeClr val="accent1"/>
+          </a:fillRef>
+          <a:effectRef idx="1">
+            <a:schemeClr val="accent1"/>
+          </a:effectRef>
+          <a:fontRef idx="minor">
+            <a:schemeClr val="tx1"/>
+          </a:fontRef>
+        </p:style>
+      </p:cxnSp>
+      <p:cxnSp>
+        <p:nvCxnSpPr>
+          <p:cNvPr id="10" name="Connector 9"/>
+          <p:cNvCxnSpPr/>
+          <p:nvPr/>
+        </p:nvCxnSpPr>
+        <p:spPr>
+          <a:xfrm>
+            <a:off x="11252000" y="595000"/>
+            <a:ext cx="128000" cy="51200"/>
+          </a:xfrm>
+          <a:prstGeom prst="line">
+            <a:avLst/>
+          </a:prstGeom>
+          <a:ln w="38100">
+            <a:solidFill>
+              <a:srgbClr val="74A6FF"/>
+            </a:solidFill>
+          </a:ln>
+          <a:effectLst/>
+        </p:spPr>
+        <p:style>
+          <a:lnRef idx="2">
+            <a:schemeClr val="accent1"/>
+          </a:lnRef>
+          <a:fillRef idx="0">
+            <a:schemeClr val="accent1"/>
+          </a:fillRef>
+          <a:effectRef idx="1">
+            <a:schemeClr val="accent1"/>
+          </a:effectRef>
+          <a:fontRef idx="minor">
+            <a:schemeClr val="tx1"/>
+          </a:fontRef>
+        </p:style>
+      </p:cxnSp>
+      <p:sp>
+        <p:nvSpPr>
+          <p:cNvPr id="11" name="TextBox 10"/>
           <p:cNvSpPr txBox="1"/>
           <p:nvPr/>
         </p:nvSpPr>
@@ -18979,7 +20361,7 @@
       </p:sp>
       <p:sp>
         <p:nvSpPr>
-          <p:cNvPr id="9" name="Rectangle 8"/>
+          <p:cNvPr id="12" name="Rectangle 11"/>
           <p:cNvSpPr/>
           <p:nvPr/>
         </p:nvSpPr>
@@ -19025,7 +20407,7 @@
       </p:sp>
       <p:sp>
         <p:nvSpPr>
-          <p:cNvPr id="10" name="TextBox 9"/>
+          <p:cNvPr id="13" name="TextBox 12"/>
           <p:cNvSpPr txBox="1"/>
           <p:nvPr/>
         </p:nvSpPr>
@@ -19071,7 +20453,7 @@
       </p:sp>
       <p:sp>
         <p:nvSpPr>
-          <p:cNvPr id="11" name="TextBox 10"/>
+          <p:cNvPr id="14" name="TextBox 13"/>
           <p:cNvSpPr txBox="1"/>
           <p:nvPr/>
         </p:nvSpPr>
@@ -19117,7 +20499,7 @@
       </p:sp>
       <p:sp>
         <p:nvSpPr>
-          <p:cNvPr id="12" name="Rectangle 11"/>
+          <p:cNvPr id="15" name="Rectangle 14"/>
           <p:cNvSpPr/>
           <p:nvPr/>
         </p:nvSpPr>
@@ -19163,7 +20545,7 @@
       </p:sp>
       <p:sp>
         <p:nvSpPr>
-          <p:cNvPr id="13" name="TextBox 12"/>
+          <p:cNvPr id="16" name="TextBox 15"/>
           <p:cNvSpPr txBox="1"/>
           <p:nvPr/>
         </p:nvSpPr>
@@ -19209,7 +20591,7 @@
       </p:sp>
       <p:sp>
         <p:nvSpPr>
-          <p:cNvPr id="14" name="TextBox 13"/>
+          <p:cNvPr id="17" name="TextBox 16"/>
           <p:cNvSpPr txBox="1"/>
           <p:nvPr/>
         </p:nvSpPr>
@@ -19255,7 +20637,7 @@
       </p:sp>
       <p:sp>
         <p:nvSpPr>
-          <p:cNvPr id="15" name="Rectangle 14"/>
+          <p:cNvPr id="18" name="Rectangle 17"/>
           <p:cNvSpPr/>
           <p:nvPr/>
         </p:nvSpPr>
@@ -19301,7 +20683,7 @@
       </p:sp>
       <p:sp>
         <p:nvSpPr>
-          <p:cNvPr id="16" name="TextBox 15"/>
+          <p:cNvPr id="19" name="TextBox 18"/>
           <p:cNvSpPr txBox="1"/>
           <p:nvPr/>
         </p:nvSpPr>
@@ -19347,7 +20729,7 @@
       </p:sp>
       <p:sp>
         <p:nvSpPr>
-          <p:cNvPr id="17" name="Rounded Rectangle 16"/>
+          <p:cNvPr id="20" name="Rounded Rectangle 19"/>
           <p:cNvSpPr/>
           <p:nvPr/>
         </p:nvSpPr>
@@ -19395,7 +20777,7 @@
       </p:sp>
       <p:sp>
         <p:nvSpPr>
-          <p:cNvPr id="18" name="TextBox 17"/>
+          <p:cNvPr id="21" name="TextBox 20"/>
           <p:cNvSpPr txBox="1"/>
           <p:nvPr/>
         </p:nvSpPr>
@@ -19441,7 +20823,7 @@
       </p:sp>
       <p:sp>
         <p:nvSpPr>
-          <p:cNvPr id="19" name="Rectangle 18"/>
+          <p:cNvPr id="22" name="Rectangle 21"/>
           <p:cNvSpPr/>
           <p:nvPr/>
         </p:nvSpPr>
@@ -19487,7 +20869,7 @@
       </p:sp>
       <p:sp>
         <p:nvSpPr>
-          <p:cNvPr id="20" name="TextBox 19"/>
+          <p:cNvPr id="23" name="TextBox 22"/>
           <p:cNvSpPr txBox="1"/>
           <p:nvPr/>
         </p:nvSpPr>
@@ -19533,7 +20915,7 @@
       </p:sp>
       <p:sp>
         <p:nvSpPr>
-          <p:cNvPr id="21" name="TextBox 20"/>
+          <p:cNvPr id="24" name="TextBox 23"/>
           <p:cNvSpPr txBox="1"/>
           <p:nvPr/>
         </p:nvSpPr>
@@ -19579,7 +20961,7 @@
       </p:sp>
       <p:sp>
         <p:nvSpPr>
-          <p:cNvPr id="22" name="Rectangle 21"/>
+          <p:cNvPr id="25" name="Rectangle 24"/>
           <p:cNvSpPr/>
           <p:nvPr/>
         </p:nvSpPr>
@@ -19625,7 +21007,7 @@
       </p:sp>
       <p:sp>
         <p:nvSpPr>
-          <p:cNvPr id="23" name="TextBox 22"/>
+          <p:cNvPr id="26" name="TextBox 25"/>
           <p:cNvSpPr txBox="1"/>
           <p:nvPr/>
         </p:nvSpPr>
@@ -19671,7 +21053,7 @@
       </p:sp>
       <p:sp>
         <p:nvSpPr>
-          <p:cNvPr id="24" name="Rounded Rectangle 23"/>
+          <p:cNvPr id="27" name="Rounded Rectangle 26"/>
           <p:cNvSpPr/>
           <p:nvPr/>
         </p:nvSpPr>
@@ -19719,7 +21101,7 @@
       </p:sp>
       <p:sp>
         <p:nvSpPr>
-          <p:cNvPr id="25" name="TextBox 24"/>
+          <p:cNvPr id="28" name="TextBox 27"/>
           <p:cNvSpPr txBox="1"/>
           <p:nvPr/>
         </p:nvSpPr>
@@ -19765,7 +21147,7 @@
       </p:sp>
       <p:sp>
         <p:nvSpPr>
-          <p:cNvPr id="26" name="Rectangle 25"/>
+          <p:cNvPr id="29" name="Rectangle 28"/>
           <p:cNvSpPr/>
           <p:nvPr/>
         </p:nvSpPr>
@@ -19811,7 +21193,7 @@
       </p:sp>
       <p:sp>
         <p:nvSpPr>
-          <p:cNvPr id="27" name="TextBox 26"/>
+          <p:cNvPr id="30" name="TextBox 29"/>
           <p:cNvSpPr txBox="1"/>
           <p:nvPr/>
         </p:nvSpPr>
@@ -19857,7 +21239,7 @@
       </p:sp>
       <p:sp>
         <p:nvSpPr>
-          <p:cNvPr id="28" name="TextBox 27"/>
+          <p:cNvPr id="31" name="TextBox 30"/>
           <p:cNvSpPr txBox="1"/>
           <p:nvPr/>
         </p:nvSpPr>
@@ -19903,7 +21285,7 @@
       </p:sp>
       <p:sp>
         <p:nvSpPr>
-          <p:cNvPr id="29" name="Rectangle 28"/>
+          <p:cNvPr id="32" name="Rectangle 31"/>
           <p:cNvSpPr/>
           <p:nvPr/>
         </p:nvSpPr>
@@ -19949,7 +21331,7 @@
       </p:sp>
       <p:sp>
         <p:nvSpPr>
-          <p:cNvPr id="30" name="TextBox 29"/>
+          <p:cNvPr id="33" name="TextBox 32"/>
           <p:cNvSpPr txBox="1"/>
           <p:nvPr/>
         </p:nvSpPr>
@@ -19995,7 +21377,7 @@
       </p:sp>
       <p:sp>
         <p:nvSpPr>
-          <p:cNvPr id="31" name="Rounded Rectangle 30"/>
+          <p:cNvPr id="34" name="Rounded Rectangle 33"/>
           <p:cNvSpPr/>
           <p:nvPr/>
         </p:nvSpPr>
@@ -20043,7 +21425,7 @@
       </p:sp>
       <p:sp>
         <p:nvSpPr>
-          <p:cNvPr id="32" name="TextBox 31"/>
+          <p:cNvPr id="35" name="TextBox 34"/>
           <p:cNvSpPr txBox="1"/>
           <p:nvPr/>
         </p:nvSpPr>
@@ -20089,7 +21471,7 @@
       </p:sp>
       <p:sp>
         <p:nvSpPr>
-          <p:cNvPr id="33" name="Rectangle 32"/>
+          <p:cNvPr id="36" name="Rectangle 35"/>
           <p:cNvSpPr/>
           <p:nvPr/>
         </p:nvSpPr>
@@ -20135,7 +21517,7 @@
       </p:sp>
       <p:sp>
         <p:nvSpPr>
-          <p:cNvPr id="34" name="TextBox 33"/>
+          <p:cNvPr id="37" name="TextBox 36"/>
           <p:cNvSpPr txBox="1"/>
           <p:nvPr/>
         </p:nvSpPr>
@@ -20181,7 +21563,7 @@
       </p:sp>
       <p:sp>
         <p:nvSpPr>
-          <p:cNvPr id="35" name="Rounded Rectangle 34"/>
+          <p:cNvPr id="38" name="Rounded Rectangle 37"/>
           <p:cNvSpPr/>
           <p:nvPr/>
         </p:nvSpPr>
@@ -20229,7 +21611,7 @@
       </p:sp>
       <p:sp>
         <p:nvSpPr>
-          <p:cNvPr id="36" name="TextBox 35"/>
+          <p:cNvPr id="39" name="TextBox 38"/>
           <p:cNvSpPr txBox="1"/>
           <p:nvPr/>
         </p:nvSpPr>
@@ -20275,7 +21657,7 @@
       </p:sp>
       <p:sp>
         <p:nvSpPr>
-          <p:cNvPr id="37" name="Rectangle 36"/>
+          <p:cNvPr id="40" name="Rectangle 39"/>
           <p:cNvSpPr/>
           <p:nvPr/>
         </p:nvSpPr>
@@ -20321,7 +21703,7 @@
       </p:sp>
       <p:sp>
         <p:nvSpPr>
-          <p:cNvPr id="38" name="TextBox 37"/>
+          <p:cNvPr id="41" name="TextBox 40"/>
           <p:cNvSpPr txBox="1"/>
           <p:nvPr/>
         </p:nvSpPr>
@@ -20367,7 +21749,7 @@
       </p:sp>
       <p:sp>
         <p:nvSpPr>
-          <p:cNvPr id="39" name="TextBox 38"/>
+          <p:cNvPr id="42" name="TextBox 41"/>
           <p:cNvSpPr txBox="1"/>
           <p:nvPr/>
         </p:nvSpPr>
@@ -20413,7 +21795,7 @@
       </p:sp>
       <p:sp>
         <p:nvSpPr>
-          <p:cNvPr id="40" name="Rectangle 39"/>
+          <p:cNvPr id="43" name="Rectangle 42"/>
           <p:cNvSpPr/>
           <p:nvPr/>
         </p:nvSpPr>
@@ -20459,7 +21841,7 @@
       </p:sp>
       <p:sp>
         <p:nvSpPr>
-          <p:cNvPr id="41" name="TextBox 40"/>
+          <p:cNvPr id="44" name="TextBox 43"/>
           <p:cNvSpPr txBox="1"/>
           <p:nvPr/>
         </p:nvSpPr>
@@ -20573,80 +21955,30 @@
           </a:p>
         </p:txBody>
       </p:sp>
-      <p:sp>
-        <p:nvSpPr>
-          <p:cNvPr id="3" name="Freeform 2"/>
-          <p:cNvSpPr/>
-          <p:nvPr/>
-        </p:nvSpPr>
-        <p:spPr>
-          <a:xfrm>
-            <a:off x="9479608" y="4208000"/>
-            <a:ext cx="2924783" cy="2851453"/>
-          </a:xfrm>
-          <a:custGeom>
-            <a:avLst/>
-            <a:gdLst/>
-            <a:ahLst/>
-            <a:cxnLst/>
-            <a:rect l="l" t="t" r="r" b="b"/>
-            <a:pathLst>
-              <a:path w="2924783" h="2851453">
-                <a:moveTo>
-                  <a:pt x="1462392" y="0"/>
-                </a:moveTo>
-                <a:lnTo>
-                  <a:pt x="2635139" y="564765"/>
-                </a:lnTo>
-                <a:lnTo>
-                  <a:pt x="2924783" y="1833781"/>
-                </a:lnTo>
-                <a:lnTo>
-                  <a:pt x="2113217" y="2851453"/>
-                </a:lnTo>
-                <a:lnTo>
-                  <a:pt x="811566" y="2851453"/>
-                </a:lnTo>
-                <a:lnTo>
-                  <a:pt x="0" y="1833781"/>
-                </a:lnTo>
-                <a:lnTo>
-                  <a:pt x="289644" y="564765"/>
-                </a:lnTo>
-                <a:close/>
-              </a:path>
-            </a:pathLst>
-          </a:custGeom>
-          <a:noFill/>
-          <a:ln w="31750">
-            <a:solidFill>
-              <a:srgbClr val="26354E"/>
-            </a:solidFill>
-          </a:ln>
-          <a:effectLst/>
-        </p:spPr>
-        <p:style>
-          <a:lnRef idx="1">
-            <a:schemeClr val="accent1"/>
-          </a:lnRef>
-          <a:fillRef idx="3">
-            <a:schemeClr val="accent1"/>
-          </a:fillRef>
-          <a:effectRef idx="2">
-            <a:schemeClr val="accent1"/>
-          </a:effectRef>
-          <a:fontRef idx="minor">
-            <a:schemeClr val="lt1"/>
-          </a:fontRef>
-        </p:style>
-        <p:txBody>
-          <a:bodyPr rtlCol="0" anchor="ctr"/>
-          <a:lstStyle/>
-          <a:p>
-            <a:pPr algn="ctr"/>
-          </a:p>
-        </p:txBody>
-      </p:sp>
+      <p:pic>
+        <p:nvPicPr>
+          <p:cNvPr id="3" name="Picture 2" descr="deploy.png"/>
+          <p:cNvPicPr>
+            <a:picLocks noChangeAspect="1"/>
+          </p:cNvPicPr>
+          <p:nvPr/>
+        </p:nvPicPr>
+        <p:blipFill>
+          <a:blip r:embed="rId2"/>
+          <a:stretch>
+            <a:fillRect/>
+          </a:stretch>
+        </p:blipFill>
+        <p:spPr>
+          <a:xfrm>
+            <a:off x="8842000" y="2150000"/>
+            <a:ext cx="1800000" cy="1800000"/>
+          </a:xfrm>
+          <a:prstGeom prst="rect">
+            <a:avLst/>
+          </a:prstGeom>
+        </p:spPr>
+      </p:pic>
       <p:sp>
         <p:nvSpPr>
           <p:cNvPr id="4" name="TextBox 3"/>
@@ -21096,7 +22428,7 @@
         <p:spPr>
           <a:xfrm>
             <a:off x="620000" y="560000"/>
-            <a:ext cx="10952000" cy="620000"/>
+            <a:ext cx="10052000" cy="620000"/>
           </a:xfrm>
           <a:prstGeom prst="rect">
             <a:avLst/>
@@ -21317,9 +22649,33 @@
           </a:p>
         </p:txBody>
       </p:sp>
-      <p:sp>
-        <p:nvSpPr>
-          <p:cNvPr id="8" name="Rounded Rectangle 7"/>
+      <p:pic>
+        <p:nvPicPr>
+          <p:cNvPr id="8" name="Picture 7" descr="deploy.png"/>
+          <p:cNvPicPr>
+            <a:picLocks noChangeAspect="1"/>
+          </p:cNvPicPr>
+          <p:nvPr/>
+        </p:nvPicPr>
+        <p:blipFill>
+          <a:blip r:embed="rId2"/>
+          <a:stretch>
+            <a:fillRect/>
+          </a:stretch>
+        </p:blipFill>
+        <p:spPr>
+          <a:xfrm>
+            <a:off x="10932000" y="275000"/>
+            <a:ext cx="640000" cy="640000"/>
+          </a:xfrm>
+          <a:prstGeom prst="rect">
+            <a:avLst/>
+          </a:prstGeom>
+        </p:spPr>
+      </p:pic>
+      <p:sp>
+        <p:nvSpPr>
+          <p:cNvPr id="9" name="Rounded Rectangle 8"/>
           <p:cNvSpPr/>
           <p:nvPr/>
         </p:nvSpPr>
@@ -21369,7 +22725,7 @@
       </p:sp>
       <p:sp>
         <p:nvSpPr>
-          <p:cNvPr id="9" name="Oval 8"/>
+          <p:cNvPr id="10" name="Oval 9"/>
           <p:cNvSpPr/>
           <p:nvPr/>
         </p:nvSpPr>
@@ -21435,7 +22791,7 @@
       </p:sp>
       <p:sp>
         <p:nvSpPr>
-          <p:cNvPr id="10" name="TextBox 9"/>
+          <p:cNvPr id="11" name="TextBox 10"/>
           <p:cNvSpPr txBox="1"/>
           <p:nvPr/>
         </p:nvSpPr>
@@ -21481,7 +22837,7 @@
       </p:sp>
       <p:sp>
         <p:nvSpPr>
-          <p:cNvPr id="11" name="Rectangle 10"/>
+          <p:cNvPr id="12" name="Rectangle 11"/>
           <p:cNvSpPr/>
           <p:nvPr/>
         </p:nvSpPr>
@@ -21527,7 +22883,7 @@
       </p:sp>
       <p:sp>
         <p:nvSpPr>
-          <p:cNvPr id="12" name="TextBox 11"/>
+          <p:cNvPr id="13" name="TextBox 12"/>
           <p:cNvSpPr txBox="1"/>
           <p:nvPr/>
         </p:nvSpPr>
@@ -21573,7 +22929,7 @@
       </p:sp>
       <p:sp>
         <p:nvSpPr>
-          <p:cNvPr id="13" name="TextBox 12"/>
+          <p:cNvPr id="14" name="TextBox 13"/>
           <p:cNvSpPr txBox="1"/>
           <p:nvPr/>
         </p:nvSpPr>
@@ -21619,7 +22975,7 @@
       </p:sp>
       <p:sp>
         <p:nvSpPr>
-          <p:cNvPr id="14" name="Rounded Rectangle 13"/>
+          <p:cNvPr id="15" name="Rounded Rectangle 14"/>
           <p:cNvSpPr/>
           <p:nvPr/>
         </p:nvSpPr>
@@ -21669,7 +23025,7 @@
       </p:sp>
       <p:sp>
         <p:nvSpPr>
-          <p:cNvPr id="15" name="Oval 14"/>
+          <p:cNvPr id="16" name="Oval 15"/>
           <p:cNvSpPr/>
           <p:nvPr/>
         </p:nvSpPr>
@@ -21735,7 +23091,7 @@
       </p:sp>
       <p:sp>
         <p:nvSpPr>
-          <p:cNvPr id="16" name="TextBox 15"/>
+          <p:cNvPr id="17" name="TextBox 16"/>
           <p:cNvSpPr txBox="1"/>
           <p:nvPr/>
         </p:nvSpPr>
@@ -21781,7 +23137,7 @@
       </p:sp>
       <p:sp>
         <p:nvSpPr>
-          <p:cNvPr id="17" name="Rectangle 16"/>
+          <p:cNvPr id="18" name="Rectangle 17"/>
           <p:cNvSpPr/>
           <p:nvPr/>
         </p:nvSpPr>
@@ -21827,7 +23183,7 @@
       </p:sp>
       <p:sp>
         <p:nvSpPr>
-          <p:cNvPr id="18" name="TextBox 17"/>
+          <p:cNvPr id="19" name="TextBox 18"/>
           <p:cNvSpPr txBox="1"/>
           <p:nvPr/>
         </p:nvSpPr>
@@ -21873,7 +23229,7 @@
       </p:sp>
       <p:sp>
         <p:nvSpPr>
-          <p:cNvPr id="19" name="TextBox 18"/>
+          <p:cNvPr id="20" name="TextBox 19"/>
           <p:cNvSpPr txBox="1"/>
           <p:nvPr/>
         </p:nvSpPr>
@@ -21919,7 +23275,7 @@
       </p:sp>
       <p:sp>
         <p:nvSpPr>
-          <p:cNvPr id="20" name="Rounded Rectangle 19"/>
+          <p:cNvPr id="21" name="Rounded Rectangle 20"/>
           <p:cNvSpPr/>
           <p:nvPr/>
         </p:nvSpPr>
@@ -21969,7 +23325,7 @@
       </p:sp>
       <p:sp>
         <p:nvSpPr>
-          <p:cNvPr id="21" name="Oval 20"/>
+          <p:cNvPr id="22" name="Oval 21"/>
           <p:cNvSpPr/>
           <p:nvPr/>
         </p:nvSpPr>
@@ -22035,7 +23391,7 @@
       </p:sp>
       <p:sp>
         <p:nvSpPr>
-          <p:cNvPr id="22" name="TextBox 21"/>
+          <p:cNvPr id="23" name="TextBox 22"/>
           <p:cNvSpPr txBox="1"/>
           <p:nvPr/>
         </p:nvSpPr>
@@ -22081,7 +23437,7 @@
       </p:sp>
       <p:sp>
         <p:nvSpPr>
-          <p:cNvPr id="23" name="Rectangle 22"/>
+          <p:cNvPr id="24" name="Rectangle 23"/>
           <p:cNvSpPr/>
           <p:nvPr/>
         </p:nvSpPr>
@@ -22127,7 +23483,7 @@
       </p:sp>
       <p:sp>
         <p:nvSpPr>
-          <p:cNvPr id="24" name="TextBox 23"/>
+          <p:cNvPr id="25" name="TextBox 24"/>
           <p:cNvSpPr txBox="1"/>
           <p:nvPr/>
         </p:nvSpPr>
@@ -22173,7 +23529,7 @@
       </p:sp>
       <p:sp>
         <p:nvSpPr>
-          <p:cNvPr id="25" name="TextBox 24"/>
+          <p:cNvPr id="26" name="TextBox 25"/>
           <p:cNvSpPr txBox="1"/>
           <p:nvPr/>
         </p:nvSpPr>
@@ -22219,7 +23575,7 @@
       </p:sp>
       <p:sp>
         <p:nvSpPr>
-          <p:cNvPr id="26" name="Rounded Rectangle 25"/>
+          <p:cNvPr id="27" name="Rounded Rectangle 26"/>
           <p:cNvSpPr/>
           <p:nvPr/>
         </p:nvSpPr>
@@ -22269,7 +23625,7 @@
       </p:sp>
       <p:sp>
         <p:nvSpPr>
-          <p:cNvPr id="27" name="Oval 26"/>
+          <p:cNvPr id="28" name="Oval 27"/>
           <p:cNvSpPr/>
           <p:nvPr/>
         </p:nvSpPr>
@@ -22335,7 +23691,7 @@
       </p:sp>
       <p:sp>
         <p:nvSpPr>
-          <p:cNvPr id="28" name="TextBox 27"/>
+          <p:cNvPr id="29" name="TextBox 28"/>
           <p:cNvSpPr txBox="1"/>
           <p:nvPr/>
         </p:nvSpPr>
@@ -22381,7 +23737,7 @@
       </p:sp>
       <p:sp>
         <p:nvSpPr>
-          <p:cNvPr id="29" name="Rectangle 28"/>
+          <p:cNvPr id="30" name="Rectangle 29"/>
           <p:cNvSpPr/>
           <p:nvPr/>
         </p:nvSpPr>
@@ -22427,7 +23783,7 @@
       </p:sp>
       <p:sp>
         <p:nvSpPr>
-          <p:cNvPr id="30" name="TextBox 29"/>
+          <p:cNvPr id="31" name="TextBox 30"/>
           <p:cNvSpPr txBox="1"/>
           <p:nvPr/>
         </p:nvSpPr>
@@ -22473,7 +23829,7 @@
       </p:sp>
       <p:sp>
         <p:nvSpPr>
-          <p:cNvPr id="31" name="Rounded Rectangle 30"/>
+          <p:cNvPr id="32" name="Rounded Rectangle 31"/>
           <p:cNvSpPr/>
           <p:nvPr/>
         </p:nvSpPr>
@@ -22523,7 +23879,7 @@
       </p:sp>
       <p:sp>
         <p:nvSpPr>
-          <p:cNvPr id="32" name="Rectangle 31"/>
+          <p:cNvPr id="33" name="Rectangle 32"/>
           <p:cNvSpPr/>
           <p:nvPr/>
         </p:nvSpPr>
@@ -22569,7 +23925,7 @@
       </p:sp>
       <p:sp>
         <p:nvSpPr>
-          <p:cNvPr id="33" name="TextBox 32"/>
+          <p:cNvPr id="34" name="TextBox 33"/>
           <p:cNvSpPr txBox="1"/>
           <p:nvPr/>
         </p:nvSpPr>
@@ -22694,7 +24050,7 @@
         <p:spPr>
           <a:xfrm>
             <a:off x="620000" y="560000"/>
-            <a:ext cx="10952000" cy="620000"/>
+            <a:ext cx="10052000" cy="620000"/>
           </a:xfrm>
           <a:prstGeom prst="rect">
             <a:avLst/>
@@ -22915,9 +24271,33 @@
           </a:p>
         </p:txBody>
       </p:sp>
-      <p:sp>
-        <p:nvSpPr>
-          <p:cNvPr id="8" name="Oval 7"/>
+      <p:pic>
+        <p:nvPicPr>
+          <p:cNvPr id="8" name="Picture 7" descr="deploy.png"/>
+          <p:cNvPicPr>
+            <a:picLocks noChangeAspect="1"/>
+          </p:cNvPicPr>
+          <p:nvPr/>
+        </p:nvPicPr>
+        <p:blipFill>
+          <a:blip r:embed="rId2"/>
+          <a:stretch>
+            <a:fillRect/>
+          </a:stretch>
+        </p:blipFill>
+        <p:spPr>
+          <a:xfrm>
+            <a:off x="10932000" y="275000"/>
+            <a:ext cx="640000" cy="640000"/>
+          </a:xfrm>
+          <a:prstGeom prst="rect">
+            <a:avLst/>
+          </a:prstGeom>
+        </p:spPr>
+      </p:pic>
+      <p:sp>
+        <p:nvSpPr>
+          <p:cNvPr id="9" name="Oval 8"/>
           <p:cNvSpPr/>
           <p:nvPr/>
         </p:nvSpPr>
@@ -22961,7 +24341,7 @@
       </p:sp>
       <p:sp>
         <p:nvSpPr>
-          <p:cNvPr id="9" name="TextBox 8"/>
+          <p:cNvPr id="10" name="TextBox 9"/>
           <p:cNvSpPr txBox="1"/>
           <p:nvPr/>
         </p:nvSpPr>
@@ -23007,7 +24387,7 @@
       </p:sp>
       <p:sp>
         <p:nvSpPr>
-          <p:cNvPr id="10" name="Oval 9"/>
+          <p:cNvPr id="11" name="Oval 10"/>
           <p:cNvSpPr/>
           <p:nvPr/>
         </p:nvSpPr>
@@ -23051,7 +24431,7 @@
       </p:sp>
       <p:sp>
         <p:nvSpPr>
-          <p:cNvPr id="11" name="TextBox 10"/>
+          <p:cNvPr id="12" name="TextBox 11"/>
           <p:cNvSpPr txBox="1"/>
           <p:nvPr/>
         </p:nvSpPr>
@@ -23097,7 +24477,7 @@
       </p:sp>
       <p:sp>
         <p:nvSpPr>
-          <p:cNvPr id="12" name="Oval 11"/>
+          <p:cNvPr id="13" name="Oval 12"/>
           <p:cNvSpPr/>
           <p:nvPr/>
         </p:nvSpPr>
@@ -23141,7 +24521,7 @@
       </p:sp>
       <p:sp>
         <p:nvSpPr>
-          <p:cNvPr id="13" name="TextBox 12"/>
+          <p:cNvPr id="14" name="TextBox 13"/>
           <p:cNvSpPr txBox="1"/>
           <p:nvPr/>
         </p:nvSpPr>
@@ -23187,7 +24567,7 @@
       </p:sp>
       <p:sp>
         <p:nvSpPr>
-          <p:cNvPr id="14" name="Oval 13"/>
+          <p:cNvPr id="15" name="Oval 14"/>
           <p:cNvSpPr/>
           <p:nvPr/>
         </p:nvSpPr>
@@ -23231,7 +24611,7 @@
       </p:sp>
       <p:sp>
         <p:nvSpPr>
-          <p:cNvPr id="15" name="TextBox 14"/>
+          <p:cNvPr id="16" name="TextBox 15"/>
           <p:cNvSpPr txBox="1"/>
           <p:nvPr/>
         </p:nvSpPr>
@@ -23277,7 +24657,7 @@
       </p:sp>
       <p:sp>
         <p:nvSpPr>
-          <p:cNvPr id="16" name="Rounded Rectangle 15"/>
+          <p:cNvPr id="17" name="Rounded Rectangle 16"/>
           <p:cNvSpPr/>
           <p:nvPr/>
         </p:nvSpPr>
@@ -23327,7 +24707,7 @@
       </p:sp>
       <p:sp>
         <p:nvSpPr>
-          <p:cNvPr id="17" name="Rectangle 16"/>
+          <p:cNvPr id="18" name="Rectangle 17"/>
           <p:cNvSpPr/>
           <p:nvPr/>
         </p:nvSpPr>
@@ -23373,7 +24753,7 @@
       </p:sp>
       <p:sp>
         <p:nvSpPr>
-          <p:cNvPr id="18" name="TextBox 17"/>
+          <p:cNvPr id="19" name="TextBox 18"/>
           <p:cNvSpPr txBox="1"/>
           <p:nvPr/>
         </p:nvSpPr>
@@ -23419,7 +24799,7 @@
       </p:sp>
       <p:sp>
         <p:nvSpPr>
-          <p:cNvPr id="19" name="Rectangle 18"/>
+          <p:cNvPr id="20" name="Rectangle 19"/>
           <p:cNvSpPr/>
           <p:nvPr/>
         </p:nvSpPr>
@@ -23465,7 +24845,7 @@
       </p:sp>
       <p:sp>
         <p:nvSpPr>
-          <p:cNvPr id="20" name="TextBox 19"/>
+          <p:cNvPr id="21" name="TextBox 20"/>
           <p:cNvSpPr txBox="1"/>
           <p:nvPr/>
         </p:nvSpPr>
@@ -23747,7 +25127,7 @@
         <p:spPr>
           <a:xfrm>
             <a:off x="620000" y="560000"/>
-            <a:ext cx="10952000" cy="620000"/>
+            <a:ext cx="10052000" cy="620000"/>
           </a:xfrm>
           <a:prstGeom prst="rect">
             <a:avLst/>
@@ -23970,7 +25350,151 @@
       </p:sp>
       <p:sp>
         <p:nvSpPr>
-          <p:cNvPr id="8" name="TextBox 7"/>
+          <p:cNvPr id="8" name="Freeform 7"/>
+          <p:cNvSpPr/>
+          <p:nvPr/>
+        </p:nvSpPr>
+        <p:spPr>
+          <a:xfrm>
+            <a:off x="10970400" y="326200"/>
+            <a:ext cx="563200" cy="512000"/>
+          </a:xfrm>
+          <a:custGeom>
+            <a:avLst/>
+            <a:gdLst/>
+            <a:ahLst/>
+            <a:cxnLst/>
+            <a:rect l="l" t="t" r="r" b="b"/>
+            <a:pathLst>
+              <a:path w="563200" h="512000">
+                <a:moveTo>
+                  <a:pt x="281600" y="0"/>
+                </a:moveTo>
+                <a:lnTo>
+                  <a:pt x="563200" y="512000"/>
+                </a:lnTo>
+                <a:lnTo>
+                  <a:pt x="0" y="512000"/>
+                </a:lnTo>
+                <a:close/>
+              </a:path>
+            </a:pathLst>
+          </a:custGeom>
+          <a:noFill/>
+          <a:ln w="38100">
+            <a:solidFill>
+              <a:srgbClr val="F0C96B"/>
+            </a:solidFill>
+          </a:ln>
+          <a:effectLst/>
+        </p:spPr>
+        <p:style>
+          <a:lnRef idx="1">
+            <a:schemeClr val="accent1"/>
+          </a:lnRef>
+          <a:fillRef idx="3">
+            <a:schemeClr val="accent1"/>
+          </a:fillRef>
+          <a:effectRef idx="2">
+            <a:schemeClr val="accent1"/>
+          </a:effectRef>
+          <a:fontRef idx="minor">
+            <a:schemeClr val="lt1"/>
+          </a:fontRef>
+        </p:style>
+        <p:txBody>
+          <a:bodyPr rtlCol="0" anchor="ctr"/>
+          <a:lstStyle/>
+          <a:p>
+            <a:pPr algn="ctr"/>
+          </a:p>
+        </p:txBody>
+      </p:sp>
+      <p:cxnSp>
+        <p:nvCxnSpPr>
+          <p:cNvPr id="9" name="Connector 8"/>
+          <p:cNvCxnSpPr/>
+          <p:nvPr/>
+        </p:nvCxnSpPr>
+        <p:spPr>
+          <a:xfrm>
+            <a:off x="11252000" y="518200"/>
+            <a:ext cx="0" cy="153600"/>
+          </a:xfrm>
+          <a:prstGeom prst="line">
+            <a:avLst/>
+          </a:prstGeom>
+          <a:ln w="49530">
+            <a:solidFill>
+              <a:srgbClr val="F0C96B"/>
+            </a:solidFill>
+          </a:ln>
+          <a:effectLst/>
+        </p:spPr>
+        <p:style>
+          <a:lnRef idx="2">
+            <a:schemeClr val="accent1"/>
+          </a:lnRef>
+          <a:fillRef idx="0">
+            <a:schemeClr val="accent1"/>
+          </a:fillRef>
+          <a:effectRef idx="1">
+            <a:schemeClr val="accent1"/>
+          </a:effectRef>
+          <a:fontRef idx="minor">
+            <a:schemeClr val="tx1"/>
+          </a:fontRef>
+        </p:style>
+      </p:cxnSp>
+      <p:sp>
+        <p:nvSpPr>
+          <p:cNvPr id="10" name="Oval 9"/>
+          <p:cNvSpPr/>
+          <p:nvPr/>
+        </p:nvSpPr>
+        <p:spPr>
+          <a:xfrm>
+            <a:off x="11220000" y="716600"/>
+            <a:ext cx="64000" cy="64000"/>
+          </a:xfrm>
+          <a:prstGeom prst="ellipse">
+            <a:avLst/>
+          </a:prstGeom>
+          <a:solidFill>
+            <a:srgbClr val="F0C96B"/>
+          </a:solidFill>
+          <a:ln w="6350">
+            <a:solidFill>
+              <a:srgbClr val="F0C96B"/>
+            </a:solidFill>
+          </a:ln>
+          <a:effectLst/>
+        </p:spPr>
+        <p:style>
+          <a:lnRef idx="1">
+            <a:schemeClr val="accent1"/>
+          </a:lnRef>
+          <a:fillRef idx="3">
+            <a:schemeClr val="accent1"/>
+          </a:fillRef>
+          <a:effectRef idx="2">
+            <a:schemeClr val="accent1"/>
+          </a:effectRef>
+          <a:fontRef idx="minor">
+            <a:schemeClr val="lt1"/>
+          </a:fontRef>
+        </p:style>
+        <p:txBody>
+          <a:bodyPr rtlCol="0" anchor="ctr"/>
+          <a:lstStyle/>
+          <a:p>
+            <a:pPr algn="ctr"/>
+          </a:p>
+        </p:txBody>
+      </p:sp>
+      <p:sp>
+        <p:nvSpPr>
+          <p:cNvPr id="11" name="TextBox 10"/>
           <p:cNvSpPr txBox="1"/>
           <p:nvPr/>
         </p:nvSpPr>
@@ -24016,7 +25540,7 @@
       </p:sp>
       <p:sp>
         <p:nvSpPr>
-          <p:cNvPr id="9" name="Rounded Rectangle 8"/>
+          <p:cNvPr id="12" name="Rounded Rectangle 11"/>
           <p:cNvSpPr/>
           <p:nvPr/>
         </p:nvSpPr>
@@ -24066,7 +25590,7 @@
       </p:sp>
       <p:sp>
         <p:nvSpPr>
-          <p:cNvPr id="10" name="Rectangle 9"/>
+          <p:cNvPr id="13" name="Rectangle 12"/>
           <p:cNvSpPr/>
           <p:nvPr/>
         </p:nvSpPr>
@@ -24112,7 +25636,7 @@
       </p:sp>
       <p:sp>
         <p:nvSpPr>
-          <p:cNvPr id="11" name="TextBox 10"/>
+          <p:cNvPr id="14" name="TextBox 13"/>
           <p:cNvSpPr txBox="1"/>
           <p:nvPr/>
         </p:nvSpPr>
@@ -24255,7 +25779,7 @@
       </p:sp>
       <p:sp>
         <p:nvSpPr>
-          <p:cNvPr id="12" name="Rounded Rectangle 11"/>
+          <p:cNvPr id="15" name="Rounded Rectangle 14"/>
           <p:cNvSpPr/>
           <p:nvPr/>
         </p:nvSpPr>
@@ -24305,7 +25829,7 @@
       </p:sp>
       <p:sp>
         <p:nvSpPr>
-          <p:cNvPr id="13" name="Rectangle 12"/>
+          <p:cNvPr id="16" name="Rectangle 15"/>
           <p:cNvSpPr/>
           <p:nvPr/>
         </p:nvSpPr>
@@ -24351,7 +25875,7 @@
       </p:sp>
       <p:sp>
         <p:nvSpPr>
-          <p:cNvPr id="14" name="TextBox 13"/>
+          <p:cNvPr id="17" name="TextBox 16"/>
           <p:cNvSpPr txBox="1"/>
           <p:nvPr/>
         </p:nvSpPr>
@@ -25187,7 +26711,149 @@
       </p:sp>
       <p:sp>
         <p:nvSpPr>
-          <p:cNvPr id="16" name="Rounded Rectangle 15"/>
+          <p:cNvPr id="16" name="Freeform 15"/>
+          <p:cNvSpPr/>
+          <p:nvPr/>
+        </p:nvSpPr>
+        <p:spPr>
+          <a:xfrm>
+            <a:off x="9590000" y="1418800"/>
+            <a:ext cx="784000" cy="842800"/>
+          </a:xfrm>
+          <a:custGeom>
+            <a:avLst/>
+            <a:gdLst/>
+            <a:ahLst/>
+            <a:cxnLst/>
+            <a:rect l="l" t="t" r="r" b="b"/>
+            <a:pathLst>
+              <a:path w="784000" h="842800">
+                <a:moveTo>
+                  <a:pt x="235200" y="0"/>
+                </a:moveTo>
+                <a:lnTo>
+                  <a:pt x="235200" y="333200"/>
+                </a:lnTo>
+                <a:lnTo>
+                  <a:pt x="0" y="842800"/>
+                </a:lnTo>
+                <a:lnTo>
+                  <a:pt x="784000" y="842800"/>
+                </a:lnTo>
+                <a:lnTo>
+                  <a:pt x="548800" y="333200"/>
+                </a:lnTo>
+                <a:lnTo>
+                  <a:pt x="548800" y="0"/>
+                </a:lnTo>
+              </a:path>
+            </a:pathLst>
+          </a:custGeom>
+          <a:noFill/>
+          <a:ln w="33020">
+            <a:solidFill>
+              <a:srgbClr val="74A6FF"/>
+            </a:solidFill>
+          </a:ln>
+          <a:effectLst/>
+        </p:spPr>
+        <p:style>
+          <a:lnRef idx="1">
+            <a:schemeClr val="accent1"/>
+          </a:lnRef>
+          <a:fillRef idx="3">
+            <a:schemeClr val="accent1"/>
+          </a:fillRef>
+          <a:effectRef idx="2">
+            <a:schemeClr val="accent1"/>
+          </a:effectRef>
+          <a:fontRef idx="minor">
+            <a:schemeClr val="lt1"/>
+          </a:fontRef>
+        </p:style>
+        <p:txBody>
+          <a:bodyPr rtlCol="0" anchor="ctr"/>
+          <a:lstStyle/>
+          <a:p>
+            <a:pPr algn="ctr"/>
+          </a:p>
+        </p:txBody>
+      </p:sp>
+      <p:cxnSp>
+        <p:nvCxnSpPr>
+          <p:cNvPr id="17" name="Connector 16"/>
+          <p:cNvCxnSpPr/>
+          <p:nvPr/>
+        </p:nvCxnSpPr>
+        <p:spPr>
+          <a:xfrm>
+            <a:off x="9766400" y="1418800"/>
+            <a:ext cx="431200" cy="0"/>
+          </a:xfrm>
+          <a:prstGeom prst="line">
+            <a:avLst/>
+          </a:prstGeom>
+          <a:ln w="33020">
+            <a:solidFill>
+              <a:srgbClr val="74A6FF"/>
+            </a:solidFill>
+          </a:ln>
+          <a:effectLst/>
+        </p:spPr>
+        <p:style>
+          <a:lnRef idx="2">
+            <a:schemeClr val="accent1"/>
+          </a:lnRef>
+          <a:fillRef idx="0">
+            <a:schemeClr val="accent1"/>
+          </a:fillRef>
+          <a:effectRef idx="1">
+            <a:schemeClr val="accent1"/>
+          </a:effectRef>
+          <a:fontRef idx="minor">
+            <a:schemeClr val="tx1"/>
+          </a:fontRef>
+        </p:style>
+      </p:cxnSp>
+      <p:cxnSp>
+        <p:nvCxnSpPr>
+          <p:cNvPr id="18" name="Connector 17"/>
+          <p:cNvCxnSpPr/>
+          <p:nvPr/>
+        </p:nvCxnSpPr>
+        <p:spPr>
+          <a:xfrm>
+            <a:off x="9727200" y="2006800"/>
+            <a:ext cx="509600" cy="0"/>
+          </a:xfrm>
+          <a:prstGeom prst="line">
+            <a:avLst/>
+          </a:prstGeom>
+          <a:ln w="33020">
+            <a:solidFill>
+              <a:srgbClr val="74A6FF"/>
+            </a:solidFill>
+          </a:ln>
+          <a:effectLst/>
+        </p:spPr>
+        <p:style>
+          <a:lnRef idx="2">
+            <a:schemeClr val="accent1"/>
+          </a:lnRef>
+          <a:fillRef idx="0">
+            <a:schemeClr val="accent1"/>
+          </a:fillRef>
+          <a:effectRef idx="1">
+            <a:schemeClr val="accent1"/>
+          </a:effectRef>
+          <a:fontRef idx="minor">
+            <a:schemeClr val="tx1"/>
+          </a:fontRef>
+        </p:style>
+      </p:cxnSp>
+      <p:sp>
+        <p:nvSpPr>
+          <p:cNvPr id="19" name="Rounded Rectangle 18"/>
           <p:cNvSpPr/>
           <p:nvPr/>
         </p:nvSpPr>
@@ -25237,7 +26903,7 @@
       </p:sp>
       <p:sp>
         <p:nvSpPr>
-          <p:cNvPr id="17" name="Rectangle 16"/>
+          <p:cNvPr id="20" name="Rectangle 19"/>
           <p:cNvSpPr/>
           <p:nvPr/>
         </p:nvSpPr>
@@ -25283,7 +26949,7 @@
       </p:sp>
       <p:sp>
         <p:nvSpPr>
-          <p:cNvPr id="18" name="TextBox 17"/>
+          <p:cNvPr id="21" name="TextBox 20"/>
           <p:cNvSpPr txBox="1"/>
           <p:nvPr/>
         </p:nvSpPr>
@@ -25352,7 +27018,7 @@
       </p:sp>
       <p:sp>
         <p:nvSpPr>
-          <p:cNvPr id="19" name="Rectangle 18"/>
+          <p:cNvPr id="22" name="Rectangle 21"/>
           <p:cNvSpPr/>
           <p:nvPr/>
         </p:nvSpPr>
@@ -25398,7 +27064,7 @@
       </p:sp>
       <p:sp>
         <p:nvSpPr>
-          <p:cNvPr id="20" name="TextBox 19"/>
+          <p:cNvPr id="23" name="TextBox 22"/>
           <p:cNvSpPr txBox="1"/>
           <p:nvPr/>
         </p:nvSpPr>
@@ -25467,7 +27133,7 @@
       </p:sp>
       <p:sp>
         <p:nvSpPr>
-          <p:cNvPr id="21" name="Rectangle 20"/>
+          <p:cNvPr id="24" name="Rectangle 23"/>
           <p:cNvSpPr/>
           <p:nvPr/>
         </p:nvSpPr>
@@ -25513,7 +27179,7 @@
       </p:sp>
       <p:sp>
         <p:nvSpPr>
-          <p:cNvPr id="22" name="TextBox 21"/>
+          <p:cNvPr id="25" name="TextBox 24"/>
           <p:cNvSpPr txBox="1"/>
           <p:nvPr/>
         </p:nvSpPr>
@@ -25582,7 +27248,7 @@
       </p:sp>
       <p:sp>
         <p:nvSpPr>
-          <p:cNvPr id="23" name="Rectangle 22"/>
+          <p:cNvPr id="26" name="Rectangle 25"/>
           <p:cNvSpPr/>
           <p:nvPr/>
         </p:nvSpPr>
@@ -25628,7 +27294,7 @@
       </p:sp>
       <p:sp>
         <p:nvSpPr>
-          <p:cNvPr id="24" name="TextBox 23"/>
+          <p:cNvPr id="27" name="TextBox 26"/>
           <p:cNvSpPr txBox="1"/>
           <p:nvPr/>
         </p:nvSpPr>
@@ -25674,7 +27340,7 @@
       </p:sp>
       <p:sp>
         <p:nvSpPr>
-          <p:cNvPr id="25" name="TextBox 24"/>
+          <p:cNvPr id="28" name="TextBox 27"/>
           <p:cNvSpPr txBox="1"/>
           <p:nvPr/>
         </p:nvSpPr>
@@ -25788,80 +27454,30 @@
           </a:p>
         </p:txBody>
       </p:sp>
-      <p:sp>
-        <p:nvSpPr>
-          <p:cNvPr id="3" name="Freeform 2"/>
-          <p:cNvSpPr/>
-          <p:nvPr/>
-        </p:nvSpPr>
-        <p:spPr>
-          <a:xfrm>
-            <a:off x="9479608" y="4208000"/>
-            <a:ext cx="2924783" cy="2851453"/>
-          </a:xfrm>
-          <a:custGeom>
-            <a:avLst/>
-            <a:gdLst/>
-            <a:ahLst/>
-            <a:cxnLst/>
-            <a:rect l="l" t="t" r="r" b="b"/>
-            <a:pathLst>
-              <a:path w="2924783" h="2851453">
-                <a:moveTo>
-                  <a:pt x="1462392" y="0"/>
-                </a:moveTo>
-                <a:lnTo>
-                  <a:pt x="2635139" y="564765"/>
-                </a:lnTo>
-                <a:lnTo>
-                  <a:pt x="2924783" y="1833781"/>
-                </a:lnTo>
-                <a:lnTo>
-                  <a:pt x="2113217" y="2851453"/>
-                </a:lnTo>
-                <a:lnTo>
-                  <a:pt x="811566" y="2851453"/>
-                </a:lnTo>
-                <a:lnTo>
-                  <a:pt x="0" y="1833781"/>
-                </a:lnTo>
-                <a:lnTo>
-                  <a:pt x="289644" y="564765"/>
-                </a:lnTo>
-                <a:close/>
-              </a:path>
-            </a:pathLst>
-          </a:custGeom>
-          <a:noFill/>
-          <a:ln w="31750">
-            <a:solidFill>
-              <a:srgbClr val="26354E"/>
-            </a:solidFill>
-          </a:ln>
-          <a:effectLst/>
-        </p:spPr>
-        <p:style>
-          <a:lnRef idx="1">
-            <a:schemeClr val="accent1"/>
-          </a:lnRef>
-          <a:fillRef idx="3">
-            <a:schemeClr val="accent1"/>
-          </a:fillRef>
-          <a:effectRef idx="2">
-            <a:schemeClr val="accent1"/>
-          </a:effectRef>
-          <a:fontRef idx="minor">
-            <a:schemeClr val="lt1"/>
-          </a:fontRef>
-        </p:style>
-        <p:txBody>
-          <a:bodyPr rtlCol="0" anchor="ctr"/>
-          <a:lstStyle/>
-          <a:p>
-            <a:pPr algn="ctr"/>
-          </a:p>
-        </p:txBody>
-      </p:sp>
+      <p:pic>
+        <p:nvPicPr>
+          <p:cNvPr id="3" name="Picture 2" descr="secret.png"/>
+          <p:cNvPicPr>
+            <a:picLocks noChangeAspect="1"/>
+          </p:cNvPicPr>
+          <p:nvPr/>
+        </p:nvPicPr>
+        <p:blipFill>
+          <a:blip r:embed="rId2"/>
+          <a:stretch>
+            <a:fillRect/>
+          </a:stretch>
+        </p:blipFill>
+        <p:spPr>
+          <a:xfrm>
+            <a:off x="8842000" y="2150000"/>
+            <a:ext cx="1800000" cy="1800000"/>
+          </a:xfrm>
+          <a:prstGeom prst="rect">
+            <a:avLst/>
+          </a:prstGeom>
+        </p:spPr>
+      </p:pic>
       <p:sp>
         <p:nvSpPr>
           <p:cNvPr id="4" name="TextBox 3"/>

--- a/CLASE-04/01-CLASE-04-CKA.pptx
+++ b/CLASE-04/01-CLASE-04-CKA.pptx
@@ -5511,12 +5511,12 @@
         </p:nvSpPr>
         <p:spPr>
           <a:xfrm>
-            <a:off x="620000" y="5910000"/>
-            <a:ext cx="10952000" cy="470000"/>
+            <a:off x="620000" y="4310000"/>
+            <a:ext cx="10952000" cy="2000000"/>
           </a:xfrm>
           <a:prstGeom prst="roundRect">
             <a:avLst>
-              <a:gd name="adj" fmla="val 10000"/>
+              <a:gd name="adj" fmla="val 4500"/>
             </a:avLst>
           </a:prstGeom>
           <a:solidFill>
@@ -5561,8 +5561,8 @@
         </p:nvSpPr>
         <p:spPr>
           <a:xfrm>
-            <a:off x="650000" y="5934000"/>
-            <a:ext cx="40000" cy="422000"/>
+            <a:off x="646000" y="4332000"/>
+            <a:ext cx="40000" cy="1956000"/>
           </a:xfrm>
           <a:prstGeom prst="rect">
             <a:avLst/>
@@ -5607,8 +5607,8 @@
         </p:nvSpPr>
         <p:spPr>
           <a:xfrm>
-            <a:off x="860000" y="5910000"/>
-            <a:ext cx="10482000" cy="470000"/>
+            <a:off x="860000" y="4440000"/>
+            <a:ext cx="10522000" cy="1740000"/>
           </a:xfrm>
           <a:prstGeom prst="rect">
             <a:avLst/>
@@ -5616,31 +5616,100 @@
           <a:noFill/>
         </p:spPr>
         <p:txBody>
-          <a:bodyPr wrap="square" anchor="ctr" lIns="0" rIns="0" tIns="0" bIns="0">
+          <a:bodyPr wrap="square" anchor="t" lIns="0" rIns="0" tIns="0" bIns="0">
             <a:noAutofit/>
           </a:bodyPr>
           <a:lstStyle/>
           <a:p>
             <a:pPr algn="l" marL="0" indent="0">
               <a:lnSpc>
-                <a:spcPct val="116000"/>
-              </a:lnSpc>
-              <a:spcBef>
-                <a:spcPts val="0"/>
-              </a:spcBef>
-              <a:spcAft>
-                <a:spcPts val="0"/>
-              </a:spcAft>
-              <a:buNone/>
-            </a:pPr>
-            <a:r>
-              <a:rPr sz="1100" b="0" i="1">
+                <a:spcPct val="100000"/>
+              </a:lnSpc>
+              <a:spcBef>
+                <a:spcPts val="0"/>
+              </a:spcBef>
+              <a:spcAft>
+                <a:spcPts val="600"/>
+              </a:spcAft>
+              <a:buNone/>
+            </a:pPr>
+            <a:r>
+              <a:rPr sz="900" b="1" i="0" spc="200">
+                <a:solidFill>
+                  <a:srgbClr val="326CE5"/>
+                </a:solidFill>
+                <a:latin typeface="Segoe UI Semibold"/>
+              </a:rPr>
+              <a:t>TEORÍA</a:t>
+            </a:r>
+          </a:p>
+          <a:p>
+            <a:pPr algn="l" marL="0" indent="0">
+              <a:lnSpc>
+                <a:spcPct val="128000"/>
+              </a:lnSpc>
+              <a:spcBef>
+                <a:spcPts val="0"/>
+              </a:spcBef>
+              <a:spcAft>
+                <a:spcPts val="400"/>
+              </a:spcAft>
+              <a:buNone/>
+            </a:pPr>
+            <a:r>
+              <a:rPr sz="1050" b="0" i="0">
                 <a:solidFill>
                   <a:srgbClr val="BDC9DB"/>
                 </a:solidFill>
                 <a:latin typeface="Segoe UI"/>
               </a:rPr>
-              <a:t>Si algo debe recargarse sin reiniciar el Pod, móntalo como volumen. Si no, usa variables. Para que una variable tome el valor nuevo: kubectl rollout restart.</a:t>
+              <a:t>Un ConfigMap o un Secret se puede consumir de cuatro maneras, y lo que decide cuál usar es si el valor debe poder recargarse sin reiniciar el Pod. Las tres formas basadas en variables de entorno —env con configMapKeyRef o secretKeyRef para claves sueltas, y envFrom para volcar todas las claves de golpe— fijan el valor en el arranque del contenedor y NO se actualizan en caliente. Cambiar el ConfigMap no afecta a los Pods que ya corren.</a:t>
+            </a:r>
+          </a:p>
+          <a:p>
+            <a:pPr algn="l" marL="0" indent="0">
+              <a:lnSpc>
+                <a:spcPct val="128000"/>
+              </a:lnSpc>
+              <a:spcBef>
+                <a:spcPts val="0"/>
+              </a:spcBef>
+              <a:spcAft>
+                <a:spcPts val="400"/>
+              </a:spcAft>
+              <a:buNone/>
+            </a:pPr>
+            <a:r>
+              <a:rPr sz="1050" b="0" i="0">
+                <a:solidFill>
+                  <a:srgbClr val="BDC9DB"/>
+                </a:solidFill>
+                <a:latin typeface="Segoe UI"/>
+              </a:rPr>
+              <a:t>Montar el ConfigMap o el Secret como VOLUMEN sí propaga los cambios: el kubelet actualiza los ficheros del volumen al cabo de un tiempo, sin recrear el Pod. Por eso los archivos de configuración y los certificados se montan como volumen, y las variables simples se pasan como env.</a:t>
+            </a:r>
+          </a:p>
+          <a:p>
+            <a:pPr algn="l" marL="0" indent="0">
+              <a:lnSpc>
+                <a:spcPct val="128000"/>
+              </a:lnSpc>
+              <a:spcBef>
+                <a:spcPts val="0"/>
+              </a:spcBef>
+              <a:spcAft>
+                <a:spcPts val="400"/>
+              </a:spcAft>
+              <a:buNone/>
+            </a:pPr>
+            <a:r>
+              <a:rPr sz="1050" b="0" i="0">
+                <a:solidFill>
+                  <a:srgbClr val="BDC9DB"/>
+                </a:solidFill>
+                <a:latin typeface="Segoe UI"/>
+              </a:rPr>
+              <a:t>Para forzar que una variable de entorno tome el valor nuevo hay que provocar una recreación de los Pods, típicamente con kubectl rollout restart deployment/&lt;d&gt;. Y un Secret montado como volumen se guarda en un tmpfs (memoria), nunca en el disco del nodo.</a:t>
             </a:r>
           </a:p>
         </p:txBody>
@@ -5979,7 +6048,7 @@
         </p:nvSpPr>
         <p:spPr>
           <a:xfrm>
-            <a:off x="636000" y="2428000"/>
+            <a:off x="636000" y="1751750"/>
             <a:ext cx="104000" cy="104000"/>
           </a:xfrm>
           <a:prstGeom prst="ellipse">
@@ -6023,8 +6092,8 @@
         </p:nvSpPr>
         <p:spPr>
           <a:xfrm>
-            <a:off x="880000" y="2010000"/>
-            <a:ext cx="5435040" cy="940000"/>
+            <a:off x="880000" y="1470000"/>
+            <a:ext cx="5435040" cy="667500"/>
           </a:xfrm>
           <a:prstGeom prst="rect">
             <a:avLst/>
@@ -6069,7 +6138,7 @@
         </p:nvSpPr>
         <p:spPr>
           <a:xfrm>
-            <a:off x="636000" y="3368000"/>
+            <a:off x="636000" y="2419250"/>
             <a:ext cx="104000" cy="104000"/>
           </a:xfrm>
           <a:prstGeom prst="ellipse">
@@ -6113,8 +6182,8 @@
         </p:nvSpPr>
         <p:spPr>
           <a:xfrm>
-            <a:off x="880000" y="2950000"/>
-            <a:ext cx="5435040" cy="940000"/>
+            <a:off x="880000" y="2137500"/>
+            <a:ext cx="5435040" cy="667500"/>
           </a:xfrm>
           <a:prstGeom prst="rect">
             <a:avLst/>
@@ -6159,7 +6228,7 @@
         </p:nvSpPr>
         <p:spPr>
           <a:xfrm>
-            <a:off x="636000" y="4308000"/>
+            <a:off x="636000" y="3086750"/>
             <a:ext cx="104000" cy="104000"/>
           </a:xfrm>
           <a:prstGeom prst="ellipse">
@@ -6203,8 +6272,8 @@
         </p:nvSpPr>
         <p:spPr>
           <a:xfrm>
-            <a:off x="880000" y="3890000"/>
-            <a:ext cx="5435040" cy="940000"/>
+            <a:off x="880000" y="2805000"/>
+            <a:ext cx="5435040" cy="667500"/>
           </a:xfrm>
           <a:prstGeom prst="rect">
             <a:avLst/>
@@ -6249,7 +6318,7 @@
         </p:nvSpPr>
         <p:spPr>
           <a:xfrm>
-            <a:off x="636000" y="5248000"/>
+            <a:off x="636000" y="3754250"/>
             <a:ext cx="104000" cy="104000"/>
           </a:xfrm>
           <a:prstGeom prst="ellipse">
@@ -6293,8 +6362,8 @@
         </p:nvSpPr>
         <p:spPr>
           <a:xfrm>
-            <a:off x="880000" y="4830000"/>
-            <a:ext cx="5435040" cy="940000"/>
+            <a:off x="880000" y="3472500"/>
+            <a:ext cx="5435040" cy="667500"/>
           </a:xfrm>
           <a:prstGeom prst="rect">
             <a:avLst/>
@@ -6339,8 +6408,8 @@
         </p:nvSpPr>
         <p:spPr>
           <a:xfrm>
-            <a:off x="6635040" y="2010000"/>
-            <a:ext cx="4936960" cy="3760000"/>
+            <a:off x="6635040" y="1470000"/>
+            <a:ext cx="4936960" cy="2670000"/>
           </a:xfrm>
           <a:prstGeom prst="roundRect">
             <a:avLst>
@@ -6389,8 +6458,8 @@
         </p:nvSpPr>
         <p:spPr>
           <a:xfrm>
-            <a:off x="6635040" y="2310000"/>
-            <a:ext cx="46000" cy="3460000"/>
+            <a:off x="6635040" y="1770000"/>
+            <a:ext cx="46000" cy="2370000"/>
           </a:xfrm>
           <a:prstGeom prst="rect">
             <a:avLst/>
@@ -6435,7 +6504,7 @@
         </p:nvSpPr>
         <p:spPr>
           <a:xfrm>
-            <a:off x="6825040" y="2070000"/>
+            <a:off x="6825040" y="1530000"/>
             <a:ext cx="4556960" cy="260000"/>
           </a:xfrm>
           <a:prstGeom prst="rect">
@@ -6481,7 +6550,7 @@
         </p:nvSpPr>
         <p:spPr>
           <a:xfrm>
-            <a:off x="6825040" y="2304000"/>
+            <a:off x="6825040" y="1764000"/>
             <a:ext cx="4556960" cy="10000"/>
           </a:xfrm>
           <a:prstGeom prst="rect">
@@ -6527,8 +6596,8 @@
         </p:nvSpPr>
         <p:spPr>
           <a:xfrm>
-            <a:off x="6865040" y="2500000"/>
-            <a:ext cx="4516960" cy="2182114"/>
+            <a:off x="6865040" y="1960000"/>
+            <a:ext cx="4516960" cy="1983740"/>
           </a:xfrm>
           <a:prstGeom prst="rect">
             <a:avLst/>
@@ -6551,7 +6620,7 @@
               <a:buNone/>
             </a:pPr>
             <a:r>
-              <a:rPr sz="1100" b="0" i="0">
+              <a:rPr sz="1000" b="0" i="0">
                 <a:solidFill>
                   <a:srgbClr val="E6EDF3"/>
                 </a:solidFill>
@@ -6571,7 +6640,7 @@
               <a:buNone/>
             </a:pPr>
             <a:r>
-              <a:rPr sz="1100" b="0" i="0">
+              <a:rPr sz="1000" b="0" i="0">
                 <a:solidFill>
                   <a:srgbClr val="E6EDF3"/>
                 </a:solidFill>
@@ -6591,7 +6660,7 @@
               <a:buNone/>
             </a:pPr>
             <a:r>
-              <a:rPr sz="1100" b="0" i="0">
+              <a:rPr sz="1000" b="0" i="0">
                 <a:solidFill>
                   <a:srgbClr val="E6EDF3"/>
                 </a:solidFill>
@@ -6611,7 +6680,7 @@
               <a:buNone/>
             </a:pPr>
             <a:r>
-              <a:rPr sz="1100" b="0" i="0">
+              <a:rPr sz="1000" b="0" i="0">
                 <a:solidFill>
                   <a:srgbClr val="E6EDF3"/>
                 </a:solidFill>
@@ -6631,7 +6700,7 @@
               <a:buNone/>
             </a:pPr>
             <a:r>
-              <a:rPr sz="1100" b="0" i="0">
+              <a:rPr sz="1000" b="0" i="0">
                 <a:solidFill>
                   <a:srgbClr val="E6EDF3"/>
                 </a:solidFill>
@@ -6651,7 +6720,7 @@
               <a:buNone/>
             </a:pPr>
             <a:r>
-              <a:rPr sz="1100" b="0" i="0">
+              <a:rPr sz="1000" b="0" i="0">
                 <a:solidFill>
                   <a:srgbClr val="E6EDF3"/>
                 </a:solidFill>
@@ -6671,7 +6740,7 @@
               <a:buNone/>
             </a:pPr>
             <a:r>
-              <a:rPr sz="1100" b="0" i="1">
+              <a:rPr sz="1000" b="0" i="1">
                 <a:solidFill>
                   <a:srgbClr val="7C8AA5"/>
                 </a:solidFill>
@@ -6691,7 +6760,7 @@
               <a:buNone/>
             </a:pPr>
             <a:r>
-              <a:rPr sz="1100" b="0" i="0">
+              <a:rPr sz="1000" b="0" i="0">
                 <a:solidFill>
                   <a:srgbClr val="E6EDF3"/>
                 </a:solidFill>
@@ -6711,7 +6780,7 @@
               <a:buNone/>
             </a:pPr>
             <a:r>
-              <a:rPr sz="1100" b="0" i="1">
+              <a:rPr sz="1000" b="0" i="1">
                 <a:solidFill>
                   <a:srgbClr val="7C8AA5"/>
                 </a:solidFill>
@@ -6731,7 +6800,7 @@
               <a:buNone/>
             </a:pPr>
             <a:r>
-              <a:rPr sz="1100" b="0" i="0">
+              <a:rPr sz="1000" b="0" i="0">
                 <a:solidFill>
                   <a:srgbClr val="E6EDF3"/>
                 </a:solidFill>
@@ -6751,13 +6820,224 @@
               <a:buNone/>
             </a:pPr>
             <a:r>
-              <a:rPr sz="1100" b="0" i="1">
+              <a:rPr sz="1000" b="0" i="1">
                 <a:solidFill>
                   <a:srgbClr val="7C8AA5"/>
                 </a:solidFill>
                 <a:latin typeface="Consolas"/>
               </a:rPr>
               <a:t># tmpfs ... (ro)  -&gt; en memoria</a:t>
+            </a:r>
+          </a:p>
+        </p:txBody>
+      </p:sp>
+      <p:sp>
+        <p:nvSpPr>
+          <p:cNvPr id="22" name="Rounded Rectangle 21"/>
+          <p:cNvSpPr/>
+          <p:nvPr/>
+        </p:nvSpPr>
+        <p:spPr>
+          <a:xfrm>
+            <a:off x="620000" y="4310000"/>
+            <a:ext cx="10952000" cy="2000000"/>
+          </a:xfrm>
+          <a:prstGeom prst="roundRect">
+            <a:avLst>
+              <a:gd name="adj" fmla="val 4500"/>
+            </a:avLst>
+          </a:prstGeom>
+          <a:solidFill>
+            <a:srgbClr val="111A2C"/>
+          </a:solidFill>
+          <a:ln w="12700">
+            <a:solidFill>
+              <a:srgbClr val="26354E"/>
+            </a:solidFill>
+          </a:ln>
+          <a:effectLst/>
+        </p:spPr>
+        <p:style>
+          <a:lnRef idx="1">
+            <a:schemeClr val="accent1"/>
+          </a:lnRef>
+          <a:fillRef idx="3">
+            <a:schemeClr val="accent1"/>
+          </a:fillRef>
+          <a:effectRef idx="2">
+            <a:schemeClr val="accent1"/>
+          </a:effectRef>
+          <a:fontRef idx="minor">
+            <a:schemeClr val="lt1"/>
+          </a:fontRef>
+        </p:style>
+        <p:txBody>
+          <a:bodyPr rtlCol="0" anchor="ctr" lIns="0" rIns="0" tIns="0" bIns="0">
+            <a:noAutofit/>
+          </a:bodyPr>
+          <a:lstStyle/>
+          <a:p>
+            <a:pPr algn="ctr"/>
+          </a:p>
+        </p:txBody>
+      </p:sp>
+      <p:sp>
+        <p:nvSpPr>
+          <p:cNvPr id="23" name="Rectangle 22"/>
+          <p:cNvSpPr/>
+          <p:nvPr/>
+        </p:nvSpPr>
+        <p:spPr>
+          <a:xfrm>
+            <a:off x="646000" y="4332000"/>
+            <a:ext cx="40000" cy="1956000"/>
+          </a:xfrm>
+          <a:prstGeom prst="rect">
+            <a:avLst/>
+          </a:prstGeom>
+          <a:solidFill>
+            <a:srgbClr val="326CE5"/>
+          </a:solidFill>
+          <a:ln>
+            <a:noFill/>
+          </a:ln>
+          <a:effectLst/>
+        </p:spPr>
+        <p:style>
+          <a:lnRef idx="1">
+            <a:schemeClr val="accent1"/>
+          </a:lnRef>
+          <a:fillRef idx="3">
+            <a:schemeClr val="accent1"/>
+          </a:fillRef>
+          <a:effectRef idx="2">
+            <a:schemeClr val="accent1"/>
+          </a:effectRef>
+          <a:fontRef idx="minor">
+            <a:schemeClr val="lt1"/>
+          </a:fontRef>
+        </p:style>
+        <p:txBody>
+          <a:bodyPr rtlCol="0" anchor="ctr" lIns="0" rIns="0" tIns="0" bIns="0">
+            <a:noAutofit/>
+          </a:bodyPr>
+          <a:lstStyle/>
+          <a:p>
+            <a:pPr algn="ctr"/>
+          </a:p>
+        </p:txBody>
+      </p:sp>
+      <p:sp>
+        <p:nvSpPr>
+          <p:cNvPr id="24" name="TextBox 23"/>
+          <p:cNvSpPr txBox="1"/>
+          <p:nvPr/>
+        </p:nvSpPr>
+        <p:spPr>
+          <a:xfrm>
+            <a:off x="860000" y="4440000"/>
+            <a:ext cx="10522000" cy="1740000"/>
+          </a:xfrm>
+          <a:prstGeom prst="rect">
+            <a:avLst/>
+          </a:prstGeom>
+          <a:noFill/>
+        </p:spPr>
+        <p:txBody>
+          <a:bodyPr wrap="square" anchor="t" lIns="0" rIns="0" tIns="0" bIns="0">
+            <a:noAutofit/>
+          </a:bodyPr>
+          <a:lstStyle/>
+          <a:p>
+            <a:pPr algn="l" marL="0" indent="0">
+              <a:lnSpc>
+                <a:spcPct val="100000"/>
+              </a:lnSpc>
+              <a:spcBef>
+                <a:spcPts val="0"/>
+              </a:spcBef>
+              <a:spcAft>
+                <a:spcPts val="600"/>
+              </a:spcAft>
+              <a:buNone/>
+            </a:pPr>
+            <a:r>
+              <a:rPr sz="900" b="1" i="0" spc="200">
+                <a:solidFill>
+                  <a:srgbClr val="326CE5"/>
+                </a:solidFill>
+                <a:latin typeface="Segoe UI Semibold"/>
+              </a:rPr>
+              <a:t>TEORÍA</a:t>
+            </a:r>
+          </a:p>
+          <a:p>
+            <a:pPr algn="l" marL="0" indent="0">
+              <a:lnSpc>
+                <a:spcPct val="128000"/>
+              </a:lnSpc>
+              <a:spcBef>
+                <a:spcPts val="0"/>
+              </a:spcBef>
+              <a:spcAft>
+                <a:spcPts val="400"/>
+              </a:spcAft>
+              <a:buNone/>
+            </a:pPr>
+            <a:r>
+              <a:rPr sz="1050" b="0" i="0">
+                <a:solidFill>
+                  <a:srgbClr val="BDC9DB"/>
+                </a:solidFill>
+                <a:latin typeface="Segoe UI"/>
+              </a:rPr>
+              <a:t>El contenido de un Secret se guarda en base64, que es una CODIFICACIÓN, no un cifrado: cualquiera con acceso al objeto puede decodificarlo con base64 -d. Un Secret y un ConfigMap son, en cuanto a confidencialidad del valor en sí, prácticamente lo mismo.</a:t>
+            </a:r>
+          </a:p>
+          <a:p>
+            <a:pPr algn="l" marL="0" indent="0">
+              <a:lnSpc>
+                <a:spcPct val="128000"/>
+              </a:lnSpc>
+              <a:spcBef>
+                <a:spcPts val="0"/>
+              </a:spcBef>
+              <a:spcAft>
+                <a:spcPts val="400"/>
+              </a:spcAft>
+              <a:buNone/>
+            </a:pPr>
+            <a:r>
+              <a:rPr sz="1050" b="0" i="0">
+                <a:solidFill>
+                  <a:srgbClr val="BDC9DB"/>
+                </a:solidFill>
+                <a:latin typeface="Segoe UI"/>
+              </a:rPr>
+              <a:t>Lo que aporta un Secret es otra cosa. Primero, es un tipo de objeto separado sobre el que se pueden dar permisos RBAC distintos: puedes permitir leer ConfigMaps a mucha gente y restringir los Secrets a unos pocos. Segundo, si el cluster tiene configurado EncryptionConfiguration, los Secrets (y solo ellos) se cifran en reposo dentro de etcd. Tercero, al montarse en tmpfs y no en la imagen, no se distribuye a todos los nodos ni queda en el registro de contenedores.</a:t>
+            </a:r>
+          </a:p>
+          <a:p>
+            <a:pPr algn="l" marL="0" indent="0">
+              <a:lnSpc>
+                <a:spcPct val="128000"/>
+              </a:lnSpc>
+              <a:spcBef>
+                <a:spcPts val="0"/>
+              </a:spcBef>
+              <a:spcAft>
+                <a:spcPts val="400"/>
+              </a:spcAft>
+              <a:buNone/>
+            </a:pPr>
+            <a:r>
+              <a:rPr sz="1050" b="0" i="0">
+                <a:solidFill>
+                  <a:srgbClr val="BDC9DB"/>
+                </a:solidFill>
+                <a:latin typeface="Segoe UI"/>
+              </a:rPr>
+              <a:t>En resumen: la protección de un Secret está en el control de acceso y en la configuración del cluster, no en el base64. Tratarlo como si el base64 fuera seguro es el malentendido más común.</a:t>
             </a:r>
           </a:p>
         </p:txBody>
@@ -10153,8 +10433,8 @@
         </p:nvSpPr>
         <p:spPr>
           <a:xfrm>
-            <a:off x="620000" y="2061000"/>
-            <a:ext cx="5316000" cy="3058000"/>
+            <a:off x="620000" y="1470000"/>
+            <a:ext cx="5316000" cy="2670000"/>
           </a:xfrm>
           <a:prstGeom prst="roundRect">
             <a:avLst>
@@ -10203,7 +10483,7 @@
         </p:nvSpPr>
         <p:spPr>
           <a:xfrm>
-            <a:off x="644000" y="2061000"/>
+            <a:off x="644000" y="1470000"/>
             <a:ext cx="5268000" cy="46000"/>
           </a:xfrm>
           <a:prstGeom prst="rect">
@@ -10249,7 +10529,7 @@
         </p:nvSpPr>
         <p:spPr>
           <a:xfrm>
-            <a:off x="880000" y="2321000"/>
+            <a:off x="880000" y="1730000"/>
             <a:ext cx="4796000" cy="570000"/>
           </a:xfrm>
           <a:prstGeom prst="rect">
@@ -10318,8 +10598,8 @@
         </p:nvSpPr>
         <p:spPr>
           <a:xfrm>
-            <a:off x="880000" y="2891000"/>
-            <a:ext cx="4796000" cy="2048000"/>
+            <a:off x="880000" y="2300000"/>
+            <a:ext cx="4796000" cy="1660000"/>
           </a:xfrm>
           <a:prstGeom prst="rect">
             <a:avLst/>
@@ -10438,8 +10718,8 @@
         </p:nvSpPr>
         <p:spPr>
           <a:xfrm>
-            <a:off x="6256000" y="2061000"/>
-            <a:ext cx="5316000" cy="3058000"/>
+            <a:off x="6256000" y="1470000"/>
+            <a:ext cx="5316000" cy="2670000"/>
           </a:xfrm>
           <a:prstGeom prst="roundRect">
             <a:avLst>
@@ -10488,7 +10768,7 @@
         </p:nvSpPr>
         <p:spPr>
           <a:xfrm>
-            <a:off x="6280000" y="2061000"/>
+            <a:off x="6280000" y="1470000"/>
             <a:ext cx="5268000" cy="46000"/>
           </a:xfrm>
           <a:prstGeom prst="rect">
@@ -10534,7 +10814,7 @@
         </p:nvSpPr>
         <p:spPr>
           <a:xfrm>
-            <a:off x="6516000" y="2321000"/>
+            <a:off x="6516000" y="1730000"/>
             <a:ext cx="4796000" cy="570000"/>
           </a:xfrm>
           <a:prstGeom prst="rect">
@@ -10603,8 +10883,8 @@
         </p:nvSpPr>
         <p:spPr>
           <a:xfrm>
-            <a:off x="6516000" y="2891000"/>
-            <a:ext cx="4796000" cy="2048000"/>
+            <a:off x="6516000" y="2300000"/>
+            <a:ext cx="4796000" cy="1660000"/>
           </a:xfrm>
           <a:prstGeom prst="rect">
             <a:avLst/>
@@ -10723,12 +11003,12 @@
         </p:nvSpPr>
         <p:spPr>
           <a:xfrm>
-            <a:off x="620000" y="5860000"/>
-            <a:ext cx="10952000" cy="470000"/>
+            <a:off x="620000" y="4310000"/>
+            <a:ext cx="10952000" cy="2000000"/>
           </a:xfrm>
           <a:prstGeom prst="roundRect">
             <a:avLst>
-              <a:gd name="adj" fmla="val 10000"/>
+              <a:gd name="adj" fmla="val 4500"/>
             </a:avLst>
           </a:prstGeom>
           <a:solidFill>
@@ -10773,8 +11053,8 @@
         </p:nvSpPr>
         <p:spPr>
           <a:xfrm>
-            <a:off x="650000" y="5884000"/>
-            <a:ext cx="40000" cy="422000"/>
+            <a:off x="646000" y="4332000"/>
+            <a:ext cx="40000" cy="1956000"/>
           </a:xfrm>
           <a:prstGeom prst="rect">
             <a:avLst/>
@@ -10819,8 +11099,8 @@
         </p:nvSpPr>
         <p:spPr>
           <a:xfrm>
-            <a:off x="860000" y="5860000"/>
-            <a:ext cx="10482000" cy="470000"/>
+            <a:off x="860000" y="4440000"/>
+            <a:ext cx="10522000" cy="1740000"/>
           </a:xfrm>
           <a:prstGeom prst="rect">
             <a:avLst/>
@@ -10828,31 +11108,100 @@
           <a:noFill/>
         </p:spPr>
         <p:txBody>
-          <a:bodyPr wrap="square" anchor="ctr" lIns="0" rIns="0" tIns="0" bIns="0">
+          <a:bodyPr wrap="square" anchor="t" lIns="0" rIns="0" tIns="0" bIns="0">
             <a:noAutofit/>
           </a:bodyPr>
           <a:lstStyle/>
           <a:p>
             <a:pPr algn="l" marL="0" indent="0">
               <a:lnSpc>
-                <a:spcPct val="116000"/>
-              </a:lnSpc>
-              <a:spcBef>
-                <a:spcPts val="0"/>
-              </a:spcBef>
-              <a:spcAft>
-                <a:spcPts val="0"/>
-              </a:spcAft>
-              <a:buNone/>
-            </a:pPr>
-            <a:r>
-              <a:rPr sz="1100" b="0" i="1">
+                <a:spcPct val="100000"/>
+              </a:lnSpc>
+              <a:spcBef>
+                <a:spcPts val="0"/>
+              </a:spcBef>
+              <a:spcAft>
+                <a:spcPts val="600"/>
+              </a:spcAft>
+              <a:buNone/>
+            </a:pPr>
+            <a:r>
+              <a:rPr sz="900" b="1" i="0" spc="200">
+                <a:solidFill>
+                  <a:srgbClr val="326CE5"/>
+                </a:solidFill>
+                <a:latin typeface="Segoe UI Semibold"/>
+              </a:rPr>
+              <a:t>TEORÍA</a:t>
+            </a:r>
+          </a:p>
+          <a:p>
+            <a:pPr algn="l" marL="0" indent="0">
+              <a:lnSpc>
+                <a:spcPct val="128000"/>
+              </a:lnSpc>
+              <a:spcBef>
+                <a:spcPts val="0"/>
+              </a:spcBef>
+              <a:spcAft>
+                <a:spcPts val="400"/>
+              </a:spcAft>
+              <a:buNone/>
+            </a:pPr>
+            <a:r>
+              <a:rPr sz="950" b="0" i="0">
                 <a:solidFill>
                   <a:srgbClr val="BDC9DB"/>
                 </a:solidFill>
                 <a:latin typeface="Segoe UI"/>
               </a:rPr>
-              <a:t>Pending por CPU y OOMKilled por memoria son ramas de diagnóstico completamente distintas. Confundirlas cuesta minutos que no tienes.</a:t>
+              <a:t>requests y limits parecen dos caras de lo mismo, pero actúan en momentos distintos y los usan actores distintos. Los REQUESTS los usa el SCHEDULER: son la cantidad de CPU y memoria que el Pod reserva, y con ellos decide en qué nodo cabe. Si la suma de requests no cabe en ningún nodo, el Pod se queda en Pending con el evento «Insufficient cpu/memory». El fallo ocurre ANTES de arrancar.</a:t>
+            </a:r>
+          </a:p>
+          <a:p>
+            <a:pPr algn="l" marL="0" indent="0">
+              <a:lnSpc>
+                <a:spcPct val="128000"/>
+              </a:lnSpc>
+              <a:spcBef>
+                <a:spcPts val="0"/>
+              </a:spcBef>
+              <a:spcAft>
+                <a:spcPts val="400"/>
+              </a:spcAft>
+              <a:buNone/>
+            </a:pPr>
+            <a:r>
+              <a:rPr sz="950" b="0" i="0">
+                <a:solidFill>
+                  <a:srgbClr val="BDC9DB"/>
+                </a:solidFill>
+                <a:latin typeface="Segoe UI"/>
+              </a:rPr>
+              <a:t>Los LIMITS los aplica el RUNTIME mediante cgroups, ya con el contenedor en ejecución: son el techo que no puede superar. La CPU es un recurso comprimible: pasarse del límite provoca throttling (el proceso va más lento), no muerte. La memoria NO es comprimible: superar limits.memory provoca que el kernel mate el contenedor con OOMKilled y exit code 137.</a:t>
+            </a:r>
+          </a:p>
+          <a:p>
+            <a:pPr algn="l" marL="0" indent="0">
+              <a:lnSpc>
+                <a:spcPct val="128000"/>
+              </a:lnSpc>
+              <a:spcBef>
+                <a:spcPts val="0"/>
+              </a:spcBef>
+              <a:spcAft>
+                <a:spcPts val="400"/>
+              </a:spcAft>
+              <a:buNone/>
+            </a:pPr>
+            <a:r>
+              <a:rPr sz="950" b="0" i="0">
+                <a:solidFill>
+                  <a:srgbClr val="BDC9DB"/>
+                </a:solidFill>
+                <a:latin typeface="Segoe UI"/>
+              </a:rPr>
+              <a:t>La consecuencia para el diagnóstico es que Pending por CPU y OOMKilled por memoria son ramas completamente separadas: una se investiga en los eventos del scheduler, la otra en el Last State del contenedor. Y cuidado: si defines solo limits, Kubernetes copia esos valores a los requests y el Pod acaba en QoS Guaranteed sin que lo pretendieras.</a:t>
             </a:r>
           </a:p>
         </p:txBody>
@@ -11167,8 +11516,8 @@
         </p:nvSpPr>
         <p:spPr>
           <a:xfrm>
-            <a:off x="620000" y="2688000"/>
-            <a:ext cx="3437333" cy="1804000"/>
+            <a:off x="620000" y="1470000"/>
+            <a:ext cx="3437333" cy="2670000"/>
           </a:xfrm>
           <a:prstGeom prst="roundRect">
             <a:avLst>
@@ -11217,7 +11566,7 @@
         </p:nvSpPr>
         <p:spPr>
           <a:xfrm>
-            <a:off x="644000" y="2688000"/>
+            <a:off x="644000" y="1470000"/>
             <a:ext cx="3389333" cy="46000"/>
           </a:xfrm>
           <a:prstGeom prst="rect">
@@ -11263,7 +11612,7 @@
         </p:nvSpPr>
         <p:spPr>
           <a:xfrm>
-            <a:off x="850000" y="2938000"/>
+            <a:off x="820000" y="1690000"/>
             <a:ext cx="300000" cy="300000"/>
           </a:xfrm>
           <a:prstGeom prst="ellipse">
@@ -11337,7 +11686,7 @@
         </p:blipFill>
         <p:spPr>
           <a:xfrm>
-            <a:off x="3497333" y="2924000"/>
+            <a:off x="3527333" y="1676000"/>
             <a:ext cx="330000" cy="330000"/>
           </a:xfrm>
           <a:prstGeom prst="rect">
@@ -11353,8 +11702,8 @@
         </p:nvSpPr>
         <p:spPr>
           <a:xfrm>
-            <a:off x="1260000" y="2918000"/>
-            <a:ext cx="2377333" cy="340000"/>
+            <a:off x="1230000" y="1670000"/>
+            <a:ext cx="2407333" cy="340000"/>
           </a:xfrm>
           <a:prstGeom prst="rect">
             <a:avLst/>
@@ -11399,8 +11748,8 @@
         </p:nvSpPr>
         <p:spPr>
           <a:xfrm>
-            <a:off x="850000" y="3338000"/>
-            <a:ext cx="2977333" cy="1074000"/>
+            <a:off x="820000" y="2030000"/>
+            <a:ext cx="3037333" cy="2050000"/>
           </a:xfrm>
           <a:prstGeom prst="rect">
             <a:avLst/>
@@ -11415,18 +11764,18 @@
           <a:p>
             <a:pPr algn="l" marL="0" indent="0">
               <a:lnSpc>
-                <a:spcPct val="118000"/>
-              </a:lnSpc>
-              <a:spcBef>
-                <a:spcPts val="0"/>
-              </a:spcBef>
-              <a:spcAft>
-                <a:spcPts val="0"/>
-              </a:spcAft>
-              <a:buNone/>
-            </a:pPr>
-            <a:r>
-              <a:rPr sz="1100" b="0" i="0">
+                <a:spcPct val="112000"/>
+              </a:lnSpc>
+              <a:spcBef>
+                <a:spcPts val="0"/>
+              </a:spcBef>
+              <a:spcAft>
+                <a:spcPts val="0"/>
+              </a:spcAft>
+              <a:buNone/>
+            </a:pPr>
+            <a:r>
+              <a:rPr sz="1000" b="0" i="0">
                 <a:solidFill>
                   <a:srgbClr val="BDC9DB"/>
                 </a:solidFill>
@@ -11445,8 +11794,8 @@
         </p:nvSpPr>
         <p:spPr>
           <a:xfrm>
-            <a:off x="4377333" y="2688000"/>
-            <a:ext cx="3437333" cy="1804000"/>
+            <a:off x="4377333" y="1470000"/>
+            <a:ext cx="3437333" cy="2670000"/>
           </a:xfrm>
           <a:prstGeom prst="roundRect">
             <a:avLst>
@@ -11495,7 +11844,7 @@
         </p:nvSpPr>
         <p:spPr>
           <a:xfrm>
-            <a:off x="4401333" y="2688000"/>
+            <a:off x="4401333" y="1470000"/>
             <a:ext cx="3389333" cy="46000"/>
           </a:xfrm>
           <a:prstGeom prst="rect">
@@ -11541,7 +11890,7 @@
         </p:nvSpPr>
         <p:spPr>
           <a:xfrm>
-            <a:off x="4607333" y="2938000"/>
+            <a:off x="4577333" y="1690000"/>
             <a:ext cx="300000" cy="300000"/>
           </a:xfrm>
           <a:prstGeom prst="ellipse">
@@ -11615,7 +11964,7 @@
         </p:blipFill>
         <p:spPr>
           <a:xfrm>
-            <a:off x="7254666" y="2924000"/>
+            <a:off x="7284666" y="1676000"/>
             <a:ext cx="330000" cy="330000"/>
           </a:xfrm>
           <a:prstGeom prst="rect">
@@ -11631,8 +11980,8 @@
         </p:nvSpPr>
         <p:spPr>
           <a:xfrm>
-            <a:off x="5017333" y="2918000"/>
-            <a:ext cx="2377333" cy="340000"/>
+            <a:off x="4987333" y="1670000"/>
+            <a:ext cx="2407333" cy="340000"/>
           </a:xfrm>
           <a:prstGeom prst="rect">
             <a:avLst/>
@@ -11677,8 +12026,8 @@
         </p:nvSpPr>
         <p:spPr>
           <a:xfrm>
-            <a:off x="4607333" y="3338000"/>
-            <a:ext cx="2977333" cy="1074000"/>
+            <a:off x="4577333" y="2030000"/>
+            <a:ext cx="3037333" cy="2050000"/>
           </a:xfrm>
           <a:prstGeom prst="rect">
             <a:avLst/>
@@ -11693,18 +12042,18 @@
           <a:p>
             <a:pPr algn="l" marL="0" indent="0">
               <a:lnSpc>
-                <a:spcPct val="118000"/>
-              </a:lnSpc>
-              <a:spcBef>
-                <a:spcPts val="0"/>
-              </a:spcBef>
-              <a:spcAft>
-                <a:spcPts val="0"/>
-              </a:spcAft>
-              <a:buNone/>
-            </a:pPr>
-            <a:r>
-              <a:rPr sz="1100" b="0" i="0">
+                <a:spcPct val="112000"/>
+              </a:lnSpc>
+              <a:spcBef>
+                <a:spcPts val="0"/>
+              </a:spcBef>
+              <a:spcAft>
+                <a:spcPts val="0"/>
+              </a:spcAft>
+              <a:buNone/>
+            </a:pPr>
+            <a:r>
+              <a:rPr sz="1000" b="0" i="0">
                 <a:solidFill>
                   <a:srgbClr val="BDC9DB"/>
                 </a:solidFill>
@@ -11723,8 +12072,8 @@
         </p:nvSpPr>
         <p:spPr>
           <a:xfrm>
-            <a:off x="8134666" y="2688000"/>
-            <a:ext cx="3437333" cy="1804000"/>
+            <a:off x="8134666" y="1470000"/>
+            <a:ext cx="3437333" cy="2670000"/>
           </a:xfrm>
           <a:prstGeom prst="roundRect">
             <a:avLst>
@@ -11773,7 +12122,7 @@
         </p:nvSpPr>
         <p:spPr>
           <a:xfrm>
-            <a:off x="8158666" y="2688000"/>
+            <a:off x="8158666" y="1470000"/>
             <a:ext cx="3389333" cy="46000"/>
           </a:xfrm>
           <a:prstGeom prst="rect">
@@ -11819,7 +12168,7 @@
         </p:nvSpPr>
         <p:spPr>
           <a:xfrm>
-            <a:off x="8364666" y="2938000"/>
+            <a:off x="8334666" y="1690000"/>
             <a:ext cx="300000" cy="300000"/>
           </a:xfrm>
           <a:prstGeom prst="ellipse">
@@ -11893,7 +12242,7 @@
         </p:blipFill>
         <p:spPr>
           <a:xfrm>
-            <a:off x="11012000" y="2924000"/>
+            <a:off x="11042000" y="1676000"/>
             <a:ext cx="330000" cy="330000"/>
           </a:xfrm>
           <a:prstGeom prst="rect">
@@ -11909,8 +12258,8 @@
         </p:nvSpPr>
         <p:spPr>
           <a:xfrm>
-            <a:off x="8774666" y="2918000"/>
-            <a:ext cx="2377333" cy="340000"/>
+            <a:off x="8744666" y="1670000"/>
+            <a:ext cx="2407333" cy="340000"/>
           </a:xfrm>
           <a:prstGeom prst="rect">
             <a:avLst/>
@@ -11955,8 +12304,8 @@
         </p:nvSpPr>
         <p:spPr>
           <a:xfrm>
-            <a:off x="8364666" y="3338000"/>
-            <a:ext cx="2977333" cy="1074000"/>
+            <a:off x="8334666" y="2030000"/>
+            <a:ext cx="3037333" cy="2050000"/>
           </a:xfrm>
           <a:prstGeom prst="rect">
             <a:avLst/>
@@ -11971,18 +12320,18 @@
           <a:p>
             <a:pPr algn="l" marL="0" indent="0">
               <a:lnSpc>
-                <a:spcPct val="118000"/>
-              </a:lnSpc>
-              <a:spcBef>
-                <a:spcPts val="0"/>
-              </a:spcBef>
-              <a:spcAft>
-                <a:spcPts val="0"/>
-              </a:spcAft>
-              <a:buNone/>
-            </a:pPr>
-            <a:r>
-              <a:rPr sz="1100" b="0" i="0">
+                <a:spcPct val="112000"/>
+              </a:lnSpc>
+              <a:spcBef>
+                <a:spcPts val="0"/>
+              </a:spcBef>
+              <a:spcAft>
+                <a:spcPts val="0"/>
+              </a:spcAft>
+              <a:buNone/>
+            </a:pPr>
+            <a:r>
+              <a:rPr sz="1000" b="0" i="0">
                 <a:solidFill>
                   <a:srgbClr val="BDC9DB"/>
                 </a:solidFill>
@@ -12001,12 +12350,12 @@
         </p:nvSpPr>
         <p:spPr>
           <a:xfrm>
-            <a:off x="620000" y="5860000"/>
-            <a:ext cx="10952000" cy="470000"/>
+            <a:off x="620000" y="4310000"/>
+            <a:ext cx="10952000" cy="2000000"/>
           </a:xfrm>
           <a:prstGeom prst="roundRect">
             <a:avLst>
-              <a:gd name="adj" fmla="val 10000"/>
+              <a:gd name="adj" fmla="val 4500"/>
             </a:avLst>
           </a:prstGeom>
           <a:solidFill>
@@ -12051,8 +12400,8 @@
         </p:nvSpPr>
         <p:spPr>
           <a:xfrm>
-            <a:off x="650000" y="5884000"/>
-            <a:ext cx="40000" cy="422000"/>
+            <a:off x="646000" y="4332000"/>
+            <a:ext cx="40000" cy="1956000"/>
           </a:xfrm>
           <a:prstGeom prst="rect">
             <a:avLst/>
@@ -12097,8 +12446,8 @@
         </p:nvSpPr>
         <p:spPr>
           <a:xfrm>
-            <a:off x="860000" y="5860000"/>
-            <a:ext cx="10482000" cy="470000"/>
+            <a:off x="860000" y="4440000"/>
+            <a:ext cx="10522000" cy="1740000"/>
           </a:xfrm>
           <a:prstGeom prst="rect">
             <a:avLst/>
@@ -12106,31 +12455,100 @@
           <a:noFill/>
         </p:spPr>
         <p:txBody>
-          <a:bodyPr wrap="square" anchor="ctr" lIns="0" rIns="0" tIns="0" bIns="0">
+          <a:bodyPr wrap="square" anchor="t" lIns="0" rIns="0" tIns="0" bIns="0">
             <a:noAutofit/>
           </a:bodyPr>
           <a:lstStyle/>
           <a:p>
             <a:pPr algn="l" marL="0" indent="0">
               <a:lnSpc>
-                <a:spcPct val="116000"/>
-              </a:lnSpc>
-              <a:spcBef>
-                <a:spcPts val="0"/>
-              </a:spcBef>
-              <a:spcAft>
-                <a:spcPts val="0"/>
-              </a:spcAft>
-              <a:buNone/>
-            </a:pPr>
-            <a:r>
-              <a:rPr sz="1100" b="0" i="1">
+                <a:spcPct val="100000"/>
+              </a:lnSpc>
+              <a:spcBef>
+                <a:spcPts val="0"/>
+              </a:spcBef>
+              <a:spcAft>
+                <a:spcPts val="600"/>
+              </a:spcAft>
+              <a:buNone/>
+            </a:pPr>
+            <a:r>
+              <a:rPr sz="900" b="1" i="0" spc="200">
+                <a:solidFill>
+                  <a:srgbClr val="326CE5"/>
+                </a:solidFill>
+                <a:latin typeface="Segoe UI Semibold"/>
+              </a:rPr>
+              <a:t>TEORÍA</a:t>
+            </a:r>
+          </a:p>
+          <a:p>
+            <a:pPr algn="l" marL="0" indent="0">
+              <a:lnSpc>
+                <a:spcPct val="128000"/>
+              </a:lnSpc>
+              <a:spcBef>
+                <a:spcPts val="0"/>
+              </a:spcBef>
+              <a:spcAft>
+                <a:spcPts val="400"/>
+              </a:spcAft>
+              <a:buNone/>
+            </a:pPr>
+            <a:r>
+              <a:rPr sz="1050" b="0" i="0">
                 <a:solidFill>
                   <a:srgbClr val="BDC9DB"/>
                 </a:solidFill>
                 <a:latin typeface="Segoe UI"/>
               </a:rPr>
-              <a:t>Si defines solo limits, Kubernetes copia los limits a los requests y el Pod queda Guaranteed sin que lo pretendieras.</a:t>
+              <a:t>La clase de QoS de un Pod no se declara: Kubernetes la deduce de cómo hayas puesto requests y limits, y determina el orden en que se desalojan los Pods cuando un nodo se queda sin memoria. Guaranteed exige que requests sea igual a limits en TODOS los recursos de TODOS los contenedores; es el último en ser desalojado.</a:t>
+            </a:r>
+          </a:p>
+          <a:p>
+            <a:pPr algn="l" marL="0" indent="0">
+              <a:lnSpc>
+                <a:spcPct val="128000"/>
+              </a:lnSpc>
+              <a:spcBef>
+                <a:spcPts val="0"/>
+              </a:spcBef>
+              <a:spcAft>
+                <a:spcPts val="400"/>
+              </a:spcAft>
+              <a:buNone/>
+            </a:pPr>
+            <a:r>
+              <a:rPr sz="1050" b="0" i="0">
+                <a:solidFill>
+                  <a:srgbClr val="BDC9DB"/>
+                </a:solidFill>
+                <a:latin typeface="Segoe UI"/>
+              </a:rPr>
+              <a:t>Burstable es cualquier Pod que tenga algún request o limit pero no cumpla la condición de Guaranteed. Es el caso más habitual en producción. BestEffort es un Pod sin ningún request ni limit: es el PRIMERO en caer cuando hay presión de memoria.</a:t>
+            </a:r>
+          </a:p>
+          <a:p>
+            <a:pPr algn="l" marL="0" indent="0">
+              <a:lnSpc>
+                <a:spcPct val="128000"/>
+              </a:lnSpc>
+              <a:spcBef>
+                <a:spcPts val="0"/>
+              </a:spcBef>
+              <a:spcAft>
+                <a:spcPts val="400"/>
+              </a:spcAft>
+              <a:buNone/>
+            </a:pPr>
+            <a:r>
+              <a:rPr sz="1050" b="0" i="0">
+                <a:solidFill>
+                  <a:srgbClr val="BDC9DB"/>
+                </a:solidFill>
+                <a:latin typeface="Segoe UI"/>
+              </a:rPr>
+              <a:t>La regla práctica: para cargas críticas, pon requests == limits y consigue Guaranteed; para el resto, define al menos requests realistas para no acabar en BestEffort. Y recuerda que definir solo limits te lleva a Guaranteed de forma implícita.</a:t>
             </a:r>
           </a:p>
         </p:txBody>
@@ -22682,7 +23100,7 @@
         <p:spPr>
           <a:xfrm>
             <a:off x="620000" y="1470000"/>
-            <a:ext cx="10952000" cy="952500"/>
+            <a:ext cx="10952000" cy="540000"/>
           </a:xfrm>
           <a:prstGeom prst="roundRect">
             <a:avLst>
@@ -22731,7 +23149,7 @@
         </p:nvSpPr>
         <p:spPr>
           <a:xfrm>
-            <a:off x="840000" y="1781250"/>
+            <a:off x="840000" y="1575000"/>
             <a:ext cx="330000" cy="330000"/>
           </a:xfrm>
           <a:prstGeom prst="ellipse">
@@ -22798,7 +23216,7 @@
         <p:spPr>
           <a:xfrm>
             <a:off x="1370000" y="1470000"/>
-            <a:ext cx="2500000" cy="952500"/>
+            <a:ext cx="2500000" cy="540000"/>
           </a:xfrm>
           <a:prstGeom prst="rect">
             <a:avLst/>
@@ -22843,8 +23261,8 @@
         </p:nvSpPr>
         <p:spPr>
           <a:xfrm>
-            <a:off x="3970000" y="1679550"/>
-            <a:ext cx="8000" cy="533400"/>
+            <a:off x="3970000" y="1588800"/>
+            <a:ext cx="8000" cy="302400"/>
           </a:xfrm>
           <a:prstGeom prst="rect">
             <a:avLst/>
@@ -22890,7 +23308,7 @@
         <p:spPr>
           <a:xfrm>
             <a:off x="4170000" y="1470000"/>
-            <a:ext cx="7202000" cy="952500"/>
+            <a:ext cx="7202000" cy="540000"/>
           </a:xfrm>
           <a:prstGeom prst="rect">
             <a:avLst/>
@@ -22935,7 +23353,7 @@
         </p:nvSpPr>
         <p:spPr>
           <a:xfrm>
-            <a:off x="915000" y="2430500"/>
+            <a:off x="915000" y="2018000"/>
             <a:ext cx="180000" cy="154000"/>
           </a:xfrm>
           <a:prstGeom prst="rect">
@@ -22981,8 +23399,8 @@
         </p:nvSpPr>
         <p:spPr>
           <a:xfrm>
-            <a:off x="620000" y="2592500"/>
-            <a:ext cx="10952000" cy="952500"/>
+            <a:off x="620000" y="2180000"/>
+            <a:ext cx="10952000" cy="540000"/>
           </a:xfrm>
           <a:prstGeom prst="roundRect">
             <a:avLst>
@@ -23031,7 +23449,7 @@
         </p:nvSpPr>
         <p:spPr>
           <a:xfrm>
-            <a:off x="840000" y="2903750"/>
+            <a:off x="840000" y="2285000"/>
             <a:ext cx="330000" cy="330000"/>
           </a:xfrm>
           <a:prstGeom prst="ellipse">
@@ -23097,8 +23515,8 @@
         </p:nvSpPr>
         <p:spPr>
           <a:xfrm>
-            <a:off x="1370000" y="2592500"/>
-            <a:ext cx="2500000" cy="952500"/>
+            <a:off x="1370000" y="2180000"/>
+            <a:ext cx="2500000" cy="540000"/>
           </a:xfrm>
           <a:prstGeom prst="rect">
             <a:avLst/>
@@ -23143,8 +23561,8 @@
         </p:nvSpPr>
         <p:spPr>
           <a:xfrm>
-            <a:off x="3970000" y="2802050"/>
-            <a:ext cx="8000" cy="533400"/>
+            <a:off x="3970000" y="2298800"/>
+            <a:ext cx="8000" cy="302400"/>
           </a:xfrm>
           <a:prstGeom prst="rect">
             <a:avLst/>
@@ -23189,8 +23607,8 @@
         </p:nvSpPr>
         <p:spPr>
           <a:xfrm>
-            <a:off x="4170000" y="2592500"/>
-            <a:ext cx="7202000" cy="952500"/>
+            <a:off x="4170000" y="2180000"/>
+            <a:ext cx="7202000" cy="540000"/>
           </a:xfrm>
           <a:prstGeom prst="rect">
             <a:avLst/>
@@ -23235,7 +23653,7 @@
         </p:nvSpPr>
         <p:spPr>
           <a:xfrm>
-            <a:off x="915000" y="3553000"/>
+            <a:off x="915000" y="2728000"/>
             <a:ext cx="180000" cy="154000"/>
           </a:xfrm>
           <a:prstGeom prst="rect">
@@ -23281,8 +23699,8 @@
         </p:nvSpPr>
         <p:spPr>
           <a:xfrm>
-            <a:off x="620000" y="3715000"/>
-            <a:ext cx="10952000" cy="952500"/>
+            <a:off x="620000" y="2890000"/>
+            <a:ext cx="10952000" cy="540000"/>
           </a:xfrm>
           <a:prstGeom prst="roundRect">
             <a:avLst>
@@ -23331,7 +23749,7 @@
         </p:nvSpPr>
         <p:spPr>
           <a:xfrm>
-            <a:off x="840000" y="4026250"/>
+            <a:off x="840000" y="2995000"/>
             <a:ext cx="330000" cy="330000"/>
           </a:xfrm>
           <a:prstGeom prst="ellipse">
@@ -23397,8 +23815,8 @@
         </p:nvSpPr>
         <p:spPr>
           <a:xfrm>
-            <a:off x="1370000" y="3715000"/>
-            <a:ext cx="2500000" cy="952500"/>
+            <a:off x="1370000" y="2890000"/>
+            <a:ext cx="2500000" cy="540000"/>
           </a:xfrm>
           <a:prstGeom prst="rect">
             <a:avLst/>
@@ -23443,8 +23861,8 @@
         </p:nvSpPr>
         <p:spPr>
           <a:xfrm>
-            <a:off x="3970000" y="3924550"/>
-            <a:ext cx="8000" cy="533400"/>
+            <a:off x="3970000" y="3008800"/>
+            <a:ext cx="8000" cy="302400"/>
           </a:xfrm>
           <a:prstGeom prst="rect">
             <a:avLst/>
@@ -23489,8 +23907,8 @@
         </p:nvSpPr>
         <p:spPr>
           <a:xfrm>
-            <a:off x="4170000" y="3715000"/>
-            <a:ext cx="7202000" cy="952500"/>
+            <a:off x="4170000" y="2890000"/>
+            <a:ext cx="7202000" cy="540000"/>
           </a:xfrm>
           <a:prstGeom prst="rect">
             <a:avLst/>
@@ -23535,7 +23953,7 @@
         </p:nvSpPr>
         <p:spPr>
           <a:xfrm>
-            <a:off x="915000" y="4675500"/>
+            <a:off x="915000" y="3438000"/>
             <a:ext cx="180000" cy="154000"/>
           </a:xfrm>
           <a:prstGeom prst="rect">
@@ -23581,8 +23999,8 @@
         </p:nvSpPr>
         <p:spPr>
           <a:xfrm>
-            <a:off x="620000" y="4837500"/>
-            <a:ext cx="10952000" cy="952500"/>
+            <a:off x="620000" y="3600000"/>
+            <a:ext cx="10952000" cy="540000"/>
           </a:xfrm>
           <a:prstGeom prst="roundRect">
             <a:avLst>
@@ -23631,7 +24049,7 @@
         </p:nvSpPr>
         <p:spPr>
           <a:xfrm>
-            <a:off x="840000" y="5148750"/>
+            <a:off x="840000" y="3705000"/>
             <a:ext cx="330000" cy="330000"/>
           </a:xfrm>
           <a:prstGeom prst="ellipse">
@@ -23697,8 +24115,8 @@
         </p:nvSpPr>
         <p:spPr>
           <a:xfrm>
-            <a:off x="1370000" y="4837500"/>
-            <a:ext cx="2500000" cy="952500"/>
+            <a:off x="1370000" y="3600000"/>
+            <a:ext cx="2500000" cy="540000"/>
           </a:xfrm>
           <a:prstGeom prst="rect">
             <a:avLst/>
@@ -23743,8 +24161,8 @@
         </p:nvSpPr>
         <p:spPr>
           <a:xfrm>
-            <a:off x="3970000" y="5047050"/>
-            <a:ext cx="8000" cy="533400"/>
+            <a:off x="3970000" y="3718800"/>
+            <a:ext cx="8000" cy="302400"/>
           </a:xfrm>
           <a:prstGeom prst="rect">
             <a:avLst/>
@@ -23789,8 +24207,8 @@
         </p:nvSpPr>
         <p:spPr>
           <a:xfrm>
-            <a:off x="4170000" y="4837500"/>
-            <a:ext cx="7202000" cy="952500"/>
+            <a:off x="4170000" y="3600000"/>
+            <a:ext cx="7202000" cy="540000"/>
           </a:xfrm>
           <a:prstGeom prst="rect">
             <a:avLst/>
@@ -23835,12 +24253,12 @@
         </p:nvSpPr>
         <p:spPr>
           <a:xfrm>
-            <a:off x="620000" y="5910000"/>
-            <a:ext cx="10952000" cy="470000"/>
+            <a:off x="620000" y="4310000"/>
+            <a:ext cx="10952000" cy="2000000"/>
           </a:xfrm>
           <a:prstGeom prst="roundRect">
             <a:avLst>
-              <a:gd name="adj" fmla="val 10000"/>
+              <a:gd name="adj" fmla="val 4500"/>
             </a:avLst>
           </a:prstGeom>
           <a:solidFill>
@@ -23885,8 +24303,8 @@
         </p:nvSpPr>
         <p:spPr>
           <a:xfrm>
-            <a:off x="650000" y="5934000"/>
-            <a:ext cx="40000" cy="422000"/>
+            <a:off x="646000" y="4332000"/>
+            <a:ext cx="40000" cy="1956000"/>
           </a:xfrm>
           <a:prstGeom prst="rect">
             <a:avLst/>
@@ -23931,8 +24349,8 @@
         </p:nvSpPr>
         <p:spPr>
           <a:xfrm>
-            <a:off x="860000" y="5910000"/>
-            <a:ext cx="10482000" cy="470000"/>
+            <a:off x="860000" y="4440000"/>
+            <a:ext cx="10522000" cy="1740000"/>
           </a:xfrm>
           <a:prstGeom prst="rect">
             <a:avLst/>
@@ -23940,31 +24358,100 @@
           <a:noFill/>
         </p:spPr>
         <p:txBody>
-          <a:bodyPr wrap="square" anchor="ctr" lIns="0" rIns="0" tIns="0" bIns="0">
+          <a:bodyPr wrap="square" anchor="t" lIns="0" rIns="0" tIns="0" bIns="0">
             <a:noAutofit/>
           </a:bodyPr>
           <a:lstStyle/>
           <a:p>
             <a:pPr algn="l" marL="0" indent="0">
               <a:lnSpc>
-                <a:spcPct val="116000"/>
-              </a:lnSpc>
-              <a:spcBef>
-                <a:spcPts val="0"/>
-              </a:spcBef>
-              <a:spcAft>
-                <a:spcPts val="0"/>
-              </a:spcAft>
-              <a:buNone/>
-            </a:pPr>
-            <a:r>
-              <a:rPr sz="1100" b="0" i="1">
+                <a:spcPct val="100000"/>
+              </a:lnSpc>
+              <a:spcBef>
+                <a:spcPts val="0"/>
+              </a:spcBef>
+              <a:spcAft>
+                <a:spcPts val="600"/>
+              </a:spcAft>
+              <a:buNone/>
+            </a:pPr>
+            <a:r>
+              <a:rPr sz="900" b="1" i="0" spc="200">
+                <a:solidFill>
+                  <a:srgbClr val="326CE5"/>
+                </a:solidFill>
+                <a:latin typeface="Segoe UI Semibold"/>
+              </a:rPr>
+              <a:t>TEORÍA</a:t>
+            </a:r>
+          </a:p>
+          <a:p>
+            <a:pPr algn="l" marL="0" indent="0">
+              <a:lnSpc>
+                <a:spcPct val="128000"/>
+              </a:lnSpc>
+              <a:spcBef>
+                <a:spcPts val="0"/>
+              </a:spcBef>
+              <a:spcAft>
+                <a:spcPts val="400"/>
+              </a:spcAft>
+              <a:buNone/>
+            </a:pPr>
+            <a:r>
+              <a:rPr sz="1000" b="0" i="0">
                 <a:solidFill>
                   <a:srgbClr val="BDC9DB"/>
                 </a:solidFill>
                 <a:latin typeface="Segoe UI"/>
               </a:rPr>
-              <a:t>Con 3 réplicas y los valores por defecto (25 %), maxSurge redondea a 1 Pod extra y maxUnavailable redondea a 0 indisponibles. Por eso el rollout es tan conservador.</a:t>
+              <a:t>Un Rolling Update no reemplaza los Pods de golpe. Al cambiar spec.template el Deployment crea un ReplicaSet nuevo con 0 réplicas y luego hace un escalado cruzado: sube el nuevo de uno en uno y baja el viejo, manteniendo en todo momento un número de réplicas dentro de los márgenes que fijan maxSurge y maxUnavailable.</a:t>
+            </a:r>
+          </a:p>
+          <a:p>
+            <a:pPr algn="l" marL="0" indent="0">
+              <a:lnSpc>
+                <a:spcPct val="128000"/>
+              </a:lnSpc>
+              <a:spcBef>
+                <a:spcPts val="0"/>
+              </a:spcBef>
+              <a:spcAft>
+                <a:spcPts val="400"/>
+              </a:spcAft>
+              <a:buNone/>
+            </a:pPr>
+            <a:r>
+              <a:rPr sz="1000" b="0" i="0">
+                <a:solidFill>
+                  <a:srgbClr val="BDC9DB"/>
+                </a:solidFill>
+                <a:latin typeface="Segoe UI"/>
+              </a:rPr>
+              <a:t>maxSurge es cuántos Pods de más se permiten por encima del total deseado; maxUnavailable, cuántos de menos. Con los valores por defecto (25 %) y 3 réplicas, maxSurge redondea a 1 Pod extra y maxUnavailable a 0 indisponibles, así que el rollout es muy conservador: siempre hay 3 sirviendo.</a:t>
+            </a:r>
+          </a:p>
+          <a:p>
+            <a:pPr algn="l" marL="0" indent="0">
+              <a:lnSpc>
+                <a:spcPct val="128000"/>
+              </a:lnSpc>
+              <a:spcBef>
+                <a:spcPts val="0"/>
+              </a:spcBef>
+              <a:spcAft>
+                <a:spcPts val="400"/>
+              </a:spcAft>
+              <a:buNone/>
+            </a:pPr>
+            <a:r>
+              <a:rPr sz="1000" b="0" i="0">
+                <a:solidFill>
+                  <a:srgbClr val="BDC9DB"/>
+                </a:solidFill>
+                <a:latin typeface="Segoe UI"/>
+              </a:rPr>
+              <a:t>Un Pod nuevo solo CUENTA como disponible cuando su readinessProbe pasa. Por eso, si la imagen nueva está rota y nunca llega a Ready, el rollout se BLOQUEA en lugar de tumbar el servicio: las réplicas viejas siguen atendiendo. Al terminar, el ReplicaSet viejo queda a 0 réplicas pero no se borra —es el material del rollback.</a:t>
             </a:r>
           </a:p>
         </p:txBody>
@@ -24303,7 +24790,7 @@
         </p:nvSpPr>
         <p:spPr>
           <a:xfrm>
-            <a:off x="636000" y="2428000"/>
+            <a:off x="636000" y="1751750"/>
             <a:ext cx="104000" cy="104000"/>
           </a:xfrm>
           <a:prstGeom prst="ellipse">
@@ -24347,8 +24834,8 @@
         </p:nvSpPr>
         <p:spPr>
           <a:xfrm>
-            <a:off x="880000" y="2010000"/>
-            <a:ext cx="5435040" cy="940000"/>
+            <a:off x="880000" y="1470000"/>
+            <a:ext cx="5435040" cy="667500"/>
           </a:xfrm>
           <a:prstGeom prst="rect">
             <a:avLst/>
@@ -24393,7 +24880,7 @@
         </p:nvSpPr>
         <p:spPr>
           <a:xfrm>
-            <a:off x="636000" y="3368000"/>
+            <a:off x="636000" y="2419250"/>
             <a:ext cx="104000" cy="104000"/>
           </a:xfrm>
           <a:prstGeom prst="ellipse">
@@ -24437,8 +24924,8 @@
         </p:nvSpPr>
         <p:spPr>
           <a:xfrm>
-            <a:off x="880000" y="2950000"/>
-            <a:ext cx="5435040" cy="940000"/>
+            <a:off x="880000" y="2137500"/>
+            <a:ext cx="5435040" cy="667500"/>
           </a:xfrm>
           <a:prstGeom prst="rect">
             <a:avLst/>
@@ -24483,7 +24970,7 @@
         </p:nvSpPr>
         <p:spPr>
           <a:xfrm>
-            <a:off x="636000" y="4308000"/>
+            <a:off x="636000" y="3086750"/>
             <a:ext cx="104000" cy="104000"/>
           </a:xfrm>
           <a:prstGeom prst="ellipse">
@@ -24527,8 +25014,8 @@
         </p:nvSpPr>
         <p:spPr>
           <a:xfrm>
-            <a:off x="880000" y="3890000"/>
-            <a:ext cx="5435040" cy="940000"/>
+            <a:off x="880000" y="2805000"/>
+            <a:ext cx="5435040" cy="667500"/>
           </a:xfrm>
           <a:prstGeom prst="rect">
             <a:avLst/>
@@ -24573,7 +25060,7 @@
         </p:nvSpPr>
         <p:spPr>
           <a:xfrm>
-            <a:off x="636000" y="5248000"/>
+            <a:off x="636000" y="3754250"/>
             <a:ext cx="104000" cy="104000"/>
           </a:xfrm>
           <a:prstGeom prst="ellipse">
@@ -24617,8 +25104,8 @@
         </p:nvSpPr>
         <p:spPr>
           <a:xfrm>
-            <a:off x="880000" y="4830000"/>
-            <a:ext cx="5435040" cy="940000"/>
+            <a:off x="880000" y="3472500"/>
+            <a:ext cx="5435040" cy="667500"/>
           </a:xfrm>
           <a:prstGeom prst="rect">
             <a:avLst/>
@@ -24663,8 +25150,8 @@
         </p:nvSpPr>
         <p:spPr>
           <a:xfrm>
-            <a:off x="6635040" y="2010000"/>
-            <a:ext cx="4936960" cy="3760000"/>
+            <a:off x="6635040" y="1470000"/>
+            <a:ext cx="4936960" cy="2670000"/>
           </a:xfrm>
           <a:prstGeom prst="roundRect">
             <a:avLst>
@@ -24713,8 +25200,8 @@
         </p:nvSpPr>
         <p:spPr>
           <a:xfrm>
-            <a:off x="6635040" y="2310000"/>
-            <a:ext cx="46000" cy="3460000"/>
+            <a:off x="6635040" y="1770000"/>
+            <a:ext cx="46000" cy="2370000"/>
           </a:xfrm>
           <a:prstGeom prst="rect">
             <a:avLst/>
@@ -24759,7 +25246,7 @@
         </p:nvSpPr>
         <p:spPr>
           <a:xfrm>
-            <a:off x="6825040" y="2070000"/>
+            <a:off x="6825040" y="1530000"/>
             <a:ext cx="4556960" cy="260000"/>
           </a:xfrm>
           <a:prstGeom prst="rect">
@@ -24805,7 +25292,7 @@
         </p:nvSpPr>
         <p:spPr>
           <a:xfrm>
-            <a:off x="6825040" y="2304000"/>
+            <a:off x="6825040" y="1764000"/>
             <a:ext cx="4556960" cy="10000"/>
           </a:xfrm>
           <a:prstGeom prst="rect">
@@ -24851,7 +25338,7 @@
         </p:nvSpPr>
         <p:spPr>
           <a:xfrm>
-            <a:off x="6865040" y="2500000"/>
+            <a:off x="6865040" y="1960000"/>
             <a:ext cx="4516960" cy="1785366"/>
           </a:xfrm>
           <a:prstGeom prst="rect">
@@ -25042,6 +25529,217 @@
                 <a:latin typeface="Consolas"/>
               </a:rPr>
               <a:t>$ k rollout undo deploy/web</a:t>
+            </a:r>
+          </a:p>
+        </p:txBody>
+      </p:sp>
+      <p:sp>
+        <p:nvSpPr>
+          <p:cNvPr id="22" name="Rounded Rectangle 21"/>
+          <p:cNvSpPr/>
+          <p:nvPr/>
+        </p:nvSpPr>
+        <p:spPr>
+          <a:xfrm>
+            <a:off x="620000" y="4310000"/>
+            <a:ext cx="10952000" cy="2000000"/>
+          </a:xfrm>
+          <a:prstGeom prst="roundRect">
+            <a:avLst>
+              <a:gd name="adj" fmla="val 4500"/>
+            </a:avLst>
+          </a:prstGeom>
+          <a:solidFill>
+            <a:srgbClr val="111A2C"/>
+          </a:solidFill>
+          <a:ln w="12700">
+            <a:solidFill>
+              <a:srgbClr val="26354E"/>
+            </a:solidFill>
+          </a:ln>
+          <a:effectLst/>
+        </p:spPr>
+        <p:style>
+          <a:lnRef idx="1">
+            <a:schemeClr val="accent1"/>
+          </a:lnRef>
+          <a:fillRef idx="3">
+            <a:schemeClr val="accent1"/>
+          </a:fillRef>
+          <a:effectRef idx="2">
+            <a:schemeClr val="accent1"/>
+          </a:effectRef>
+          <a:fontRef idx="minor">
+            <a:schemeClr val="lt1"/>
+          </a:fontRef>
+        </p:style>
+        <p:txBody>
+          <a:bodyPr rtlCol="0" anchor="ctr" lIns="0" rIns="0" tIns="0" bIns="0">
+            <a:noAutofit/>
+          </a:bodyPr>
+          <a:lstStyle/>
+          <a:p>
+            <a:pPr algn="ctr"/>
+          </a:p>
+        </p:txBody>
+      </p:sp>
+      <p:sp>
+        <p:nvSpPr>
+          <p:cNvPr id="23" name="Rectangle 22"/>
+          <p:cNvSpPr/>
+          <p:nvPr/>
+        </p:nvSpPr>
+        <p:spPr>
+          <a:xfrm>
+            <a:off x="646000" y="4332000"/>
+            <a:ext cx="40000" cy="1956000"/>
+          </a:xfrm>
+          <a:prstGeom prst="rect">
+            <a:avLst/>
+          </a:prstGeom>
+          <a:solidFill>
+            <a:srgbClr val="326CE5"/>
+          </a:solidFill>
+          <a:ln>
+            <a:noFill/>
+          </a:ln>
+          <a:effectLst/>
+        </p:spPr>
+        <p:style>
+          <a:lnRef idx="1">
+            <a:schemeClr val="accent1"/>
+          </a:lnRef>
+          <a:fillRef idx="3">
+            <a:schemeClr val="accent1"/>
+          </a:fillRef>
+          <a:effectRef idx="2">
+            <a:schemeClr val="accent1"/>
+          </a:effectRef>
+          <a:fontRef idx="minor">
+            <a:schemeClr val="lt1"/>
+          </a:fontRef>
+        </p:style>
+        <p:txBody>
+          <a:bodyPr rtlCol="0" anchor="ctr" lIns="0" rIns="0" tIns="0" bIns="0">
+            <a:noAutofit/>
+          </a:bodyPr>
+          <a:lstStyle/>
+          <a:p>
+            <a:pPr algn="ctr"/>
+          </a:p>
+        </p:txBody>
+      </p:sp>
+      <p:sp>
+        <p:nvSpPr>
+          <p:cNvPr id="24" name="TextBox 23"/>
+          <p:cNvSpPr txBox="1"/>
+          <p:nvPr/>
+        </p:nvSpPr>
+        <p:spPr>
+          <a:xfrm>
+            <a:off x="860000" y="4440000"/>
+            <a:ext cx="10522000" cy="1740000"/>
+          </a:xfrm>
+          <a:prstGeom prst="rect">
+            <a:avLst/>
+          </a:prstGeom>
+          <a:noFill/>
+        </p:spPr>
+        <p:txBody>
+          <a:bodyPr wrap="square" anchor="t" lIns="0" rIns="0" tIns="0" bIns="0">
+            <a:noAutofit/>
+          </a:bodyPr>
+          <a:lstStyle/>
+          <a:p>
+            <a:pPr algn="l" marL="0" indent="0">
+              <a:lnSpc>
+                <a:spcPct val="100000"/>
+              </a:lnSpc>
+              <a:spcBef>
+                <a:spcPts val="0"/>
+              </a:spcBef>
+              <a:spcAft>
+                <a:spcPts val="600"/>
+              </a:spcAft>
+              <a:buNone/>
+            </a:pPr>
+            <a:r>
+              <a:rPr sz="900" b="1" i="0" spc="200">
+                <a:solidFill>
+                  <a:srgbClr val="326CE5"/>
+                </a:solidFill>
+                <a:latin typeface="Segoe UI Semibold"/>
+              </a:rPr>
+              <a:t>TEORÍA</a:t>
+            </a:r>
+          </a:p>
+          <a:p>
+            <a:pPr algn="l" marL="0" indent="0">
+              <a:lnSpc>
+                <a:spcPct val="128000"/>
+              </a:lnSpc>
+              <a:spcBef>
+                <a:spcPts val="0"/>
+              </a:spcBef>
+              <a:spcAft>
+                <a:spcPts val="400"/>
+              </a:spcAft>
+              <a:buNone/>
+            </a:pPr>
+            <a:r>
+              <a:rPr sz="1000" b="0" i="0">
+                <a:solidFill>
+                  <a:srgbClr val="BDC9DB"/>
+                </a:solidFill>
+                <a:latin typeface="Segoe UI"/>
+              </a:rPr>
+              <a:t>El comportamiento correcto ante un despliegue defectuoso es que el rollout se detenga, no que caiga el servicio. Si la imagen nueva no existe o el proceso no arranca, el Pod nuevo nunca llega a Ready. Con maxUnavailable en 0, el controlador no puede retirar ninguna réplica vieja hasta tener una nueva lista, así que el rollout se queda a la espera y las réplicas buenas siguen sirviendo indefinidamente.</a:t>
+            </a:r>
+          </a:p>
+          <a:p>
+            <a:pPr algn="l" marL="0" indent="0">
+              <a:lnSpc>
+                <a:spcPct val="128000"/>
+              </a:lnSpc>
+              <a:spcBef>
+                <a:spcPts val="0"/>
+              </a:spcBef>
+              <a:spcAft>
+                <a:spcPts val="400"/>
+              </a:spcAft>
+              <a:buNone/>
+            </a:pPr>
+            <a:r>
+              <a:rPr sz="1000" b="0" i="0">
+                <a:solidFill>
+                  <a:srgbClr val="BDC9DB"/>
+                </a:solidFill>
+                <a:latin typeface="Segoe UI"/>
+              </a:rPr>
+              <a:t>El síntoma es claro: kubectl rollout status se queda en «Waiting for deployment … X out of N new replicas have been updated» y no termina nunca. La solución inmediata es kubectl rollout undo, que vuelve a la revisión anterior.</a:t>
+            </a:r>
+          </a:p>
+          <a:p>
+            <a:pPr algn="l" marL="0" indent="0">
+              <a:lnSpc>
+                <a:spcPct val="128000"/>
+              </a:lnSpc>
+              <a:spcBef>
+                <a:spcPts val="0"/>
+              </a:spcBef>
+              <a:spcAft>
+                <a:spcPts val="400"/>
+              </a:spcAft>
+              <a:buNone/>
+            </a:pPr>
+            <a:r>
+              <a:rPr sz="1000" b="0" i="0">
+                <a:solidFill>
+                  <a:srgbClr val="BDC9DB"/>
+                </a:solidFill>
+                <a:latin typeface="Segoe UI"/>
+              </a:rPr>
+              <a:t>Todo esto depende de tener una readinessProbe. Sin ella, Kubernetes considera «listo» a cualquier Pod que arranque su proceso, aunque la aplicación aún no responda o esté rota; entonces sí entra en el Service, empieza a recibir tráfico y el servicio se degrada. La readinessProbe es lo que convierte un rollout peligroso en uno seguro.</a:t>
             </a:r>
           </a:p>
         </p:txBody>
